--- a/Prezentacja/Smart-piłka_prez.pptx
+++ b/Prezentacja/Smart-piłka_prez.pptx
@@ -5,20 +5,23 @@
     <p:sldMasterId id="2147483648" r:id="rId1"/>
   </p:sldMasterIdLst>
   <p:notesMasterIdLst>
-    <p:notesMasterId r:id="rId13"/>
+    <p:notesMasterId r:id="rId16"/>
   </p:notesMasterIdLst>
   <p:sldIdLst>
     <p:sldId id="256" r:id="rId2"/>
     <p:sldId id="259" r:id="rId3"/>
-    <p:sldId id="257" r:id="rId4"/>
-    <p:sldId id="262" r:id="rId5"/>
-    <p:sldId id="263" r:id="rId6"/>
-    <p:sldId id="258" r:id="rId7"/>
-    <p:sldId id="264" r:id="rId8"/>
-    <p:sldId id="265" r:id="rId9"/>
-    <p:sldId id="261" r:id="rId10"/>
-    <p:sldId id="266" r:id="rId11"/>
-    <p:sldId id="267" r:id="rId12"/>
+    <p:sldId id="269" r:id="rId4"/>
+    <p:sldId id="270" r:id="rId5"/>
+    <p:sldId id="257" r:id="rId6"/>
+    <p:sldId id="262" r:id="rId7"/>
+    <p:sldId id="263" r:id="rId8"/>
+    <p:sldId id="258" r:id="rId9"/>
+    <p:sldId id="264" r:id="rId10"/>
+    <p:sldId id="265" r:id="rId11"/>
+    <p:sldId id="261" r:id="rId12"/>
+    <p:sldId id="266" r:id="rId13"/>
+    <p:sldId id="267" r:id="rId14"/>
+    <p:sldId id="268" r:id="rId15"/>
   </p:sldIdLst>
   <p:sldSz cx="12192000" cy="6858000"/>
   <p:notesSz cx="6858000" cy="9144000"/>
@@ -207,7 +210,7 @@
           <a:p>
             <a:fld id="{B12759A3-CAA2-40DA-AA5E-716B696E05E3}" type="datetimeFigureOut">
               <a:rPr lang="pl-PL" smtClean="0"/>
-              <a:t>7.10.2025</a:t>
+              <a:t>28.10.2025</a:t>
             </a:fld>
             <a:endParaRPr lang="pl-PL"/>
           </a:p>
@@ -540,7 +543,7 @@
           <a:p>
             <a:fld id="{D47B9CAA-5604-43F1-94F3-B12E66300A05}" type="slidenum">
               <a:rPr lang="pl-PL" smtClean="0"/>
-              <a:t>4</a:t>
+              <a:t>6</a:t>
             </a:fld>
             <a:endParaRPr lang="pl-PL"/>
           </a:p>
@@ -708,7 +711,7 @@
           <a:p>
             <a:fld id="{B195F02D-787D-418D-91FA-B9ACD8A789B6}" type="datetimeFigureOut">
               <a:rPr lang="pl-PL" smtClean="0"/>
-              <a:t>7.10.2025</a:t>
+              <a:t>28.10.2025</a:t>
             </a:fld>
             <a:endParaRPr lang="pl-PL"/>
           </a:p>
@@ -908,7 +911,7 @@
           <a:p>
             <a:fld id="{B195F02D-787D-418D-91FA-B9ACD8A789B6}" type="datetimeFigureOut">
               <a:rPr lang="pl-PL" smtClean="0"/>
-              <a:t>7.10.2025</a:t>
+              <a:t>28.10.2025</a:t>
             </a:fld>
             <a:endParaRPr lang="pl-PL"/>
           </a:p>
@@ -1118,7 +1121,7 @@
           <a:p>
             <a:fld id="{B195F02D-787D-418D-91FA-B9ACD8A789B6}" type="datetimeFigureOut">
               <a:rPr lang="pl-PL" smtClean="0"/>
-              <a:t>7.10.2025</a:t>
+              <a:t>28.10.2025</a:t>
             </a:fld>
             <a:endParaRPr lang="pl-PL"/>
           </a:p>
@@ -1318,7 +1321,7 @@
           <a:p>
             <a:fld id="{B195F02D-787D-418D-91FA-B9ACD8A789B6}" type="datetimeFigureOut">
               <a:rPr lang="pl-PL" smtClean="0"/>
-              <a:t>7.10.2025</a:t>
+              <a:t>28.10.2025</a:t>
             </a:fld>
             <a:endParaRPr lang="pl-PL"/>
           </a:p>
@@ -1594,7 +1597,7 @@
           <a:p>
             <a:fld id="{B195F02D-787D-418D-91FA-B9ACD8A789B6}" type="datetimeFigureOut">
               <a:rPr lang="pl-PL" smtClean="0"/>
-              <a:t>7.10.2025</a:t>
+              <a:t>28.10.2025</a:t>
             </a:fld>
             <a:endParaRPr lang="pl-PL"/>
           </a:p>
@@ -1862,7 +1865,7 @@
           <a:p>
             <a:fld id="{B195F02D-787D-418D-91FA-B9ACD8A789B6}" type="datetimeFigureOut">
               <a:rPr lang="pl-PL" smtClean="0"/>
-              <a:t>7.10.2025</a:t>
+              <a:t>28.10.2025</a:t>
             </a:fld>
             <a:endParaRPr lang="pl-PL"/>
           </a:p>
@@ -2277,7 +2280,7 @@
           <a:p>
             <a:fld id="{B195F02D-787D-418D-91FA-B9ACD8A789B6}" type="datetimeFigureOut">
               <a:rPr lang="pl-PL" smtClean="0"/>
-              <a:t>7.10.2025</a:t>
+              <a:t>28.10.2025</a:t>
             </a:fld>
             <a:endParaRPr lang="pl-PL"/>
           </a:p>
@@ -2419,7 +2422,7 @@
           <a:p>
             <a:fld id="{B195F02D-787D-418D-91FA-B9ACD8A789B6}" type="datetimeFigureOut">
               <a:rPr lang="pl-PL" smtClean="0"/>
-              <a:t>7.10.2025</a:t>
+              <a:t>28.10.2025</a:t>
             </a:fld>
             <a:endParaRPr lang="pl-PL"/>
           </a:p>
@@ -2532,7 +2535,7 @@
           <a:p>
             <a:fld id="{B195F02D-787D-418D-91FA-B9ACD8A789B6}" type="datetimeFigureOut">
               <a:rPr lang="pl-PL" smtClean="0"/>
-              <a:t>7.10.2025</a:t>
+              <a:t>28.10.2025</a:t>
             </a:fld>
             <a:endParaRPr lang="pl-PL"/>
           </a:p>
@@ -2845,7 +2848,7 @@
           <a:p>
             <a:fld id="{B195F02D-787D-418D-91FA-B9ACD8A789B6}" type="datetimeFigureOut">
               <a:rPr lang="pl-PL" smtClean="0"/>
-              <a:t>7.10.2025</a:t>
+              <a:t>28.10.2025</a:t>
             </a:fld>
             <a:endParaRPr lang="pl-PL"/>
           </a:p>
@@ -3134,7 +3137,7 @@
           <a:p>
             <a:fld id="{B195F02D-787D-418D-91FA-B9ACD8A789B6}" type="datetimeFigureOut">
               <a:rPr lang="pl-PL" smtClean="0"/>
-              <a:t>7.10.2025</a:t>
+              <a:t>28.10.2025</a:t>
             </a:fld>
             <a:endParaRPr lang="pl-PL"/>
           </a:p>
@@ -3377,7 +3380,7 @@
           <a:p>
             <a:fld id="{B195F02D-787D-418D-91FA-B9ACD8A789B6}" type="datetimeFigureOut">
               <a:rPr lang="pl-PL" smtClean="0"/>
-              <a:t>7.10.2025</a:t>
+              <a:t>28.10.2025</a:t>
             </a:fld>
             <a:endParaRPr lang="pl-PL"/>
           </a:p>
@@ -4440,6 +4443,2062 @@
       </p:grpSpPr>
       <p:sp useBgFill="1">
         <p:nvSpPr>
+          <p:cNvPr id="9" name="Rectangle 8">
+            <a:extLst>
+              <a:ext uri="{FF2B5EF4-FFF2-40B4-BE49-F238E27FC236}">
+                <a16:creationId xmlns:a16="http://schemas.microsoft.com/office/drawing/2014/main" id="{A8384FB5-9ADC-4DDC-881B-597D56F5B15D}"/>
+              </a:ext>
+              <a:ext uri="{C183D7F6-B498-43B3-948B-1728B52AA6E4}">
+                <adec:decorative xmlns:adec="http://schemas.microsoft.com/office/drawing/2017/decorative" val="1"/>
+              </a:ext>
+            </a:extLst>
+          </p:cNvPr>
+          <p:cNvSpPr>
+            <a:spLocks noGrp="1" noRot="1" noChangeAspect="1" noMove="1" noResize="1" noEditPoints="1" noAdjustHandles="1" noChangeArrowheads="1" noChangeShapeType="1" noTextEdit="1"/>
+          </p:cNvSpPr>
+          <p:nvPr>
+            <p:extLst>
+              <p:ext uri="{386F3935-93C4-4BCD-93E2-E3B085C9AB24}">
+                <p16:designElem xmlns:p16="http://schemas.microsoft.com/office/powerpoint/2015/main" val="1"/>
+              </p:ext>
+            </p:extLst>
+          </p:nvPr>
+        </p:nvSpPr>
+        <p:spPr>
+          <a:xfrm>
+            <a:off x="0" y="0"/>
+            <a:ext cx="12192000" cy="6858000"/>
+          </a:xfrm>
+          <a:prstGeom prst="rect">
+            <a:avLst/>
+          </a:prstGeom>
+          <a:ln w="12700" cap="flat" cmpd="sng" algn="ctr">
+            <a:noFill/>
+            <a:prstDash val="solid"/>
+            <a:miter lim="800000"/>
+          </a:ln>
+          <a:effectLst/>
+          <a:extLst>
+            <a:ext uri="{91240B29-F687-4F45-9708-019B960494DF}">
+              <a14:hiddenLine xmlns:a14="http://schemas.microsoft.com/office/drawing/2010/main" w="12700" cap="flat" cmpd="sng" algn="ctr">
+                <a:solidFill>
+                  <a:schemeClr val="accent1">
+                    <a:shade val="50000"/>
+                  </a:schemeClr>
+                </a:solidFill>
+                <a:prstDash val="solid"/>
+                <a:miter lim="800000"/>
+              </a14:hiddenLine>
+            </a:ext>
+          </a:extLst>
+        </p:spPr>
+        <p:style>
+          <a:lnRef idx="2">
+            <a:schemeClr val="accent1">
+              <a:shade val="50000"/>
+            </a:schemeClr>
+          </a:lnRef>
+          <a:fillRef idx="1">
+            <a:schemeClr val="accent1"/>
+          </a:fillRef>
+          <a:effectRef idx="0">
+            <a:schemeClr val="accent1"/>
+          </a:effectRef>
+          <a:fontRef idx="minor">
+            <a:schemeClr val="lt1"/>
+          </a:fontRef>
+        </p:style>
+        <p:txBody>
+          <a:bodyPr rtlCol="0" anchor="ctr"/>
+          <a:lstStyle/>
+          <a:p>
+            <a:pPr algn="ctr"/>
+            <a:endParaRPr lang="en-US"/>
+          </a:p>
+        </p:txBody>
+      </p:sp>
+      <p:sp>
+        <p:nvSpPr>
+          <p:cNvPr id="11" name="Rectangle 10">
+            <a:extLst>
+              <a:ext uri="{FF2B5EF4-FFF2-40B4-BE49-F238E27FC236}">
+                <a16:creationId xmlns:a16="http://schemas.microsoft.com/office/drawing/2014/main" id="{1199E1B1-A8C0-4FE8-A5A8-1CB41D69F857}"/>
+              </a:ext>
+              <a:ext uri="{C183D7F6-B498-43B3-948B-1728B52AA6E4}">
+                <adec:decorative xmlns:adec="http://schemas.microsoft.com/office/drawing/2017/decorative" val="1"/>
+              </a:ext>
+            </a:extLst>
+          </p:cNvPr>
+          <p:cNvSpPr>
+            <a:spLocks noGrp="1" noRot="1" noChangeAspect="1" noMove="1" noResize="1" noEditPoints="1" noAdjustHandles="1" noChangeArrowheads="1" noChangeShapeType="1" noTextEdit="1"/>
+          </p:cNvSpPr>
+          <p:nvPr>
+            <p:extLst>
+              <p:ext uri="{386F3935-93C4-4BCD-93E2-E3B085C9AB24}">
+                <p16:designElem xmlns:p16="http://schemas.microsoft.com/office/powerpoint/2015/main" val="1"/>
+              </p:ext>
+            </p:extLst>
+          </p:nvPr>
+        </p:nvSpPr>
+        <p:spPr>
+          <a:xfrm rot="10800000" flipH="1">
+            <a:off x="2" y="0"/>
+            <a:ext cx="12191998" cy="1575955"/>
+          </a:xfrm>
+          <a:prstGeom prst="rect">
+            <a:avLst/>
+          </a:prstGeom>
+          <a:gradFill>
+            <a:gsLst>
+              <a:gs pos="0">
+                <a:srgbClr val="000000">
+                  <a:alpha val="96000"/>
+                </a:srgbClr>
+              </a:gs>
+              <a:gs pos="100000">
+                <a:schemeClr val="accent1">
+                  <a:lumMod val="75000"/>
+                </a:schemeClr>
+              </a:gs>
+            </a:gsLst>
+            <a:lin ang="6000000" scaled="0"/>
+          </a:gradFill>
+          <a:ln>
+            <a:noFill/>
+          </a:ln>
+        </p:spPr>
+        <p:style>
+          <a:lnRef idx="2">
+            <a:schemeClr val="accent1">
+              <a:shade val="50000"/>
+            </a:schemeClr>
+          </a:lnRef>
+          <a:fillRef idx="1">
+            <a:schemeClr val="accent1"/>
+          </a:fillRef>
+          <a:effectRef idx="0">
+            <a:schemeClr val="accent1"/>
+          </a:effectRef>
+          <a:fontRef idx="minor">
+            <a:schemeClr val="lt1"/>
+          </a:fontRef>
+        </p:style>
+        <p:txBody>
+          <a:bodyPr rtlCol="0" anchor="ctr"/>
+          <a:lstStyle/>
+          <a:p>
+            <a:pPr algn="ctr"/>
+            <a:endParaRPr lang="en-US"/>
+          </a:p>
+        </p:txBody>
+      </p:sp>
+      <p:sp>
+        <p:nvSpPr>
+          <p:cNvPr id="13" name="Rectangle 12">
+            <a:extLst>
+              <a:ext uri="{FF2B5EF4-FFF2-40B4-BE49-F238E27FC236}">
+                <a16:creationId xmlns:a16="http://schemas.microsoft.com/office/drawing/2014/main" id="{84A8DE83-DE75-4B41-9DB4-A7EC0B0DEC0B}"/>
+              </a:ext>
+              <a:ext uri="{C183D7F6-B498-43B3-948B-1728B52AA6E4}">
+                <adec:decorative xmlns:adec="http://schemas.microsoft.com/office/drawing/2017/decorative" val="1"/>
+              </a:ext>
+            </a:extLst>
+          </p:cNvPr>
+          <p:cNvSpPr>
+            <a:spLocks noGrp="1" noRot="1" noChangeAspect="1" noMove="1" noResize="1" noEditPoints="1" noAdjustHandles="1" noChangeArrowheads="1" noChangeShapeType="1" noTextEdit="1"/>
+          </p:cNvSpPr>
+          <p:nvPr>
+            <p:extLst>
+              <p:ext uri="{386F3935-93C4-4BCD-93E2-E3B085C9AB24}">
+                <p16:designElem xmlns:p16="http://schemas.microsoft.com/office/powerpoint/2015/main" val="1"/>
+              </p:ext>
+            </p:extLst>
+          </p:nvPr>
+        </p:nvSpPr>
+        <p:spPr>
+          <a:xfrm>
+            <a:off x="0" y="0"/>
+            <a:ext cx="8128856" cy="1575461"/>
+          </a:xfrm>
+          <a:prstGeom prst="rect">
+            <a:avLst/>
+          </a:prstGeom>
+          <a:gradFill>
+            <a:gsLst>
+              <a:gs pos="0">
+                <a:schemeClr val="accent1">
+                  <a:alpha val="41000"/>
+                </a:schemeClr>
+              </a:gs>
+              <a:gs pos="74000">
+                <a:schemeClr val="accent1">
+                  <a:lumMod val="60000"/>
+                  <a:lumOff val="40000"/>
+                  <a:alpha val="0"/>
+                </a:schemeClr>
+              </a:gs>
+            </a:gsLst>
+            <a:lin ang="8400000" scaled="0"/>
+          </a:gradFill>
+          <a:ln>
+            <a:noFill/>
+          </a:ln>
+        </p:spPr>
+        <p:style>
+          <a:lnRef idx="2">
+            <a:schemeClr val="accent1">
+              <a:shade val="50000"/>
+            </a:schemeClr>
+          </a:lnRef>
+          <a:fillRef idx="1">
+            <a:schemeClr val="accent1"/>
+          </a:fillRef>
+          <a:effectRef idx="0">
+            <a:schemeClr val="accent1"/>
+          </a:effectRef>
+          <a:fontRef idx="minor">
+            <a:schemeClr val="lt1"/>
+          </a:fontRef>
+        </p:style>
+        <p:txBody>
+          <a:bodyPr rtlCol="0" anchor="ctr"/>
+          <a:lstStyle/>
+          <a:p>
+            <a:pPr algn="ctr"/>
+            <a:endParaRPr lang="en-US"/>
+          </a:p>
+        </p:txBody>
+      </p:sp>
+      <p:sp>
+        <p:nvSpPr>
+          <p:cNvPr id="15" name="Rectangle 14">
+            <a:extLst>
+              <a:ext uri="{FF2B5EF4-FFF2-40B4-BE49-F238E27FC236}">
+                <a16:creationId xmlns:a16="http://schemas.microsoft.com/office/drawing/2014/main" id="{A7009A0A-BEF5-4EAC-AF15-E4F9F002E239}"/>
+              </a:ext>
+              <a:ext uri="{C183D7F6-B498-43B3-948B-1728B52AA6E4}">
+                <adec:decorative xmlns:adec="http://schemas.microsoft.com/office/drawing/2017/decorative" val="1"/>
+              </a:ext>
+            </a:extLst>
+          </p:cNvPr>
+          <p:cNvSpPr>
+            <a:spLocks noGrp="1" noRot="1" noChangeAspect="1" noMove="1" noResize="1" noEditPoints="1" noAdjustHandles="1" noChangeArrowheads="1" noChangeShapeType="1" noTextEdit="1"/>
+          </p:cNvSpPr>
+          <p:nvPr>
+            <p:extLst>
+              <p:ext uri="{386F3935-93C4-4BCD-93E2-E3B085C9AB24}">
+                <p16:designElem xmlns:p16="http://schemas.microsoft.com/office/powerpoint/2015/main" val="1"/>
+              </p:ext>
+            </p:extLst>
+          </p:nvPr>
+        </p:nvSpPr>
+        <p:spPr>
+          <a:xfrm flipH="1">
+            <a:off x="-3" y="-1"/>
+            <a:ext cx="12192002" cy="1574311"/>
+          </a:xfrm>
+          <a:prstGeom prst="rect">
+            <a:avLst/>
+          </a:prstGeom>
+          <a:gradFill>
+            <a:gsLst>
+              <a:gs pos="0">
+                <a:srgbClr val="000000">
+                  <a:alpha val="63000"/>
+                </a:srgbClr>
+              </a:gs>
+              <a:gs pos="78000">
+                <a:schemeClr val="accent1">
+                  <a:alpha val="15000"/>
+                </a:schemeClr>
+              </a:gs>
+            </a:gsLst>
+            <a:lin ang="15600000" scaled="0"/>
+          </a:gradFill>
+          <a:ln>
+            <a:noFill/>
+          </a:ln>
+        </p:spPr>
+        <p:style>
+          <a:lnRef idx="2">
+            <a:schemeClr val="accent1">
+              <a:shade val="50000"/>
+            </a:schemeClr>
+          </a:lnRef>
+          <a:fillRef idx="1">
+            <a:schemeClr val="accent1"/>
+          </a:fillRef>
+          <a:effectRef idx="0">
+            <a:schemeClr val="accent1"/>
+          </a:effectRef>
+          <a:fontRef idx="minor">
+            <a:schemeClr val="lt1"/>
+          </a:fontRef>
+        </p:style>
+        <p:txBody>
+          <a:bodyPr rtlCol="0" anchor="ctr"/>
+          <a:lstStyle/>
+          <a:p>
+            <a:pPr algn="ctr"/>
+            <a:endParaRPr lang="en-US"/>
+          </a:p>
+        </p:txBody>
+      </p:sp>
+      <p:sp>
+        <p:nvSpPr>
+          <p:cNvPr id="2" name="Title 1">
+            <a:extLst>
+              <a:ext uri="{FF2B5EF4-FFF2-40B4-BE49-F238E27FC236}">
+                <a16:creationId xmlns:a16="http://schemas.microsoft.com/office/drawing/2014/main" id="{9FB2FDB8-4429-972E-A3CA-83B0FDC57953}"/>
+              </a:ext>
+            </a:extLst>
+          </p:cNvPr>
+          <p:cNvSpPr>
+            <a:spLocks noGrp="1"/>
+          </p:cNvSpPr>
+          <p:nvPr>
+            <p:ph type="title"/>
+          </p:nvPr>
+        </p:nvSpPr>
+        <p:spPr>
+          <a:xfrm>
+            <a:off x="699713" y="248038"/>
+            <a:ext cx="7063721" cy="1159200"/>
+          </a:xfrm>
+        </p:spPr>
+        <p:txBody>
+          <a:bodyPr vert="horz" lIns="91440" tIns="45720" rIns="91440" bIns="45720" rtlCol="0" anchor="ctr">
+            <a:normAutofit/>
+          </a:bodyPr>
+          <a:lstStyle/>
+          <a:p>
+            <a:r>
+              <a:rPr lang="en-US" sz="4000" kern="1200">
+                <a:solidFill>
+                  <a:srgbClr val="FFFFFF"/>
+                </a:solidFill>
+                <a:latin typeface="+mj-lt"/>
+                <a:ea typeface="+mj-ea"/>
+                <a:cs typeface="+mj-cs"/>
+              </a:rPr>
+              <a:t>Dostępne czujniki</a:t>
+            </a:r>
+          </a:p>
+        </p:txBody>
+      </p:sp>
+      <p:graphicFrame>
+        <p:nvGraphicFramePr>
+          <p:cNvPr id="4" name="Content Placeholder 3">
+            <a:extLst>
+              <a:ext uri="{FF2B5EF4-FFF2-40B4-BE49-F238E27FC236}">
+                <a16:creationId xmlns:a16="http://schemas.microsoft.com/office/drawing/2014/main" id="{308C0FAC-A52E-0D03-0BC4-86390973888F}"/>
+              </a:ext>
+            </a:extLst>
+          </p:cNvPr>
+          <p:cNvGraphicFramePr>
+            <a:graphicFrameLocks noGrp="1"/>
+          </p:cNvGraphicFramePr>
+          <p:nvPr>
+            <p:ph idx="1"/>
+            <p:extLst>
+              <p:ext uri="{D42A27DB-BD31-4B8C-83A1-F6EECF244321}">
+                <p14:modId xmlns:p14="http://schemas.microsoft.com/office/powerpoint/2010/main" val="3490197104"/>
+              </p:ext>
+            </p:extLst>
+          </p:nvPr>
+        </p:nvGraphicFramePr>
+        <p:xfrm>
+          <a:off x="2292515" y="1966293"/>
+          <a:ext cx="7606971" cy="4452176"/>
+        </p:xfrm>
+        <a:graphic>
+          <a:graphicData uri="http://schemas.openxmlformats.org/drawingml/2006/table">
+            <a:tbl>
+              <a:tblPr>
+                <a:tableStyleId>{69012ECD-51FC-41F1-AA8D-1B2483CD663E}</a:tableStyleId>
+              </a:tblPr>
+              <a:tblGrid>
+                <a:gridCol w="2285698">
+                  <a:extLst>
+                    <a:ext uri="{9D8B030D-6E8A-4147-A177-3AD203B41FA5}">
+                      <a16:colId xmlns:a16="http://schemas.microsoft.com/office/drawing/2014/main" val="2096868303"/>
+                    </a:ext>
+                  </a:extLst>
+                </a:gridCol>
+                <a:gridCol w="2371019">
+                  <a:extLst>
+                    <a:ext uri="{9D8B030D-6E8A-4147-A177-3AD203B41FA5}">
+                      <a16:colId xmlns:a16="http://schemas.microsoft.com/office/drawing/2014/main" val="2021592566"/>
+                    </a:ext>
+                  </a:extLst>
+                </a:gridCol>
+                <a:gridCol w="2950254">
+                  <a:extLst>
+                    <a:ext uri="{9D8B030D-6E8A-4147-A177-3AD203B41FA5}">
+                      <a16:colId xmlns:a16="http://schemas.microsoft.com/office/drawing/2014/main" val="2784358822"/>
+                    </a:ext>
+                  </a:extLst>
+                </a:gridCol>
+              </a:tblGrid>
+              <a:tr h="236920">
+                <a:tc>
+                  <a:txBody>
+                    <a:bodyPr/>
+                    <a:lstStyle/>
+                    <a:p>
+                      <a:pPr algn="l" fontAlgn="b">
+                        <a:buNone/>
+                      </a:pPr>
+                      <a:r>
+                        <a:rPr lang="pl-PL" sz="1200" u="none" strike="noStrike">
+                          <a:effectLst/>
+                        </a:rPr>
+                        <a:t>Urzadzenie</a:t>
+                      </a:r>
+                      <a:endParaRPr lang="pl-PL" sz="1200" b="0" i="0" u="none" strike="noStrike">
+                        <a:solidFill>
+                          <a:srgbClr val="000000"/>
+                        </a:solidFill>
+                        <a:effectLst/>
+                        <a:latin typeface="Aptos Narrow" panose="020B0004020202020204" pitchFamily="34" charset="0"/>
+                      </a:endParaRPr>
+                    </a:p>
+                  </a:txBody>
+                  <a:tcPr marL="8368" marR="8368" marT="8368" marB="0" anchor="b"/>
+                </a:tc>
+                <a:tc>
+                  <a:txBody>
+                    <a:bodyPr/>
+                    <a:lstStyle/>
+                    <a:p>
+                      <a:pPr algn="l" fontAlgn="b">
+                        <a:buNone/>
+                      </a:pPr>
+                      <a:r>
+                        <a:rPr lang="pl-PL" sz="1200" u="none" strike="noStrike">
+                          <a:effectLst/>
+                        </a:rPr>
+                        <a:t>IAM-20380HT</a:t>
+                      </a:r>
+                      <a:endParaRPr lang="pl-PL" sz="1200" b="0" i="0" u="none" strike="noStrike">
+                        <a:solidFill>
+                          <a:srgbClr val="000000"/>
+                        </a:solidFill>
+                        <a:effectLst/>
+                        <a:latin typeface="Calibri" panose="020F0502020204030204" pitchFamily="34" charset="0"/>
+                      </a:endParaRPr>
+                    </a:p>
+                  </a:txBody>
+                  <a:tcPr marL="8368" marR="8368" marT="8368" marB="0" anchor="b"/>
+                </a:tc>
+                <a:tc>
+                  <a:txBody>
+                    <a:bodyPr/>
+                    <a:lstStyle/>
+                    <a:p>
+                      <a:pPr algn="l" fontAlgn="b">
+                        <a:buNone/>
+                      </a:pPr>
+                      <a:r>
+                        <a:rPr lang="pl-PL" sz="1200" u="none" strike="noStrike" dirty="0">
+                          <a:effectLst/>
+                        </a:rPr>
+                        <a:t>I3G4250DTR</a:t>
+                      </a:r>
+                      <a:endParaRPr lang="pl-PL" sz="1200" b="0" i="0" u="none" strike="noStrike" dirty="0">
+                        <a:solidFill>
+                          <a:srgbClr val="000000"/>
+                        </a:solidFill>
+                        <a:effectLst/>
+                        <a:latin typeface="Calibri" panose="020F0502020204030204" pitchFamily="34" charset="0"/>
+                      </a:endParaRPr>
+                    </a:p>
+                  </a:txBody>
+                  <a:tcPr marL="8368" marR="8368" marT="8368" marB="0" anchor="b"/>
+                </a:tc>
+                <a:extLst>
+                  <a:ext uri="{0D108BD9-81ED-4DB2-BD59-A6C34878D82A}">
+                    <a16:rowId xmlns:a16="http://schemas.microsoft.com/office/drawing/2014/main" val="6816885"/>
+                  </a:ext>
+                </a:extLst>
+              </a:tr>
+              <a:tr h="424536">
+                <a:tc>
+                  <a:txBody>
+                    <a:bodyPr/>
+                    <a:lstStyle/>
+                    <a:p>
+                      <a:pPr algn="l" fontAlgn="b">
+                        <a:buNone/>
+                      </a:pPr>
+                      <a:r>
+                        <a:rPr lang="pl-PL" sz="1200" u="none" strike="noStrike">
+                          <a:effectLst/>
+                        </a:rPr>
+                        <a:t>Maks. Zakres FSR</a:t>
+                      </a:r>
+                      <a:endParaRPr lang="pl-PL" sz="1200" b="0" i="0" u="none" strike="noStrike">
+                        <a:solidFill>
+                          <a:srgbClr val="000000"/>
+                        </a:solidFill>
+                        <a:effectLst/>
+                        <a:latin typeface="Aptos Narrow" panose="020B0004020202020204" pitchFamily="34" charset="0"/>
+                      </a:endParaRPr>
+                    </a:p>
+                  </a:txBody>
+                  <a:tcPr marL="8368" marR="8368" marT="8368" marB="0" anchor="b"/>
+                </a:tc>
+                <a:tc>
+                  <a:txBody>
+                    <a:bodyPr/>
+                    <a:lstStyle/>
+                    <a:p>
+                      <a:pPr algn="l" fontAlgn="b">
+                        <a:buNone/>
+                      </a:pPr>
+                      <a:r>
+                        <a:rPr lang="en-US" sz="1200" u="none" strike="noStrike" dirty="0">
+                          <a:effectLst/>
+                        </a:rPr>
+                        <a:t>±250dps, ±500dps, ±1000dps, and ±2000dps,</a:t>
+                      </a:r>
+                      <a:endParaRPr lang="en-US" sz="1200" b="0" i="0" u="none" strike="noStrike" dirty="0">
+                        <a:solidFill>
+                          <a:srgbClr val="000000"/>
+                        </a:solidFill>
+                        <a:effectLst/>
+                        <a:latin typeface="Aptos Narrow" panose="020B0004020202020204" pitchFamily="34" charset="0"/>
+                      </a:endParaRPr>
+                    </a:p>
+                  </a:txBody>
+                  <a:tcPr marL="8368" marR="8368" marT="8368" marB="0" anchor="b"/>
+                </a:tc>
+                <a:tc>
+                  <a:txBody>
+                    <a:bodyPr/>
+                    <a:lstStyle/>
+                    <a:p>
+                      <a:pPr algn="l" fontAlgn="b">
+                        <a:buNone/>
+                      </a:pPr>
+                      <a:r>
+                        <a:rPr lang="pl-PL" sz="1200" u="none" strike="noStrike">
+                          <a:effectLst/>
+                        </a:rPr>
+                        <a:t>±245/±500/±2000g</a:t>
+                      </a:r>
+                      <a:endParaRPr lang="pl-PL" sz="1200" b="0" i="0" u="none" strike="noStrike">
+                        <a:solidFill>
+                          <a:srgbClr val="000000"/>
+                        </a:solidFill>
+                        <a:effectLst/>
+                        <a:latin typeface="Aptos Narrow" panose="020B0004020202020204" pitchFamily="34" charset="0"/>
+                      </a:endParaRPr>
+                    </a:p>
+                  </a:txBody>
+                  <a:tcPr marL="8368" marR="8368" marT="8368" marB="0" anchor="b"/>
+                </a:tc>
+                <a:extLst>
+                  <a:ext uri="{0D108BD9-81ED-4DB2-BD59-A6C34878D82A}">
+                    <a16:rowId xmlns:a16="http://schemas.microsoft.com/office/drawing/2014/main" val="1609692079"/>
+                  </a:ext>
+                </a:extLst>
+              </a:tr>
+              <a:tr h="236920">
+                <a:tc>
+                  <a:txBody>
+                    <a:bodyPr/>
+                    <a:lstStyle/>
+                    <a:p>
+                      <a:pPr algn="l" fontAlgn="b">
+                        <a:buNone/>
+                      </a:pPr>
+                      <a:r>
+                        <a:rPr lang="pl-PL" sz="1200" u="none" strike="noStrike">
+                          <a:effectLst/>
+                        </a:rPr>
+                        <a:t>Rozdzielczość ADCs</a:t>
+                      </a:r>
+                      <a:endParaRPr lang="pl-PL" sz="1200" b="0" i="0" u="none" strike="noStrike">
+                        <a:solidFill>
+                          <a:srgbClr val="000000"/>
+                        </a:solidFill>
+                        <a:effectLst/>
+                        <a:latin typeface="Aptos Narrow" panose="020B0004020202020204" pitchFamily="34" charset="0"/>
+                      </a:endParaRPr>
+                    </a:p>
+                  </a:txBody>
+                  <a:tcPr marL="8368" marR="8368" marT="8368" marB="0" anchor="b"/>
+                </a:tc>
+                <a:tc>
+                  <a:txBody>
+                    <a:bodyPr/>
+                    <a:lstStyle/>
+                    <a:p>
+                      <a:pPr algn="l" fontAlgn="b">
+                        <a:buNone/>
+                      </a:pPr>
+                      <a:r>
+                        <a:rPr lang="pl-PL" sz="1200" u="none" strike="noStrike">
+                          <a:effectLst/>
+                        </a:rPr>
+                        <a:t>16 bit</a:t>
+                      </a:r>
+                      <a:endParaRPr lang="pl-PL" sz="1200" b="0" i="0" u="none" strike="noStrike">
+                        <a:solidFill>
+                          <a:srgbClr val="000000"/>
+                        </a:solidFill>
+                        <a:effectLst/>
+                        <a:latin typeface="Aptos Narrow" panose="020B0004020202020204" pitchFamily="34" charset="0"/>
+                      </a:endParaRPr>
+                    </a:p>
+                  </a:txBody>
+                  <a:tcPr marL="8368" marR="8368" marT="8368" marB="0" anchor="b"/>
+                </a:tc>
+                <a:tc>
+                  <a:txBody>
+                    <a:bodyPr/>
+                    <a:lstStyle/>
+                    <a:p>
+                      <a:pPr algn="l" fontAlgn="b">
+                        <a:buNone/>
+                      </a:pPr>
+                      <a:r>
+                        <a:rPr lang="pl-PL" sz="1200" u="none" strike="noStrike">
+                          <a:effectLst/>
+                        </a:rPr>
+                        <a:t>16 bit</a:t>
+                      </a:r>
+                      <a:endParaRPr lang="pl-PL" sz="1200" b="0" i="0" u="none" strike="noStrike">
+                        <a:solidFill>
+                          <a:srgbClr val="000000"/>
+                        </a:solidFill>
+                        <a:effectLst/>
+                        <a:latin typeface="Aptos Narrow" panose="020B0004020202020204" pitchFamily="34" charset="0"/>
+                      </a:endParaRPr>
+                    </a:p>
+                  </a:txBody>
+                  <a:tcPr marL="8368" marR="8368" marT="8368" marB="0" anchor="b"/>
+                </a:tc>
+                <a:extLst>
+                  <a:ext uri="{0D108BD9-81ED-4DB2-BD59-A6C34878D82A}">
+                    <a16:rowId xmlns:a16="http://schemas.microsoft.com/office/drawing/2014/main" val="1503203970"/>
+                  </a:ext>
+                </a:extLst>
+              </a:tr>
+              <a:tr h="236920">
+                <a:tc>
+                  <a:txBody>
+                    <a:bodyPr/>
+                    <a:lstStyle/>
+                    <a:p>
+                      <a:pPr algn="l" fontAlgn="b">
+                        <a:buNone/>
+                      </a:pPr>
+                      <a:r>
+                        <a:rPr lang="pl-PL" sz="1200" u="none" strike="noStrike">
+                          <a:effectLst/>
+                        </a:rPr>
+                        <a:t>Odpornosc na wstrzasy</a:t>
+                      </a:r>
+                      <a:endParaRPr lang="pl-PL" sz="1200" b="0" i="0" u="none" strike="noStrike">
+                        <a:solidFill>
+                          <a:srgbClr val="000000"/>
+                        </a:solidFill>
+                        <a:effectLst/>
+                        <a:latin typeface="Aptos Narrow" panose="020B0004020202020204" pitchFamily="34" charset="0"/>
+                      </a:endParaRPr>
+                    </a:p>
+                  </a:txBody>
+                  <a:tcPr marL="8368" marR="8368" marT="8368" marB="0" anchor="b"/>
+                </a:tc>
+                <a:tc>
+                  <a:txBody>
+                    <a:bodyPr/>
+                    <a:lstStyle/>
+                    <a:p>
+                      <a:pPr algn="l" fontAlgn="b">
+                        <a:buNone/>
+                      </a:pPr>
+                      <a:r>
+                        <a:rPr lang="pl-PL" sz="1200" u="none" strike="noStrike">
+                          <a:effectLst/>
+                        </a:rPr>
+                        <a:t>10000g</a:t>
+                      </a:r>
+                      <a:endParaRPr lang="pl-PL" sz="1200" b="0" i="0" u="none" strike="noStrike">
+                        <a:solidFill>
+                          <a:srgbClr val="000000"/>
+                        </a:solidFill>
+                        <a:effectLst/>
+                        <a:latin typeface="Aptos Narrow" panose="020B0004020202020204" pitchFamily="34" charset="0"/>
+                      </a:endParaRPr>
+                    </a:p>
+                  </a:txBody>
+                  <a:tcPr marL="8368" marR="8368" marT="8368" marB="0" anchor="b"/>
+                </a:tc>
+                <a:tc>
+                  <a:txBody>
+                    <a:bodyPr/>
+                    <a:lstStyle/>
+                    <a:p>
+                      <a:pPr algn="l" fontAlgn="b">
+                        <a:buNone/>
+                      </a:pPr>
+                      <a:r>
+                        <a:rPr lang="pl-PL" sz="1200" u="none" strike="noStrike">
+                          <a:effectLst/>
+                        </a:rPr>
+                        <a:t>10000g</a:t>
+                      </a:r>
+                      <a:endParaRPr lang="pl-PL" sz="1200" b="0" i="0" u="none" strike="noStrike">
+                        <a:solidFill>
+                          <a:srgbClr val="000000"/>
+                        </a:solidFill>
+                        <a:effectLst/>
+                        <a:latin typeface="Aptos Narrow" panose="020B0004020202020204" pitchFamily="34" charset="0"/>
+                      </a:endParaRPr>
+                    </a:p>
+                  </a:txBody>
+                  <a:tcPr marL="8368" marR="8368" marT="8368" marB="0" anchor="b"/>
+                </a:tc>
+                <a:extLst>
+                  <a:ext uri="{0D108BD9-81ED-4DB2-BD59-A6C34878D82A}">
+                    <a16:rowId xmlns:a16="http://schemas.microsoft.com/office/drawing/2014/main" val="2705847026"/>
+                  </a:ext>
+                </a:extLst>
+              </a:tr>
+              <a:tr h="236920">
+                <a:tc>
+                  <a:txBody>
+                    <a:bodyPr/>
+                    <a:lstStyle/>
+                    <a:p>
+                      <a:pPr algn="l" fontAlgn="b">
+                        <a:buNone/>
+                      </a:pPr>
+                      <a:r>
+                        <a:rPr lang="pl-PL" sz="1200" u="none" strike="noStrike">
+                          <a:effectLst/>
+                        </a:rPr>
+                        <a:t>Zakres temperatur</a:t>
+                      </a:r>
+                      <a:endParaRPr lang="pl-PL" sz="1200" b="0" i="0" u="none" strike="noStrike">
+                        <a:solidFill>
+                          <a:srgbClr val="000000"/>
+                        </a:solidFill>
+                        <a:effectLst/>
+                        <a:latin typeface="Aptos Narrow" panose="020B0004020202020204" pitchFamily="34" charset="0"/>
+                      </a:endParaRPr>
+                    </a:p>
+                  </a:txBody>
+                  <a:tcPr marL="8368" marR="8368" marT="8368" marB="0" anchor="b"/>
+                </a:tc>
+                <a:tc>
+                  <a:txBody>
+                    <a:bodyPr/>
+                    <a:lstStyle/>
+                    <a:p>
+                      <a:pPr algn="l" fontAlgn="b">
+                        <a:buNone/>
+                      </a:pPr>
+                      <a:r>
+                        <a:rPr lang="pl-PL" sz="1200" u="none" strike="noStrike">
+                          <a:effectLst/>
+                        </a:rPr>
+                        <a:t>-40°C to +105°C</a:t>
+                      </a:r>
+                      <a:endParaRPr lang="pl-PL" sz="1200" b="0" i="0" u="none" strike="noStrike">
+                        <a:solidFill>
+                          <a:srgbClr val="000000"/>
+                        </a:solidFill>
+                        <a:effectLst/>
+                        <a:latin typeface="Aptos Narrow" panose="020B0004020202020204" pitchFamily="34" charset="0"/>
+                      </a:endParaRPr>
+                    </a:p>
+                  </a:txBody>
+                  <a:tcPr marL="8368" marR="8368" marT="8368" marB="0" anchor="b"/>
+                </a:tc>
+                <a:tc>
+                  <a:txBody>
+                    <a:bodyPr/>
+                    <a:lstStyle/>
+                    <a:p>
+                      <a:pPr algn="l" fontAlgn="b">
+                        <a:buNone/>
+                      </a:pPr>
+                      <a:r>
+                        <a:rPr lang="pl-PL" sz="1200" u="none" strike="noStrike">
+                          <a:effectLst/>
+                        </a:rPr>
+                        <a:t>-40°C to +85°C</a:t>
+                      </a:r>
+                      <a:endParaRPr lang="pl-PL" sz="1200" b="0" i="0" u="none" strike="noStrike">
+                        <a:solidFill>
+                          <a:srgbClr val="000000"/>
+                        </a:solidFill>
+                        <a:effectLst/>
+                        <a:latin typeface="Aptos Narrow" panose="020B0004020202020204" pitchFamily="34" charset="0"/>
+                      </a:endParaRPr>
+                    </a:p>
+                  </a:txBody>
+                  <a:tcPr marL="8368" marR="8368" marT="8368" marB="0" anchor="b"/>
+                </a:tc>
+                <a:extLst>
+                  <a:ext uri="{0D108BD9-81ED-4DB2-BD59-A6C34878D82A}">
+                    <a16:rowId xmlns:a16="http://schemas.microsoft.com/office/drawing/2014/main" val="3225427140"/>
+                  </a:ext>
+                </a:extLst>
+              </a:tr>
+              <a:tr h="236920">
+                <a:tc>
+                  <a:txBody>
+                    <a:bodyPr/>
+                    <a:lstStyle/>
+                    <a:p>
+                      <a:pPr algn="l" fontAlgn="b">
+                        <a:buNone/>
+                      </a:pPr>
+                      <a:r>
+                        <a:rPr lang="pl-PL" sz="1200" u="none" strike="noStrike">
+                          <a:effectLst/>
+                        </a:rPr>
+                        <a:t>Zasilanie</a:t>
+                      </a:r>
+                      <a:endParaRPr lang="pl-PL" sz="1200" b="0" i="0" u="none" strike="noStrike">
+                        <a:solidFill>
+                          <a:srgbClr val="000000"/>
+                        </a:solidFill>
+                        <a:effectLst/>
+                        <a:latin typeface="Aptos Narrow" panose="020B0004020202020204" pitchFamily="34" charset="0"/>
+                      </a:endParaRPr>
+                    </a:p>
+                  </a:txBody>
+                  <a:tcPr marL="8368" marR="8368" marT="8368" marB="0" anchor="b"/>
+                </a:tc>
+                <a:tc>
+                  <a:txBody>
+                    <a:bodyPr/>
+                    <a:lstStyle/>
+                    <a:p>
+                      <a:pPr algn="l" fontAlgn="b">
+                        <a:buNone/>
+                      </a:pPr>
+                      <a:r>
+                        <a:rPr lang="pl-PL" sz="1200" u="none" strike="noStrike">
+                          <a:effectLst/>
+                        </a:rPr>
+                        <a:t>1,71V to  3,6V</a:t>
+                      </a:r>
+                      <a:endParaRPr lang="pl-PL" sz="1200" b="0" i="0" u="none" strike="noStrike">
+                        <a:solidFill>
+                          <a:srgbClr val="000000"/>
+                        </a:solidFill>
+                        <a:effectLst/>
+                        <a:latin typeface="Aptos Narrow" panose="020B0004020202020204" pitchFamily="34" charset="0"/>
+                      </a:endParaRPr>
+                    </a:p>
+                  </a:txBody>
+                  <a:tcPr marL="8368" marR="8368" marT="8368" marB="0" anchor="b"/>
+                </a:tc>
+                <a:tc>
+                  <a:txBody>
+                    <a:bodyPr/>
+                    <a:lstStyle/>
+                    <a:p>
+                      <a:pPr algn="l" fontAlgn="b">
+                        <a:buNone/>
+                      </a:pPr>
+                      <a:r>
+                        <a:rPr lang="pl-PL" sz="1200" u="none" strike="noStrike">
+                          <a:effectLst/>
+                        </a:rPr>
+                        <a:t>2,4 V to 3,6V</a:t>
+                      </a:r>
+                      <a:endParaRPr lang="pl-PL" sz="1200" b="0" i="0" u="none" strike="noStrike">
+                        <a:solidFill>
+                          <a:srgbClr val="000000"/>
+                        </a:solidFill>
+                        <a:effectLst/>
+                        <a:latin typeface="Aptos Narrow" panose="020B0004020202020204" pitchFamily="34" charset="0"/>
+                      </a:endParaRPr>
+                    </a:p>
+                  </a:txBody>
+                  <a:tcPr marL="8368" marR="8368" marT="8368" marB="0" anchor="b"/>
+                </a:tc>
+                <a:extLst>
+                  <a:ext uri="{0D108BD9-81ED-4DB2-BD59-A6C34878D82A}">
+                    <a16:rowId xmlns:a16="http://schemas.microsoft.com/office/drawing/2014/main" val="452462919"/>
+                  </a:ext>
+                </a:extLst>
+              </a:tr>
+              <a:tr h="236920">
+                <a:tc>
+                  <a:txBody>
+                    <a:bodyPr/>
+                    <a:lstStyle/>
+                    <a:p>
+                      <a:pPr algn="l" fontAlgn="b">
+                        <a:buNone/>
+                      </a:pPr>
+                      <a:r>
+                        <a:rPr lang="pl-PL" sz="1200" u="none" strike="noStrike">
+                          <a:effectLst/>
+                        </a:rPr>
+                        <a:t>Rozmiar kolejki</a:t>
+                      </a:r>
+                      <a:endParaRPr lang="pl-PL" sz="1200" b="0" i="0" u="none" strike="noStrike">
+                        <a:solidFill>
+                          <a:srgbClr val="000000"/>
+                        </a:solidFill>
+                        <a:effectLst/>
+                        <a:latin typeface="Aptos Narrow" panose="020B0004020202020204" pitchFamily="34" charset="0"/>
+                      </a:endParaRPr>
+                    </a:p>
+                  </a:txBody>
+                  <a:tcPr marL="8368" marR="8368" marT="8368" marB="0" anchor="b"/>
+                </a:tc>
+                <a:tc>
+                  <a:txBody>
+                    <a:bodyPr/>
+                    <a:lstStyle/>
+                    <a:p>
+                      <a:pPr algn="l" fontAlgn="b">
+                        <a:buNone/>
+                      </a:pPr>
+                      <a:r>
+                        <a:rPr lang="pl-PL" sz="1200" u="none" strike="noStrike">
+                          <a:effectLst/>
+                        </a:rPr>
+                        <a:t>4096-byte FIFO</a:t>
+                      </a:r>
+                      <a:endParaRPr lang="pl-PL" sz="1200" b="0" i="0" u="none" strike="noStrike">
+                        <a:solidFill>
+                          <a:srgbClr val="000000"/>
+                        </a:solidFill>
+                        <a:effectLst/>
+                        <a:latin typeface="Aptos Narrow" panose="020B0004020202020204" pitchFamily="34" charset="0"/>
+                      </a:endParaRPr>
+                    </a:p>
+                  </a:txBody>
+                  <a:tcPr marL="8368" marR="8368" marT="8368" marB="0" anchor="b"/>
+                </a:tc>
+                <a:tc>
+                  <a:txBody>
+                    <a:bodyPr/>
+                    <a:lstStyle/>
+                    <a:p>
+                      <a:pPr algn="l" fontAlgn="b">
+                        <a:buNone/>
+                      </a:pPr>
+                      <a:r>
+                        <a:rPr lang="pl-PL" sz="1200" u="none" strike="noStrike">
+                          <a:effectLst/>
+                        </a:rPr>
+                        <a:t>192-byte FIFO</a:t>
+                      </a:r>
+                      <a:endParaRPr lang="pl-PL" sz="1200" b="0" i="0" u="none" strike="noStrike">
+                        <a:solidFill>
+                          <a:srgbClr val="000000"/>
+                        </a:solidFill>
+                        <a:effectLst/>
+                        <a:latin typeface="Aptos Narrow" panose="020B0004020202020204" pitchFamily="34" charset="0"/>
+                      </a:endParaRPr>
+                    </a:p>
+                  </a:txBody>
+                  <a:tcPr marL="8368" marR="8368" marT="8368" marB="0" anchor="b"/>
+                </a:tc>
+                <a:extLst>
+                  <a:ext uri="{0D108BD9-81ED-4DB2-BD59-A6C34878D82A}">
+                    <a16:rowId xmlns:a16="http://schemas.microsoft.com/office/drawing/2014/main" val="1601881336"/>
+                  </a:ext>
+                </a:extLst>
+              </a:tr>
+              <a:tr h="236920">
+                <a:tc gridSpan="3">
+                  <a:txBody>
+                    <a:bodyPr/>
+                    <a:lstStyle/>
+                    <a:p>
+                      <a:pPr algn="ctr" fontAlgn="b">
+                        <a:buNone/>
+                      </a:pPr>
+                      <a:r>
+                        <a:rPr lang="pl-PL" sz="1200" u="none" strike="noStrike">
+                          <a:effectLst/>
+                        </a:rPr>
+                        <a:t>Interfejsy cyfrowe</a:t>
+                      </a:r>
+                      <a:endParaRPr lang="pl-PL" sz="1200" b="0" i="0" u="none" strike="noStrike">
+                        <a:solidFill>
+                          <a:srgbClr val="000000"/>
+                        </a:solidFill>
+                        <a:effectLst/>
+                        <a:latin typeface="Aptos Narrow" panose="020B0004020202020204" pitchFamily="34" charset="0"/>
+                      </a:endParaRPr>
+                    </a:p>
+                  </a:txBody>
+                  <a:tcPr marL="8368" marR="8368" marT="8368" marB="0" anchor="b"/>
+                </a:tc>
+                <a:tc hMerge="1">
+                  <a:txBody>
+                    <a:bodyPr/>
+                    <a:lstStyle/>
+                    <a:p>
+                      <a:endParaRPr lang="pl-PL"/>
+                    </a:p>
+                  </a:txBody>
+                  <a:tcPr/>
+                </a:tc>
+                <a:tc hMerge="1">
+                  <a:txBody>
+                    <a:bodyPr/>
+                    <a:lstStyle/>
+                    <a:p>
+                      <a:endParaRPr lang="pl-PL"/>
+                    </a:p>
+                  </a:txBody>
+                  <a:tcPr/>
+                </a:tc>
+                <a:extLst>
+                  <a:ext uri="{0D108BD9-81ED-4DB2-BD59-A6C34878D82A}">
+                    <a16:rowId xmlns:a16="http://schemas.microsoft.com/office/drawing/2014/main" val="1716561002"/>
+                  </a:ext>
+                </a:extLst>
+              </a:tr>
+              <a:tr h="236920">
+                <a:tc>
+                  <a:txBody>
+                    <a:bodyPr/>
+                    <a:lstStyle/>
+                    <a:p>
+                      <a:pPr algn="l" fontAlgn="b">
+                        <a:buNone/>
+                      </a:pPr>
+                      <a:r>
+                        <a:rPr lang="pl-PL" sz="1200" u="none" strike="noStrike">
+                          <a:effectLst/>
+                        </a:rPr>
+                        <a:t>I2C</a:t>
+                      </a:r>
+                      <a:endParaRPr lang="pl-PL" sz="1200" b="0" i="0" u="none" strike="noStrike">
+                        <a:solidFill>
+                          <a:srgbClr val="000000"/>
+                        </a:solidFill>
+                        <a:effectLst/>
+                        <a:latin typeface="Aptos Narrow" panose="020B0004020202020204" pitchFamily="34" charset="0"/>
+                      </a:endParaRPr>
+                    </a:p>
+                  </a:txBody>
+                  <a:tcPr marL="8368" marR="8368" marT="8368" marB="0" anchor="b"/>
+                </a:tc>
+                <a:tc>
+                  <a:txBody>
+                    <a:bodyPr/>
+                    <a:lstStyle/>
+                    <a:p>
+                      <a:pPr algn="l" fontAlgn="b">
+                        <a:buNone/>
+                      </a:pPr>
+                      <a:r>
+                        <a:rPr lang="pl-PL" sz="1200" u="none" strike="noStrike">
+                          <a:effectLst/>
+                        </a:rPr>
+                        <a:t>400 kHz</a:t>
+                      </a:r>
+                      <a:endParaRPr lang="pl-PL" sz="1200" b="0" i="0" u="none" strike="noStrike">
+                        <a:solidFill>
+                          <a:srgbClr val="000000"/>
+                        </a:solidFill>
+                        <a:effectLst/>
+                        <a:latin typeface="Aptos Narrow" panose="020B0004020202020204" pitchFamily="34" charset="0"/>
+                      </a:endParaRPr>
+                    </a:p>
+                  </a:txBody>
+                  <a:tcPr marL="8368" marR="8368" marT="8368" marB="0" anchor="b"/>
+                </a:tc>
+                <a:tc>
+                  <a:txBody>
+                    <a:bodyPr/>
+                    <a:lstStyle/>
+                    <a:p>
+                      <a:pPr algn="l" fontAlgn="b">
+                        <a:buNone/>
+                      </a:pPr>
+                      <a:r>
+                        <a:rPr lang="pl-PL" sz="1200" u="none" strike="noStrike">
+                          <a:effectLst/>
+                        </a:rPr>
+                        <a:t>400 kHz</a:t>
+                      </a:r>
+                      <a:endParaRPr lang="pl-PL" sz="1200" b="0" i="0" u="none" strike="noStrike">
+                        <a:solidFill>
+                          <a:srgbClr val="000000"/>
+                        </a:solidFill>
+                        <a:effectLst/>
+                        <a:latin typeface="Aptos Narrow" panose="020B0004020202020204" pitchFamily="34" charset="0"/>
+                      </a:endParaRPr>
+                    </a:p>
+                  </a:txBody>
+                  <a:tcPr marL="8368" marR="8368" marT="8368" marB="0" anchor="b"/>
+                </a:tc>
+                <a:extLst>
+                  <a:ext uri="{0D108BD9-81ED-4DB2-BD59-A6C34878D82A}">
+                    <a16:rowId xmlns:a16="http://schemas.microsoft.com/office/drawing/2014/main" val="2708043197"/>
+                  </a:ext>
+                </a:extLst>
+              </a:tr>
+              <a:tr h="236920">
+                <a:tc>
+                  <a:txBody>
+                    <a:bodyPr/>
+                    <a:lstStyle/>
+                    <a:p>
+                      <a:pPr algn="l" fontAlgn="b">
+                        <a:buNone/>
+                      </a:pPr>
+                      <a:r>
+                        <a:rPr lang="pl-PL" sz="1200" u="none" strike="noStrike">
+                          <a:effectLst/>
+                        </a:rPr>
+                        <a:t>SPI</a:t>
+                      </a:r>
+                      <a:endParaRPr lang="pl-PL" sz="1200" b="0" i="0" u="none" strike="noStrike">
+                        <a:solidFill>
+                          <a:srgbClr val="000000"/>
+                        </a:solidFill>
+                        <a:effectLst/>
+                        <a:latin typeface="Aptos Narrow" panose="020B0004020202020204" pitchFamily="34" charset="0"/>
+                      </a:endParaRPr>
+                    </a:p>
+                  </a:txBody>
+                  <a:tcPr marL="8368" marR="8368" marT="8368" marB="0" anchor="b"/>
+                </a:tc>
+                <a:tc>
+                  <a:txBody>
+                    <a:bodyPr/>
+                    <a:lstStyle/>
+                    <a:p>
+                      <a:pPr algn="l" fontAlgn="b">
+                        <a:buNone/>
+                      </a:pPr>
+                      <a:r>
+                        <a:rPr lang="pl-PL" sz="1200" u="none" strike="noStrike">
+                          <a:effectLst/>
+                        </a:rPr>
+                        <a:t>8 MHz</a:t>
+                      </a:r>
+                      <a:endParaRPr lang="pl-PL" sz="1200" b="0" i="0" u="none" strike="noStrike">
+                        <a:solidFill>
+                          <a:srgbClr val="000000"/>
+                        </a:solidFill>
+                        <a:effectLst/>
+                        <a:latin typeface="Aptos Narrow" panose="020B0004020202020204" pitchFamily="34" charset="0"/>
+                      </a:endParaRPr>
+                    </a:p>
+                  </a:txBody>
+                  <a:tcPr marL="8368" marR="8368" marT="8368" marB="0" anchor="b"/>
+                </a:tc>
+                <a:tc>
+                  <a:txBody>
+                    <a:bodyPr/>
+                    <a:lstStyle/>
+                    <a:p>
+                      <a:pPr algn="l" fontAlgn="b">
+                        <a:buNone/>
+                      </a:pPr>
+                      <a:r>
+                        <a:rPr lang="pl-PL" sz="1200" u="none" strike="noStrike">
+                          <a:effectLst/>
+                        </a:rPr>
+                        <a:t>10 MHz</a:t>
+                      </a:r>
+                      <a:endParaRPr lang="pl-PL" sz="1200" b="0" i="0" u="none" strike="noStrike">
+                        <a:solidFill>
+                          <a:srgbClr val="000000"/>
+                        </a:solidFill>
+                        <a:effectLst/>
+                        <a:latin typeface="Aptos Narrow" panose="020B0004020202020204" pitchFamily="34" charset="0"/>
+                      </a:endParaRPr>
+                    </a:p>
+                  </a:txBody>
+                  <a:tcPr marL="8368" marR="8368" marT="8368" marB="0" anchor="b"/>
+                </a:tc>
+                <a:extLst>
+                  <a:ext uri="{0D108BD9-81ED-4DB2-BD59-A6C34878D82A}">
+                    <a16:rowId xmlns:a16="http://schemas.microsoft.com/office/drawing/2014/main" val="2514809380"/>
+                  </a:ext>
+                </a:extLst>
+              </a:tr>
+              <a:tr h="236920">
+                <a:tc gridSpan="3">
+                  <a:txBody>
+                    <a:bodyPr/>
+                    <a:lstStyle/>
+                    <a:p>
+                      <a:pPr algn="ctr" fontAlgn="b">
+                        <a:buNone/>
+                      </a:pPr>
+                      <a:r>
+                        <a:rPr lang="pl-PL" sz="1200" u="none" strike="noStrike">
+                          <a:effectLst/>
+                        </a:rPr>
+                        <a:t>Filtry</a:t>
+                      </a:r>
+                      <a:endParaRPr lang="pl-PL" sz="1200" b="0" i="0" u="none" strike="noStrike">
+                        <a:solidFill>
+                          <a:srgbClr val="000000"/>
+                        </a:solidFill>
+                        <a:effectLst/>
+                        <a:latin typeface="Aptos Narrow" panose="020B0004020202020204" pitchFamily="34" charset="0"/>
+                      </a:endParaRPr>
+                    </a:p>
+                  </a:txBody>
+                  <a:tcPr marL="8368" marR="8368" marT="8368" marB="0" anchor="b"/>
+                </a:tc>
+                <a:tc hMerge="1">
+                  <a:txBody>
+                    <a:bodyPr/>
+                    <a:lstStyle/>
+                    <a:p>
+                      <a:endParaRPr lang="pl-PL"/>
+                    </a:p>
+                  </a:txBody>
+                  <a:tcPr/>
+                </a:tc>
+                <a:tc hMerge="1">
+                  <a:txBody>
+                    <a:bodyPr/>
+                    <a:lstStyle/>
+                    <a:p>
+                      <a:endParaRPr lang="pl-PL"/>
+                    </a:p>
+                  </a:txBody>
+                  <a:tcPr/>
+                </a:tc>
+                <a:extLst>
+                  <a:ext uri="{0D108BD9-81ED-4DB2-BD59-A6C34878D82A}">
+                    <a16:rowId xmlns:a16="http://schemas.microsoft.com/office/drawing/2014/main" val="3987051602"/>
+                  </a:ext>
+                </a:extLst>
+              </a:tr>
+              <a:tr h="236920">
+                <a:tc>
+                  <a:txBody>
+                    <a:bodyPr/>
+                    <a:lstStyle/>
+                    <a:p>
+                      <a:pPr algn="l" fontAlgn="b">
+                        <a:buNone/>
+                      </a:pPr>
+                      <a:r>
+                        <a:rPr lang="pl-PL" sz="1200" u="none" strike="noStrike">
+                          <a:effectLst/>
+                        </a:rPr>
+                        <a:t>dolnoprzepustowy</a:t>
+                      </a:r>
+                      <a:endParaRPr lang="pl-PL" sz="1200" b="0" i="0" u="none" strike="noStrike">
+                        <a:solidFill>
+                          <a:srgbClr val="000000"/>
+                        </a:solidFill>
+                        <a:effectLst/>
+                        <a:latin typeface="Aptos Narrow" panose="020B0004020202020204" pitchFamily="34" charset="0"/>
+                      </a:endParaRPr>
+                    </a:p>
+                  </a:txBody>
+                  <a:tcPr marL="8368" marR="8368" marT="8368" marB="0" anchor="b"/>
+                </a:tc>
+                <a:tc>
+                  <a:txBody>
+                    <a:bodyPr/>
+                    <a:lstStyle/>
+                    <a:p>
+                      <a:pPr algn="l" fontAlgn="b">
+                        <a:buNone/>
+                      </a:pPr>
+                      <a:r>
+                        <a:rPr lang="pl-PL" sz="1200" u="none" strike="noStrike">
+                          <a:effectLst/>
+                        </a:rPr>
+                        <a:t>programowalny, cyfrowy</a:t>
+                      </a:r>
+                      <a:endParaRPr lang="pl-PL" sz="1200" b="0" i="0" u="none" strike="noStrike">
+                        <a:solidFill>
+                          <a:srgbClr val="000000"/>
+                        </a:solidFill>
+                        <a:effectLst/>
+                        <a:latin typeface="Aptos Narrow" panose="020B0004020202020204" pitchFamily="34" charset="0"/>
+                      </a:endParaRPr>
+                    </a:p>
+                  </a:txBody>
+                  <a:tcPr marL="8368" marR="8368" marT="8368" marB="0" anchor="b"/>
+                </a:tc>
+                <a:tc>
+                  <a:txBody>
+                    <a:bodyPr/>
+                    <a:lstStyle/>
+                    <a:p>
+                      <a:pPr algn="l" fontAlgn="b">
+                        <a:buNone/>
+                      </a:pPr>
+                      <a:r>
+                        <a:rPr lang="pl-PL" sz="1200" u="none" strike="noStrike">
+                          <a:effectLst/>
+                        </a:rPr>
+                        <a:t>programowalny, cyfrowy</a:t>
+                      </a:r>
+                      <a:endParaRPr lang="pl-PL" sz="1200" b="0" i="0" u="none" strike="noStrike">
+                        <a:solidFill>
+                          <a:srgbClr val="000000"/>
+                        </a:solidFill>
+                        <a:effectLst/>
+                        <a:latin typeface="Aptos Narrow" panose="020B0004020202020204" pitchFamily="34" charset="0"/>
+                      </a:endParaRPr>
+                    </a:p>
+                  </a:txBody>
+                  <a:tcPr marL="8368" marR="8368" marT="8368" marB="0" anchor="b"/>
+                </a:tc>
+                <a:extLst>
+                  <a:ext uri="{0D108BD9-81ED-4DB2-BD59-A6C34878D82A}">
+                    <a16:rowId xmlns:a16="http://schemas.microsoft.com/office/drawing/2014/main" val="1441305028"/>
+                  </a:ext>
+                </a:extLst>
+              </a:tr>
+              <a:tr h="236920">
+                <a:tc>
+                  <a:txBody>
+                    <a:bodyPr/>
+                    <a:lstStyle/>
+                    <a:p>
+                      <a:pPr algn="l" fontAlgn="b">
+                        <a:buNone/>
+                      </a:pPr>
+                      <a:r>
+                        <a:rPr lang="pl-PL" sz="1200" u="none" strike="noStrike">
+                          <a:effectLst/>
+                        </a:rPr>
+                        <a:t>górnoprzepustowy</a:t>
+                      </a:r>
+                      <a:endParaRPr lang="pl-PL" sz="1200" b="0" i="0" u="none" strike="noStrike">
+                        <a:solidFill>
+                          <a:srgbClr val="000000"/>
+                        </a:solidFill>
+                        <a:effectLst/>
+                        <a:latin typeface="Aptos Narrow" panose="020B0004020202020204" pitchFamily="34" charset="0"/>
+                      </a:endParaRPr>
+                    </a:p>
+                  </a:txBody>
+                  <a:tcPr marL="8368" marR="8368" marT="8368" marB="0" anchor="b"/>
+                </a:tc>
+                <a:tc>
+                  <a:txBody>
+                    <a:bodyPr/>
+                    <a:lstStyle/>
+                    <a:p>
+                      <a:pPr algn="l" fontAlgn="b">
+                        <a:buNone/>
+                      </a:pPr>
+                      <a:r>
+                        <a:rPr lang="pl-PL" sz="1200" u="none" strike="noStrike">
+                          <a:effectLst/>
+                        </a:rPr>
+                        <a:t>brak</a:t>
+                      </a:r>
+                      <a:endParaRPr lang="pl-PL" sz="1200" b="0" i="0" u="none" strike="noStrike">
+                        <a:solidFill>
+                          <a:srgbClr val="000000"/>
+                        </a:solidFill>
+                        <a:effectLst/>
+                        <a:latin typeface="Aptos Narrow" panose="020B0004020202020204" pitchFamily="34" charset="0"/>
+                      </a:endParaRPr>
+                    </a:p>
+                  </a:txBody>
+                  <a:tcPr marL="8368" marR="8368" marT="8368" marB="0" anchor="b"/>
+                </a:tc>
+                <a:tc>
+                  <a:txBody>
+                    <a:bodyPr/>
+                    <a:lstStyle/>
+                    <a:p>
+                      <a:pPr algn="l" fontAlgn="b">
+                        <a:buNone/>
+                      </a:pPr>
+                      <a:r>
+                        <a:rPr lang="pl-PL" sz="1200" u="none" strike="noStrike">
+                          <a:effectLst/>
+                        </a:rPr>
+                        <a:t>programowalny, cyfrowy</a:t>
+                      </a:r>
+                      <a:endParaRPr lang="pl-PL" sz="1200" b="0" i="0" u="none" strike="noStrike">
+                        <a:solidFill>
+                          <a:srgbClr val="000000"/>
+                        </a:solidFill>
+                        <a:effectLst/>
+                        <a:latin typeface="Aptos Narrow" panose="020B0004020202020204" pitchFamily="34" charset="0"/>
+                      </a:endParaRPr>
+                    </a:p>
+                  </a:txBody>
+                  <a:tcPr marL="8368" marR="8368" marT="8368" marB="0" anchor="b"/>
+                </a:tc>
+                <a:extLst>
+                  <a:ext uri="{0D108BD9-81ED-4DB2-BD59-A6C34878D82A}">
+                    <a16:rowId xmlns:a16="http://schemas.microsoft.com/office/drawing/2014/main" val="3819864575"/>
+                  </a:ext>
+                </a:extLst>
+              </a:tr>
+              <a:tr h="236920">
+                <a:tc>
+                  <a:txBody>
+                    <a:bodyPr/>
+                    <a:lstStyle/>
+                    <a:p>
+                      <a:pPr algn="l" fontAlgn="b">
+                        <a:buNone/>
+                      </a:pPr>
+                      <a:r>
+                        <a:rPr lang="pl-PL" sz="1200" u="none" strike="noStrike">
+                          <a:effectLst/>
+                        </a:rPr>
+                        <a:t>Cena:</a:t>
+                      </a:r>
+                      <a:endParaRPr lang="pl-PL" sz="1200" b="0" i="0" u="none" strike="noStrike">
+                        <a:solidFill>
+                          <a:srgbClr val="000000"/>
+                        </a:solidFill>
+                        <a:effectLst/>
+                        <a:latin typeface="Aptos Narrow" panose="020B0004020202020204" pitchFamily="34" charset="0"/>
+                      </a:endParaRPr>
+                    </a:p>
+                  </a:txBody>
+                  <a:tcPr marL="8368" marR="8368" marT="8368" marB="0" anchor="b"/>
+                </a:tc>
+                <a:tc>
+                  <a:txBody>
+                    <a:bodyPr/>
+                    <a:lstStyle/>
+                    <a:p>
+                      <a:pPr algn="l" fontAlgn="b">
+                        <a:buNone/>
+                      </a:pPr>
+                      <a:r>
+                        <a:rPr lang="pl-PL" sz="1200" u="none" strike="noStrike">
+                          <a:effectLst/>
+                        </a:rPr>
+                        <a:t> </a:t>
+                      </a:r>
+                      <a:endParaRPr lang="pl-PL" sz="1200" b="0" i="0" u="none" strike="noStrike">
+                        <a:solidFill>
+                          <a:srgbClr val="000000"/>
+                        </a:solidFill>
+                        <a:effectLst/>
+                        <a:latin typeface="Aptos Narrow" panose="020B0004020202020204" pitchFamily="34" charset="0"/>
+                      </a:endParaRPr>
+                    </a:p>
+                  </a:txBody>
+                  <a:tcPr marL="8368" marR="8368" marT="8368" marB="0" anchor="b"/>
+                </a:tc>
+                <a:tc>
+                  <a:txBody>
+                    <a:bodyPr/>
+                    <a:lstStyle/>
+                    <a:p>
+                      <a:pPr algn="l" fontAlgn="b">
+                        <a:buNone/>
+                      </a:pPr>
+                      <a:r>
+                        <a:rPr lang="pl-PL" sz="1200" u="none" strike="noStrike">
+                          <a:effectLst/>
+                        </a:rPr>
+                        <a:t> </a:t>
+                      </a:r>
+                      <a:endParaRPr lang="pl-PL" sz="1200" b="0" i="0" u="none" strike="noStrike">
+                        <a:solidFill>
+                          <a:srgbClr val="000000"/>
+                        </a:solidFill>
+                        <a:effectLst/>
+                        <a:latin typeface="Aptos Narrow" panose="020B0004020202020204" pitchFamily="34" charset="0"/>
+                      </a:endParaRPr>
+                    </a:p>
+                  </a:txBody>
+                  <a:tcPr marL="8368" marR="8368" marT="8368" marB="0" anchor="b"/>
+                </a:tc>
+                <a:extLst>
+                  <a:ext uri="{0D108BD9-81ED-4DB2-BD59-A6C34878D82A}">
+                    <a16:rowId xmlns:a16="http://schemas.microsoft.com/office/drawing/2014/main" val="3945094788"/>
+                  </a:ext>
+                </a:extLst>
+              </a:tr>
+              <a:tr h="236920">
+                <a:tc>
+                  <a:txBody>
+                    <a:bodyPr/>
+                    <a:lstStyle/>
+                    <a:p>
+                      <a:pPr algn="l" fontAlgn="b">
+                        <a:buNone/>
+                      </a:pPr>
+                      <a:r>
+                        <a:rPr lang="pl-PL" sz="1200" u="none" strike="noStrike">
+                          <a:effectLst/>
+                        </a:rPr>
+                        <a:t>Evaluation board</a:t>
+                      </a:r>
+                      <a:endParaRPr lang="pl-PL" sz="1200" b="0" i="0" u="none" strike="noStrike">
+                        <a:solidFill>
+                          <a:srgbClr val="000000"/>
+                        </a:solidFill>
+                        <a:effectLst/>
+                        <a:latin typeface="Aptos Narrow" panose="020B0004020202020204" pitchFamily="34" charset="0"/>
+                      </a:endParaRPr>
+                    </a:p>
+                  </a:txBody>
+                  <a:tcPr marL="8368" marR="8368" marT="8368" marB="0" anchor="b"/>
+                </a:tc>
+                <a:tc>
+                  <a:txBody>
+                    <a:bodyPr/>
+                    <a:lstStyle/>
+                    <a:p>
+                      <a:pPr algn="l" fontAlgn="b">
+                        <a:buNone/>
+                      </a:pPr>
+                      <a:r>
+                        <a:rPr lang="pl-PL" sz="1200" u="none" strike="noStrike">
+                          <a:effectLst/>
+                        </a:rPr>
+                        <a:t>33 $</a:t>
+                      </a:r>
+                      <a:endParaRPr lang="pl-PL" sz="1200" b="0" i="0" u="none" strike="noStrike">
+                        <a:solidFill>
+                          <a:srgbClr val="000000"/>
+                        </a:solidFill>
+                        <a:effectLst/>
+                        <a:latin typeface="Aptos Narrow" panose="020B0004020202020204" pitchFamily="34" charset="0"/>
+                      </a:endParaRPr>
+                    </a:p>
+                  </a:txBody>
+                  <a:tcPr marL="8368" marR="8368" marT="8368" marB="0" anchor="b"/>
+                </a:tc>
+                <a:tc>
+                  <a:txBody>
+                    <a:bodyPr/>
+                    <a:lstStyle/>
+                    <a:p>
+                      <a:pPr algn="l" fontAlgn="b">
+                        <a:buNone/>
+                      </a:pPr>
+                      <a:r>
+                        <a:rPr lang="pl-PL" sz="1200" u="none" strike="noStrike">
+                          <a:effectLst/>
+                        </a:rPr>
+                        <a:t>13 $</a:t>
+                      </a:r>
+                      <a:endParaRPr lang="pl-PL" sz="1200" b="0" i="0" u="none" strike="noStrike">
+                        <a:solidFill>
+                          <a:srgbClr val="000000"/>
+                        </a:solidFill>
+                        <a:effectLst/>
+                        <a:latin typeface="Aptos Narrow" panose="020B0004020202020204" pitchFamily="34" charset="0"/>
+                      </a:endParaRPr>
+                    </a:p>
+                  </a:txBody>
+                  <a:tcPr marL="8368" marR="8368" marT="8368" marB="0" anchor="b"/>
+                </a:tc>
+                <a:extLst>
+                  <a:ext uri="{0D108BD9-81ED-4DB2-BD59-A6C34878D82A}">
+                    <a16:rowId xmlns:a16="http://schemas.microsoft.com/office/drawing/2014/main" val="2850689103"/>
+                  </a:ext>
+                </a:extLst>
+              </a:tr>
+              <a:tr h="236920">
+                <a:tc>
+                  <a:txBody>
+                    <a:bodyPr/>
+                    <a:lstStyle/>
+                    <a:p>
+                      <a:pPr algn="l" fontAlgn="b">
+                        <a:buNone/>
+                      </a:pPr>
+                      <a:r>
+                        <a:rPr lang="pl-PL" sz="1200" u="none" strike="noStrike">
+                          <a:effectLst/>
+                        </a:rPr>
+                        <a:t>Chip</a:t>
+                      </a:r>
+                      <a:endParaRPr lang="pl-PL" sz="1200" b="0" i="0" u="none" strike="noStrike">
+                        <a:solidFill>
+                          <a:srgbClr val="000000"/>
+                        </a:solidFill>
+                        <a:effectLst/>
+                        <a:latin typeface="Aptos Narrow" panose="020B0004020202020204" pitchFamily="34" charset="0"/>
+                      </a:endParaRPr>
+                    </a:p>
+                  </a:txBody>
+                  <a:tcPr marL="8368" marR="8368" marT="8368" marB="0" anchor="b"/>
+                </a:tc>
+                <a:tc>
+                  <a:txBody>
+                    <a:bodyPr/>
+                    <a:lstStyle/>
+                    <a:p>
+                      <a:pPr algn="l" fontAlgn="b">
+                        <a:buNone/>
+                      </a:pPr>
+                      <a:r>
+                        <a:rPr lang="pl-PL" sz="1200" u="none" strike="noStrike">
+                          <a:effectLst/>
+                        </a:rPr>
+                        <a:t>11 $</a:t>
+                      </a:r>
+                      <a:endParaRPr lang="pl-PL" sz="1200" b="0" i="0" u="none" strike="noStrike">
+                        <a:solidFill>
+                          <a:srgbClr val="000000"/>
+                        </a:solidFill>
+                        <a:effectLst/>
+                        <a:latin typeface="Aptos Narrow" panose="020B0004020202020204" pitchFamily="34" charset="0"/>
+                      </a:endParaRPr>
+                    </a:p>
+                  </a:txBody>
+                  <a:tcPr marL="8368" marR="8368" marT="8368" marB="0" anchor="b"/>
+                </a:tc>
+                <a:tc>
+                  <a:txBody>
+                    <a:bodyPr/>
+                    <a:lstStyle/>
+                    <a:p>
+                      <a:pPr algn="l" fontAlgn="b">
+                        <a:buNone/>
+                      </a:pPr>
+                      <a:r>
+                        <a:rPr lang="pl-PL" sz="1200" u="none" strike="noStrike">
+                          <a:effectLst/>
+                        </a:rPr>
+                        <a:t>9 $</a:t>
+                      </a:r>
+                      <a:endParaRPr lang="pl-PL" sz="1200" b="0" i="0" u="none" strike="noStrike">
+                        <a:solidFill>
+                          <a:srgbClr val="000000"/>
+                        </a:solidFill>
+                        <a:effectLst/>
+                        <a:latin typeface="Aptos Narrow" panose="020B0004020202020204" pitchFamily="34" charset="0"/>
+                      </a:endParaRPr>
+                    </a:p>
+                  </a:txBody>
+                  <a:tcPr marL="8368" marR="8368" marT="8368" marB="0" anchor="b"/>
+                </a:tc>
+                <a:extLst>
+                  <a:ext uri="{0D108BD9-81ED-4DB2-BD59-A6C34878D82A}">
+                    <a16:rowId xmlns:a16="http://schemas.microsoft.com/office/drawing/2014/main" val="4205969179"/>
+                  </a:ext>
+                </a:extLst>
+              </a:tr>
+              <a:tr h="236920">
+                <a:tc gridSpan="3">
+                  <a:txBody>
+                    <a:bodyPr/>
+                    <a:lstStyle/>
+                    <a:p>
+                      <a:pPr algn="ctr" fontAlgn="b">
+                        <a:buNone/>
+                      </a:pPr>
+                      <a:r>
+                        <a:rPr lang="pl-PL" sz="1200" u="none" strike="noStrike">
+                          <a:effectLst/>
+                        </a:rPr>
+                        <a:t>Dodatkowe cechy</a:t>
+                      </a:r>
+                      <a:endParaRPr lang="pl-PL" sz="1200" b="0" i="0" u="none" strike="noStrike">
+                        <a:solidFill>
+                          <a:srgbClr val="000000"/>
+                        </a:solidFill>
+                        <a:effectLst/>
+                        <a:latin typeface="Aptos Narrow" panose="020B0004020202020204" pitchFamily="34" charset="0"/>
+                      </a:endParaRPr>
+                    </a:p>
+                  </a:txBody>
+                  <a:tcPr marL="8368" marR="8368" marT="8368" marB="0" anchor="b"/>
+                </a:tc>
+                <a:tc hMerge="1">
+                  <a:txBody>
+                    <a:bodyPr/>
+                    <a:lstStyle/>
+                    <a:p>
+                      <a:endParaRPr lang="pl-PL"/>
+                    </a:p>
+                  </a:txBody>
+                  <a:tcPr/>
+                </a:tc>
+                <a:tc hMerge="1">
+                  <a:txBody>
+                    <a:bodyPr/>
+                    <a:lstStyle/>
+                    <a:p>
+                      <a:endParaRPr lang="pl-PL"/>
+                    </a:p>
+                  </a:txBody>
+                  <a:tcPr/>
+                </a:tc>
+                <a:extLst>
+                  <a:ext uri="{0D108BD9-81ED-4DB2-BD59-A6C34878D82A}">
+                    <a16:rowId xmlns:a16="http://schemas.microsoft.com/office/drawing/2014/main" val="1174610392"/>
+                  </a:ext>
+                </a:extLst>
+              </a:tr>
+              <a:tr h="236920">
+                <a:tc>
+                  <a:txBody>
+                    <a:bodyPr/>
+                    <a:lstStyle/>
+                    <a:p>
+                      <a:pPr algn="l" fontAlgn="b">
+                        <a:buNone/>
+                      </a:pPr>
+                      <a:r>
+                        <a:rPr lang="pl-PL" sz="1200" u="none" strike="noStrike">
+                          <a:effectLst/>
+                        </a:rPr>
+                        <a:t> </a:t>
+                      </a:r>
+                      <a:endParaRPr lang="pl-PL" sz="1200" b="0" i="0" u="none" strike="noStrike">
+                        <a:solidFill>
+                          <a:srgbClr val="000000"/>
+                        </a:solidFill>
+                        <a:effectLst/>
+                        <a:latin typeface="Aptos Narrow" panose="020B0004020202020204" pitchFamily="34" charset="0"/>
+                      </a:endParaRPr>
+                    </a:p>
+                  </a:txBody>
+                  <a:tcPr marL="8368" marR="8368" marT="8368" marB="0" anchor="b"/>
+                </a:tc>
+                <a:tc>
+                  <a:txBody>
+                    <a:bodyPr/>
+                    <a:lstStyle/>
+                    <a:p>
+                      <a:pPr algn="l" fontAlgn="b">
+                        <a:buNone/>
+                      </a:pPr>
+                      <a:r>
+                        <a:rPr lang="pl-PL" sz="1200" u="none" strike="noStrike">
+                          <a:effectLst/>
+                        </a:rPr>
+                        <a:t>termometr</a:t>
+                      </a:r>
+                      <a:endParaRPr lang="pl-PL" sz="1200" b="0" i="0" u="none" strike="noStrike">
+                        <a:solidFill>
+                          <a:srgbClr val="000000"/>
+                        </a:solidFill>
+                        <a:effectLst/>
+                        <a:latin typeface="Aptos Narrow" panose="020B0004020202020204" pitchFamily="34" charset="0"/>
+                      </a:endParaRPr>
+                    </a:p>
+                  </a:txBody>
+                  <a:tcPr marL="8368" marR="8368" marT="8368" marB="0" anchor="b"/>
+                </a:tc>
+                <a:tc>
+                  <a:txBody>
+                    <a:bodyPr/>
+                    <a:lstStyle/>
+                    <a:p>
+                      <a:pPr algn="l" fontAlgn="b">
+                        <a:buNone/>
+                      </a:pPr>
+                      <a:r>
+                        <a:rPr lang="pl-PL" sz="1200" u="none" strike="noStrike" dirty="0">
+                          <a:effectLst/>
+                        </a:rPr>
+                        <a:t>termometr</a:t>
+                      </a:r>
+                      <a:endParaRPr lang="pl-PL" sz="1200" b="0" i="0" u="none" strike="noStrike" dirty="0">
+                        <a:solidFill>
+                          <a:srgbClr val="000000"/>
+                        </a:solidFill>
+                        <a:effectLst/>
+                        <a:latin typeface="Aptos Narrow" panose="020B0004020202020204" pitchFamily="34" charset="0"/>
+                      </a:endParaRPr>
+                    </a:p>
+                  </a:txBody>
+                  <a:tcPr marL="8368" marR="8368" marT="8368" marB="0" anchor="b"/>
+                </a:tc>
+                <a:extLst>
+                  <a:ext uri="{0D108BD9-81ED-4DB2-BD59-A6C34878D82A}">
+                    <a16:rowId xmlns:a16="http://schemas.microsoft.com/office/drawing/2014/main" val="3627437822"/>
+                  </a:ext>
+                </a:extLst>
+              </a:tr>
+            </a:tbl>
+          </a:graphicData>
+        </a:graphic>
+      </p:graphicFrame>
+    </p:spTree>
+    <p:extLst>
+      <p:ext uri="{BB962C8B-B14F-4D97-AF65-F5344CB8AC3E}">
+        <p14:creationId xmlns:p14="http://schemas.microsoft.com/office/powerpoint/2010/main" val="1376789889"/>
+      </p:ext>
+    </p:extLst>
+  </p:cSld>
+  <p:clrMapOvr>
+    <a:masterClrMapping/>
+  </p:clrMapOvr>
+</p:sld>
+</file>
+
+<file path=ppt/slides/slide11.xml><?xml version="1.0" encoding="utf-8"?>
+<p:sld xmlns:a="http://schemas.openxmlformats.org/drawingml/2006/main" xmlns:r="http://schemas.openxmlformats.org/officeDocument/2006/relationships" xmlns:p="http://schemas.openxmlformats.org/presentationml/2006/main">
+  <p:cSld>
+    <p:spTree>
+      <p:nvGrpSpPr>
+        <p:cNvPr id="1" name=""/>
+        <p:cNvGrpSpPr/>
+        <p:nvPr/>
+      </p:nvGrpSpPr>
+      <p:grpSpPr>
+        <a:xfrm>
+          <a:off x="0" y="0"/>
+          <a:ext cx="0" cy="0"/>
+          <a:chOff x="0" y="0"/>
+          <a:chExt cx="0" cy="0"/>
+        </a:xfrm>
+      </p:grpSpPr>
+      <p:sp>
+        <p:nvSpPr>
+          <p:cNvPr id="2" name="Title 1">
+            <a:extLst>
+              <a:ext uri="{FF2B5EF4-FFF2-40B4-BE49-F238E27FC236}">
+                <a16:creationId xmlns:a16="http://schemas.microsoft.com/office/drawing/2014/main" id="{95D8128B-F3F5-0374-DC89-A323F292678C}"/>
+              </a:ext>
+            </a:extLst>
+          </p:cNvPr>
+          <p:cNvSpPr>
+            <a:spLocks noGrp="1"/>
+          </p:cNvSpPr>
+          <p:nvPr>
+            <p:ph type="title"/>
+          </p:nvPr>
+        </p:nvSpPr>
+        <p:spPr/>
+        <p:txBody>
+          <a:bodyPr/>
+          <a:lstStyle/>
+          <a:p>
+            <a:r>
+              <a:rPr lang="pl-PL" dirty="0"/>
+              <a:t>Wykrywanie, w którym miejscu została uderzona piłka</a:t>
+            </a:r>
+          </a:p>
+        </p:txBody>
+      </p:sp>
+      <p:sp>
+        <p:nvSpPr>
+          <p:cNvPr id="3" name="Content Placeholder 2">
+            <a:extLst>
+              <a:ext uri="{FF2B5EF4-FFF2-40B4-BE49-F238E27FC236}">
+                <a16:creationId xmlns:a16="http://schemas.microsoft.com/office/drawing/2014/main" id="{E773D8DE-712B-7F95-2B6C-2C6A8F80E265}"/>
+              </a:ext>
+            </a:extLst>
+          </p:cNvPr>
+          <p:cNvSpPr>
+            <a:spLocks noGrp="1"/>
+          </p:cNvSpPr>
+          <p:nvPr>
+            <p:ph idx="1"/>
+          </p:nvPr>
+        </p:nvSpPr>
+        <p:spPr/>
+        <p:txBody>
+          <a:bodyPr/>
+          <a:lstStyle/>
+          <a:p>
+            <a:r>
+              <a:rPr lang="pl-PL" dirty="0"/>
+              <a:t>Czujniki siły nacisku</a:t>
+            </a:r>
+          </a:p>
+          <a:p>
+            <a:pPr lvl="1"/>
+            <a:r>
+              <a:rPr lang="pl-PL" dirty="0"/>
+              <a:t>Czujniki tensometryczne – do 50 kg(tylko do mierzenia ścisku piłki)</a:t>
+            </a:r>
+            <a:br>
+              <a:rPr lang="pl-PL" dirty="0"/>
+            </a:br>
+            <a:r>
+              <a:rPr lang="pl-PL" dirty="0"/>
+              <a:t>Wolne, statyczne zmiany siły nacisku</a:t>
+            </a:r>
+          </a:p>
+          <a:p>
+            <a:pPr lvl="1"/>
+            <a:r>
+              <a:rPr lang="pl-PL" dirty="0"/>
+              <a:t>Czujniki piezoelektryczne – do 15kgf</a:t>
+            </a:r>
+            <a:br>
+              <a:rPr lang="pl-PL" dirty="0"/>
+            </a:br>
+            <a:r>
+              <a:rPr lang="pl-PL" dirty="0"/>
+              <a:t>Szybkie, krótkotrwałe zmiany siły nacisku</a:t>
+            </a:r>
+          </a:p>
+          <a:p>
+            <a:pPr marL="457200" lvl="1" indent="0">
+              <a:buNone/>
+            </a:pPr>
+            <a:endParaRPr lang="pl-PL" dirty="0"/>
+          </a:p>
+          <a:p>
+            <a:endParaRPr lang="pl-PL" dirty="0"/>
+          </a:p>
+          <a:p>
+            <a:pPr marL="0" indent="0">
+              <a:buNone/>
+            </a:pPr>
+            <a:endParaRPr lang="pl-PL" dirty="0"/>
+          </a:p>
+          <a:p>
+            <a:pPr marL="0" indent="0">
+              <a:buNone/>
+            </a:pPr>
+            <a:endParaRPr lang="pl-PL" dirty="0"/>
+          </a:p>
+        </p:txBody>
+      </p:sp>
+      <p:pic>
+        <p:nvPicPr>
+          <p:cNvPr id="5122" name="Picture 2" descr="FSR06BE">
+            <a:extLst>
+              <a:ext uri="{FF2B5EF4-FFF2-40B4-BE49-F238E27FC236}">
+                <a16:creationId xmlns:a16="http://schemas.microsoft.com/office/drawing/2014/main" id="{60FC08A9-8065-1678-D7E5-ED04F64CB31E}"/>
+              </a:ext>
+            </a:extLst>
+          </p:cNvPr>
+          <p:cNvPicPr>
+            <a:picLocks noChangeAspect="1" noChangeArrowheads="1"/>
+          </p:cNvPicPr>
+          <p:nvPr/>
+        </p:nvPicPr>
+        <p:blipFill>
+          <a:blip r:embed="rId2">
+            <a:extLst>
+              <a:ext uri="{28A0092B-C50C-407E-A947-70E740481C1C}">
+                <a14:useLocalDpi xmlns:a14="http://schemas.microsoft.com/office/drawing/2010/main" val="0"/>
+              </a:ext>
+            </a:extLst>
+          </a:blip>
+          <a:srcRect/>
+          <a:stretch>
+            <a:fillRect/>
+          </a:stretch>
+        </p:blipFill>
+        <p:spPr bwMode="auto">
+          <a:xfrm>
+            <a:off x="2220522" y="3675274"/>
+            <a:ext cx="2636626" cy="2636626"/>
+          </a:xfrm>
+          <a:prstGeom prst="rect">
+            <a:avLst/>
+          </a:prstGeom>
+          <a:noFill/>
+          <a:extLst>
+            <a:ext uri="{909E8E84-426E-40DD-AFC4-6F175D3DCCD1}">
+              <a14:hiddenFill xmlns:a14="http://schemas.microsoft.com/office/drawing/2010/main">
+                <a:solidFill>
+                  <a:srgbClr val="FFFFFF"/>
+                </a:solidFill>
+              </a14:hiddenFill>
+            </a:ext>
+          </a:extLst>
+        </p:spPr>
+      </p:pic>
+      <p:pic>
+        <p:nvPicPr>
+          <p:cNvPr id="5126" name="Picture 6">
+            <a:extLst>
+              <a:ext uri="{FF2B5EF4-FFF2-40B4-BE49-F238E27FC236}">
+                <a16:creationId xmlns:a16="http://schemas.microsoft.com/office/drawing/2014/main" id="{9F7252CE-47A0-1CD6-25CD-754549B2A0C4}"/>
+              </a:ext>
+            </a:extLst>
+          </p:cNvPr>
+          <p:cNvPicPr>
+            <a:picLocks noChangeAspect="1" noChangeArrowheads="1"/>
+          </p:cNvPicPr>
+          <p:nvPr/>
+        </p:nvPicPr>
+        <p:blipFill>
+          <a:blip r:embed="rId3">
+            <a:extLst>
+              <a:ext uri="{28A0092B-C50C-407E-A947-70E740481C1C}">
+                <a14:useLocalDpi xmlns:a14="http://schemas.microsoft.com/office/drawing/2010/main" val="0"/>
+              </a:ext>
+            </a:extLst>
+          </a:blip>
+          <a:srcRect/>
+          <a:stretch>
+            <a:fillRect/>
+          </a:stretch>
+        </p:blipFill>
+        <p:spPr bwMode="auto">
+          <a:xfrm>
+            <a:off x="7334853" y="2994409"/>
+            <a:ext cx="3605060" cy="3605060"/>
+          </a:xfrm>
+          <a:prstGeom prst="rect">
+            <a:avLst/>
+          </a:prstGeom>
+          <a:noFill/>
+          <a:extLst>
+            <a:ext uri="{909E8E84-426E-40DD-AFC4-6F175D3DCCD1}">
+              <a14:hiddenFill xmlns:a14="http://schemas.microsoft.com/office/drawing/2010/main">
+                <a:solidFill>
+                  <a:srgbClr val="FFFFFF"/>
+                </a:solidFill>
+              </a14:hiddenFill>
+            </a:ext>
+          </a:extLst>
+        </p:spPr>
+      </p:pic>
+    </p:spTree>
+    <p:extLst>
+      <p:ext uri="{BB962C8B-B14F-4D97-AF65-F5344CB8AC3E}">
+        <p14:creationId xmlns:p14="http://schemas.microsoft.com/office/powerpoint/2010/main" val="1880629775"/>
+      </p:ext>
+    </p:extLst>
+  </p:cSld>
+  <p:clrMapOvr>
+    <a:masterClrMapping/>
+  </p:clrMapOvr>
+</p:sld>
+</file>
+
+<file path=ppt/slides/slide12.xml><?xml version="1.0" encoding="utf-8"?>
+<p:sld xmlns:a="http://schemas.openxmlformats.org/drawingml/2006/main" xmlns:r="http://schemas.openxmlformats.org/officeDocument/2006/relationships" xmlns:p="http://schemas.openxmlformats.org/presentationml/2006/main">
+  <p:cSld>
+    <p:bg>
+      <p:bgPr>
+        <a:solidFill>
+          <a:schemeClr val="bg1"/>
+        </a:solidFill>
+        <a:effectLst/>
+      </p:bgPr>
+    </p:bg>
+    <p:spTree>
+      <p:nvGrpSpPr>
+        <p:cNvPr id="1" name=""/>
+        <p:cNvGrpSpPr/>
+        <p:nvPr/>
+      </p:nvGrpSpPr>
+      <p:grpSpPr>
+        <a:xfrm>
+          <a:off x="0" y="0"/>
+          <a:ext cx="0" cy="0"/>
+          <a:chOff x="0" y="0"/>
+          <a:chExt cx="0" cy="0"/>
+        </a:xfrm>
+      </p:grpSpPr>
+      <p:sp useBgFill="1">
+        <p:nvSpPr>
           <p:cNvPr id="9225" name="Rectangle 9224">
             <a:extLst>
               <a:ext uri="{FF2B5EF4-FFF2-40B4-BE49-F238E27FC236}">
@@ -5218,38 +7277,38 @@
           <a:lstStyle/>
           <a:p>
             <a:r>
-              <a:rPr lang="pl-PL" sz="2200"/>
+              <a:rPr lang="pl-PL" sz="2200" dirty="0"/>
               <a:t>Wymagania:</a:t>
             </a:r>
           </a:p>
           <a:p>
             <a:pPr lvl="1"/>
             <a:r>
-              <a:rPr lang="pl-PL" sz="2200"/>
-              <a:t>Male wymiary</a:t>
+              <a:rPr lang="pl-PL" sz="2200" dirty="0"/>
+              <a:t>Małe wymiary</a:t>
             </a:r>
           </a:p>
           <a:p>
             <a:pPr lvl="1"/>
             <a:r>
-              <a:rPr lang="pl-PL" sz="2200"/>
+              <a:rPr lang="pl-PL" sz="2200" dirty="0"/>
               <a:t>Małe zużycie energii</a:t>
             </a:r>
           </a:p>
           <a:p>
             <a:pPr lvl="1"/>
             <a:r>
-              <a:rPr lang="pl-PL" sz="2200"/>
+              <a:rPr lang="pl-PL" sz="2200" dirty="0"/>
               <a:t>Łączność bezprzewodowa</a:t>
             </a:r>
           </a:p>
           <a:p>
             <a:pPr lvl="1"/>
-            <a:endParaRPr lang="pl-PL" sz="2200"/>
+            <a:endParaRPr lang="pl-PL" sz="2200" dirty="0"/>
           </a:p>
           <a:p>
             <a:pPr lvl="1"/>
-            <a:endParaRPr lang="pl-PL" sz="2200"/>
+            <a:endParaRPr lang="pl-PL" sz="2200" dirty="0"/>
           </a:p>
         </p:txBody>
       </p:sp>
@@ -5266,7 +7325,7 @@
 </p:sld>
 </file>
 
-<file path=ppt/slides/slide11.xml><?xml version="1.0" encoding="utf-8"?>
+<file path=ppt/slides/slide13.xml><?xml version="1.0" encoding="utf-8"?>
 <p:sld xmlns:a="http://schemas.openxmlformats.org/drawingml/2006/main" xmlns:r="http://schemas.openxmlformats.org/officeDocument/2006/relationships" xmlns:p="http://schemas.openxmlformats.org/presentationml/2006/main">
   <p:cSld>
     <p:bg>
@@ -6791,6 +8850,89 @@
 </p:sld>
 </file>
 
+<file path=ppt/slides/slide14.xml><?xml version="1.0" encoding="utf-8"?>
+<p:sld xmlns:a="http://schemas.openxmlformats.org/drawingml/2006/main" xmlns:r="http://schemas.openxmlformats.org/officeDocument/2006/relationships" xmlns:p="http://schemas.openxmlformats.org/presentationml/2006/main">
+  <p:cSld>
+    <p:spTree>
+      <p:nvGrpSpPr>
+        <p:cNvPr id="1" name=""/>
+        <p:cNvGrpSpPr/>
+        <p:nvPr/>
+      </p:nvGrpSpPr>
+      <p:grpSpPr>
+        <a:xfrm>
+          <a:off x="0" y="0"/>
+          <a:ext cx="0" cy="0"/>
+          <a:chOff x="0" y="0"/>
+          <a:chExt cx="0" cy="0"/>
+        </a:xfrm>
+      </p:grpSpPr>
+      <p:sp>
+        <p:nvSpPr>
+          <p:cNvPr id="2" name="Title 1">
+            <a:extLst>
+              <a:ext uri="{FF2B5EF4-FFF2-40B4-BE49-F238E27FC236}">
+                <a16:creationId xmlns:a16="http://schemas.microsoft.com/office/drawing/2014/main" id="{BB7E1B3C-170C-CB80-D38B-E9BA830BE29E}"/>
+              </a:ext>
+            </a:extLst>
+          </p:cNvPr>
+          <p:cNvSpPr>
+            <a:spLocks noGrp="1"/>
+          </p:cNvSpPr>
+          <p:nvPr>
+            <p:ph type="title"/>
+          </p:nvPr>
+        </p:nvSpPr>
+        <p:spPr/>
+        <p:txBody>
+          <a:bodyPr/>
+          <a:lstStyle/>
+          <a:p>
+            <a:r>
+              <a:rPr lang="en-PL" dirty="0"/>
+              <a:t>Środowisko programistyczne</a:t>
+            </a:r>
+          </a:p>
+        </p:txBody>
+      </p:sp>
+      <p:sp>
+        <p:nvSpPr>
+          <p:cNvPr id="3" name="Content Placeholder 2">
+            <a:extLst>
+              <a:ext uri="{FF2B5EF4-FFF2-40B4-BE49-F238E27FC236}">
+                <a16:creationId xmlns:a16="http://schemas.microsoft.com/office/drawing/2014/main" id="{97FF0198-EE9D-6F56-640B-C259C2EA8F03}"/>
+              </a:ext>
+            </a:extLst>
+          </p:cNvPr>
+          <p:cNvSpPr>
+            <a:spLocks noGrp="1"/>
+          </p:cNvSpPr>
+          <p:nvPr>
+            <p:ph idx="1"/>
+          </p:nvPr>
+        </p:nvSpPr>
+        <p:spPr/>
+        <p:txBody>
+          <a:bodyPr/>
+          <a:lstStyle/>
+          <a:p>
+            <a:endParaRPr lang="en-PL" dirty="0"/>
+          </a:p>
+        </p:txBody>
+      </p:sp>
+    </p:spTree>
+    <p:extLst>
+      <p:ext uri="{BB962C8B-B14F-4D97-AF65-F5344CB8AC3E}">
+        <p14:creationId xmlns:p14="http://schemas.microsoft.com/office/powerpoint/2010/main" val="4093989474"/>
+      </p:ext>
+    </p:extLst>
+  </p:cSld>
+  <p:clrMapOvr>
+    <a:masterClrMapping/>
+  </p:clrMapOvr>
+</p:sld>
+</file>
+
 <file path=ppt/slides/slide2.xml><?xml version="1.0" encoding="utf-8"?>
 <p:sld xmlns:a="http://schemas.openxmlformats.org/drawingml/2006/main" xmlns:r="http://schemas.openxmlformats.org/officeDocument/2006/relationships" xmlns:p="http://schemas.openxmlformats.org/presentationml/2006/main">
   <p:cSld>
@@ -6866,14 +9008,14 @@
             <a:pPr lvl="1"/>
             <a:r>
               <a:rPr lang="pl-PL" dirty="0"/>
-              <a:t>Przyśpieszenia liniowego i kątowego</a:t>
+              <a:t>Przyśpieszenia liniowego </a:t>
             </a:r>
           </a:p>
           <a:p>
             <a:pPr lvl="1"/>
             <a:r>
               <a:rPr lang="pl-PL" dirty="0"/>
-              <a:t>Miejsc styku piłki z podłożem lub graczem</a:t>
+              <a:t>przyśpieszenia kątowego</a:t>
             </a:r>
           </a:p>
           <a:p>
@@ -6883,6 +9025,7 @@
             </a:r>
           </a:p>
           <a:p>
+            <a:pPr lvl="1"/>
             <a:r>
               <a:rPr lang="pl-PL" dirty="0"/>
               <a:t>Bluetooth </a:t>
@@ -6904,6 +9047,611 @@
 </file>
 
 <file path=ppt/slides/slide3.xml><?xml version="1.0" encoding="utf-8"?>
+<p:sld xmlns:a="http://schemas.openxmlformats.org/drawingml/2006/main" xmlns:r="http://schemas.openxmlformats.org/officeDocument/2006/relationships" xmlns:p="http://schemas.openxmlformats.org/presentationml/2006/main">
+  <p:cSld>
+    <p:spTree>
+      <p:nvGrpSpPr>
+        <p:cNvPr id="1" name=""/>
+        <p:cNvGrpSpPr/>
+        <p:nvPr/>
+      </p:nvGrpSpPr>
+      <p:grpSpPr>
+        <a:xfrm>
+          <a:off x="0" y="0"/>
+          <a:ext cx="0" cy="0"/>
+          <a:chOff x="0" y="0"/>
+          <a:chExt cx="0" cy="0"/>
+        </a:xfrm>
+      </p:grpSpPr>
+      <p:sp>
+        <p:nvSpPr>
+          <p:cNvPr id="2" name="Title 1">
+            <a:extLst>
+              <a:ext uri="{FF2B5EF4-FFF2-40B4-BE49-F238E27FC236}">
+                <a16:creationId xmlns:a16="http://schemas.microsoft.com/office/drawing/2014/main" id="{9C2366FB-8A4C-1D3F-748A-1E8F7E050C72}"/>
+              </a:ext>
+            </a:extLst>
+          </p:cNvPr>
+          <p:cNvSpPr>
+            <a:spLocks noGrp="1"/>
+          </p:cNvSpPr>
+          <p:nvPr>
+            <p:ph type="title"/>
+          </p:nvPr>
+        </p:nvSpPr>
+        <p:spPr/>
+        <p:txBody>
+          <a:bodyPr/>
+          <a:lstStyle/>
+          <a:p>
+            <a:pPr algn="ctr"/>
+            <a:r>
+              <a:rPr lang="en-PL" dirty="0"/>
+              <a:t>Schemat blokowy systemu</a:t>
+            </a:r>
+          </a:p>
+        </p:txBody>
+      </p:sp>
+      <p:sp>
+        <p:nvSpPr>
+          <p:cNvPr id="3" name="Content Placeholder 2">
+            <a:extLst>
+              <a:ext uri="{FF2B5EF4-FFF2-40B4-BE49-F238E27FC236}">
+                <a16:creationId xmlns:a16="http://schemas.microsoft.com/office/drawing/2014/main" id="{1E455E78-CD2F-F8DD-3CE9-01960BD0BD62}"/>
+              </a:ext>
+            </a:extLst>
+          </p:cNvPr>
+          <p:cNvSpPr>
+            <a:spLocks noGrp="1"/>
+          </p:cNvSpPr>
+          <p:nvPr>
+            <p:ph idx="1"/>
+          </p:nvPr>
+        </p:nvSpPr>
+        <p:spPr/>
+        <p:txBody>
+          <a:bodyPr/>
+          <a:lstStyle/>
+          <a:p>
+            <a:endParaRPr lang="en-PL" dirty="0"/>
+          </a:p>
+        </p:txBody>
+      </p:sp>
+      <p:sp>
+        <p:nvSpPr>
+          <p:cNvPr id="4" name="Rounded Rectangle 3">
+            <a:extLst>
+              <a:ext uri="{FF2B5EF4-FFF2-40B4-BE49-F238E27FC236}">
+                <a16:creationId xmlns:a16="http://schemas.microsoft.com/office/drawing/2014/main" id="{245E5155-2DB8-2DD5-69C3-EB033FAE1543}"/>
+              </a:ext>
+            </a:extLst>
+          </p:cNvPr>
+          <p:cNvSpPr/>
+          <p:nvPr/>
+        </p:nvSpPr>
+        <p:spPr>
+          <a:xfrm>
+            <a:off x="4564453" y="3429000"/>
+            <a:ext cx="3063094" cy="1362974"/>
+          </a:xfrm>
+          <a:prstGeom prst="roundRect">
+            <a:avLst/>
+          </a:prstGeom>
+        </p:spPr>
+        <p:style>
+          <a:lnRef idx="2">
+            <a:schemeClr val="accent1">
+              <a:shade val="15000"/>
+            </a:schemeClr>
+          </a:lnRef>
+          <a:fillRef idx="1">
+            <a:schemeClr val="accent1"/>
+          </a:fillRef>
+          <a:effectRef idx="0">
+            <a:schemeClr val="accent1"/>
+          </a:effectRef>
+          <a:fontRef idx="minor">
+            <a:schemeClr val="lt1"/>
+          </a:fontRef>
+        </p:style>
+        <p:txBody>
+          <a:bodyPr rtlCol="0" anchor="ctr"/>
+          <a:lstStyle/>
+          <a:p>
+            <a:pPr algn="ctr"/>
+            <a:r>
+              <a:rPr lang="en-PL" dirty="0"/>
+              <a:t>Mikroprocesor</a:t>
+            </a:r>
+          </a:p>
+        </p:txBody>
+      </p:sp>
+      <p:sp>
+        <p:nvSpPr>
+          <p:cNvPr id="6" name="Rounded Rectangle 5">
+            <a:extLst>
+              <a:ext uri="{FF2B5EF4-FFF2-40B4-BE49-F238E27FC236}">
+                <a16:creationId xmlns:a16="http://schemas.microsoft.com/office/drawing/2014/main" id="{BFBF06F0-C747-6C27-2DF6-9726FB61D10F}"/>
+              </a:ext>
+            </a:extLst>
+          </p:cNvPr>
+          <p:cNvSpPr/>
+          <p:nvPr/>
+        </p:nvSpPr>
+        <p:spPr>
+          <a:xfrm>
+            <a:off x="4842295" y="5432455"/>
+            <a:ext cx="2460324" cy="879445"/>
+          </a:xfrm>
+          <a:prstGeom prst="roundRect">
+            <a:avLst/>
+          </a:prstGeom>
+        </p:spPr>
+        <p:style>
+          <a:lnRef idx="2">
+            <a:schemeClr val="accent1">
+              <a:shade val="15000"/>
+            </a:schemeClr>
+          </a:lnRef>
+          <a:fillRef idx="1">
+            <a:schemeClr val="accent1"/>
+          </a:fillRef>
+          <a:effectRef idx="0">
+            <a:schemeClr val="accent1"/>
+          </a:effectRef>
+          <a:fontRef idx="minor">
+            <a:schemeClr val="lt1"/>
+          </a:fontRef>
+        </p:style>
+        <p:txBody>
+          <a:bodyPr rtlCol="0" anchor="ctr"/>
+          <a:lstStyle/>
+          <a:p>
+            <a:pPr algn="ctr"/>
+            <a:r>
+              <a:rPr lang="en-PL" dirty="0"/>
+              <a:t>Zasilanie akumulatorowe</a:t>
+            </a:r>
+          </a:p>
+        </p:txBody>
+      </p:sp>
+      <p:sp>
+        <p:nvSpPr>
+          <p:cNvPr id="7" name="Rounded Rectangle 6">
+            <a:extLst>
+              <a:ext uri="{FF2B5EF4-FFF2-40B4-BE49-F238E27FC236}">
+                <a16:creationId xmlns:a16="http://schemas.microsoft.com/office/drawing/2014/main" id="{C590B0CA-8DB2-BBD1-F190-2AE110EDD099}"/>
+              </a:ext>
+            </a:extLst>
+          </p:cNvPr>
+          <p:cNvSpPr/>
+          <p:nvPr/>
+        </p:nvSpPr>
+        <p:spPr>
+          <a:xfrm>
+            <a:off x="9135374" y="3429000"/>
+            <a:ext cx="2218426" cy="1362974"/>
+          </a:xfrm>
+          <a:prstGeom prst="roundRect">
+            <a:avLst/>
+          </a:prstGeom>
+        </p:spPr>
+        <p:style>
+          <a:lnRef idx="2">
+            <a:schemeClr val="accent1">
+              <a:shade val="15000"/>
+            </a:schemeClr>
+          </a:lnRef>
+          <a:fillRef idx="1">
+            <a:schemeClr val="accent1"/>
+          </a:fillRef>
+          <a:effectRef idx="0">
+            <a:schemeClr val="accent1"/>
+          </a:effectRef>
+          <a:fontRef idx="minor">
+            <a:schemeClr val="lt1"/>
+          </a:fontRef>
+        </p:style>
+        <p:txBody>
+          <a:bodyPr rtlCol="0" anchor="ctr"/>
+          <a:lstStyle/>
+          <a:p>
+            <a:pPr algn="ctr"/>
+            <a:r>
+              <a:rPr lang="en-PL" dirty="0"/>
+              <a:t>Żyroskop</a:t>
+            </a:r>
+          </a:p>
+        </p:txBody>
+      </p:sp>
+      <p:sp>
+        <p:nvSpPr>
+          <p:cNvPr id="8" name="Rounded Rectangle 7">
+            <a:extLst>
+              <a:ext uri="{FF2B5EF4-FFF2-40B4-BE49-F238E27FC236}">
+                <a16:creationId xmlns:a16="http://schemas.microsoft.com/office/drawing/2014/main" id="{ECD7D339-C9A3-78E1-19A8-6DD3637A305D}"/>
+              </a:ext>
+            </a:extLst>
+          </p:cNvPr>
+          <p:cNvSpPr/>
+          <p:nvPr/>
+        </p:nvSpPr>
+        <p:spPr>
+          <a:xfrm>
+            <a:off x="860215" y="3429000"/>
+            <a:ext cx="2129287" cy="1362974"/>
+          </a:xfrm>
+          <a:prstGeom prst="roundRect">
+            <a:avLst/>
+          </a:prstGeom>
+        </p:spPr>
+        <p:style>
+          <a:lnRef idx="2">
+            <a:schemeClr val="accent1">
+              <a:shade val="15000"/>
+            </a:schemeClr>
+          </a:lnRef>
+          <a:fillRef idx="1">
+            <a:schemeClr val="accent1"/>
+          </a:fillRef>
+          <a:effectRef idx="0">
+            <a:schemeClr val="accent1"/>
+          </a:effectRef>
+          <a:fontRef idx="minor">
+            <a:schemeClr val="lt1"/>
+          </a:fontRef>
+        </p:style>
+        <p:txBody>
+          <a:bodyPr rtlCol="0" anchor="ctr"/>
+          <a:lstStyle/>
+          <a:p>
+            <a:pPr algn="ctr"/>
+            <a:r>
+              <a:rPr lang="en-PL" dirty="0"/>
+              <a:t>Akcelerometr</a:t>
+            </a:r>
+          </a:p>
+        </p:txBody>
+      </p:sp>
+      <p:sp>
+        <p:nvSpPr>
+          <p:cNvPr id="9" name="Rounded Rectangle 8">
+            <a:extLst>
+              <a:ext uri="{FF2B5EF4-FFF2-40B4-BE49-F238E27FC236}">
+                <a16:creationId xmlns:a16="http://schemas.microsoft.com/office/drawing/2014/main" id="{CFAEA492-6570-57E4-3383-AE82B486D334}"/>
+              </a:ext>
+            </a:extLst>
+          </p:cNvPr>
+          <p:cNvSpPr/>
+          <p:nvPr/>
+        </p:nvSpPr>
+        <p:spPr>
+          <a:xfrm>
+            <a:off x="4842294" y="1387347"/>
+            <a:ext cx="2460324" cy="943822"/>
+          </a:xfrm>
+          <a:prstGeom prst="roundRect">
+            <a:avLst/>
+          </a:prstGeom>
+        </p:spPr>
+        <p:style>
+          <a:lnRef idx="2">
+            <a:schemeClr val="accent1">
+              <a:shade val="15000"/>
+            </a:schemeClr>
+          </a:lnRef>
+          <a:fillRef idx="1">
+            <a:schemeClr val="accent1"/>
+          </a:fillRef>
+          <a:effectRef idx="0">
+            <a:schemeClr val="accent1"/>
+          </a:effectRef>
+          <a:fontRef idx="minor">
+            <a:schemeClr val="lt1"/>
+          </a:fontRef>
+        </p:style>
+        <p:txBody>
+          <a:bodyPr rtlCol="0" anchor="ctr"/>
+          <a:lstStyle/>
+          <a:p>
+            <a:pPr algn="ctr"/>
+            <a:r>
+              <a:rPr lang="en-PL" dirty="0"/>
+              <a:t>Moduł bluetooth</a:t>
+            </a:r>
+          </a:p>
+        </p:txBody>
+      </p:sp>
+      <p:sp>
+        <p:nvSpPr>
+          <p:cNvPr id="12" name="Up-down Arrow 11">
+            <a:extLst>
+              <a:ext uri="{FF2B5EF4-FFF2-40B4-BE49-F238E27FC236}">
+                <a16:creationId xmlns:a16="http://schemas.microsoft.com/office/drawing/2014/main" id="{EFF4E1A0-0FEE-082B-65BA-A33F62CCE483}"/>
+              </a:ext>
+            </a:extLst>
+          </p:cNvPr>
+          <p:cNvSpPr/>
+          <p:nvPr/>
+        </p:nvSpPr>
+        <p:spPr>
+          <a:xfrm>
+            <a:off x="5830917" y="2497850"/>
+            <a:ext cx="483079" cy="813772"/>
+          </a:xfrm>
+          <a:prstGeom prst="upDownArrow">
+            <a:avLst/>
+          </a:prstGeom>
+        </p:spPr>
+        <p:style>
+          <a:lnRef idx="2">
+            <a:schemeClr val="accent1">
+              <a:shade val="15000"/>
+            </a:schemeClr>
+          </a:lnRef>
+          <a:fillRef idx="1">
+            <a:schemeClr val="accent1"/>
+          </a:fillRef>
+          <a:effectRef idx="0">
+            <a:schemeClr val="accent1"/>
+          </a:effectRef>
+          <a:fontRef idx="minor">
+            <a:schemeClr val="lt1"/>
+          </a:fontRef>
+        </p:style>
+        <p:txBody>
+          <a:bodyPr rtlCol="0" anchor="ctr"/>
+          <a:lstStyle/>
+          <a:p>
+            <a:pPr algn="ctr"/>
+            <a:endParaRPr lang="en-PL" dirty="0"/>
+          </a:p>
+        </p:txBody>
+      </p:sp>
+      <p:sp>
+        <p:nvSpPr>
+          <p:cNvPr id="13" name="Left-right Arrow 12">
+            <a:extLst>
+              <a:ext uri="{FF2B5EF4-FFF2-40B4-BE49-F238E27FC236}">
+                <a16:creationId xmlns:a16="http://schemas.microsoft.com/office/drawing/2014/main" id="{FB1FCDF3-E663-1F57-349F-2DF701616FD0}"/>
+              </a:ext>
+            </a:extLst>
+          </p:cNvPr>
+          <p:cNvSpPr/>
+          <p:nvPr/>
+        </p:nvSpPr>
+        <p:spPr>
+          <a:xfrm>
+            <a:off x="3056626" y="3860321"/>
+            <a:ext cx="1216324" cy="500332"/>
+          </a:xfrm>
+          <a:prstGeom prst="leftRightArrow">
+            <a:avLst/>
+          </a:prstGeom>
+        </p:spPr>
+        <p:style>
+          <a:lnRef idx="2">
+            <a:schemeClr val="accent1">
+              <a:shade val="15000"/>
+            </a:schemeClr>
+          </a:lnRef>
+          <a:fillRef idx="1">
+            <a:schemeClr val="accent1"/>
+          </a:fillRef>
+          <a:effectRef idx="0">
+            <a:schemeClr val="accent1"/>
+          </a:effectRef>
+          <a:fontRef idx="minor">
+            <a:schemeClr val="lt1"/>
+          </a:fontRef>
+        </p:style>
+        <p:txBody>
+          <a:bodyPr rtlCol="0" anchor="ctr"/>
+          <a:lstStyle/>
+          <a:p>
+            <a:pPr algn="ctr"/>
+            <a:r>
+              <a:rPr lang="en-PL" dirty="0"/>
+              <a:t>SPI</a:t>
+            </a:r>
+          </a:p>
+        </p:txBody>
+      </p:sp>
+      <p:sp>
+        <p:nvSpPr>
+          <p:cNvPr id="14" name="Left-right Arrow 13">
+            <a:extLst>
+              <a:ext uri="{FF2B5EF4-FFF2-40B4-BE49-F238E27FC236}">
+                <a16:creationId xmlns:a16="http://schemas.microsoft.com/office/drawing/2014/main" id="{E84CEC93-9E1F-42A1-0291-706A0146E8CC}"/>
+              </a:ext>
+            </a:extLst>
+          </p:cNvPr>
+          <p:cNvSpPr/>
+          <p:nvPr/>
+        </p:nvSpPr>
+        <p:spPr>
+          <a:xfrm>
+            <a:off x="7773298" y="3860321"/>
+            <a:ext cx="1216324" cy="500332"/>
+          </a:xfrm>
+          <a:prstGeom prst="leftRightArrow">
+            <a:avLst/>
+          </a:prstGeom>
+        </p:spPr>
+        <p:style>
+          <a:lnRef idx="2">
+            <a:schemeClr val="accent1">
+              <a:shade val="15000"/>
+            </a:schemeClr>
+          </a:lnRef>
+          <a:fillRef idx="1">
+            <a:schemeClr val="accent1"/>
+          </a:fillRef>
+          <a:effectRef idx="0">
+            <a:schemeClr val="accent1"/>
+          </a:effectRef>
+          <a:fontRef idx="minor">
+            <a:schemeClr val="lt1"/>
+          </a:fontRef>
+        </p:style>
+        <p:txBody>
+          <a:bodyPr rtlCol="0" anchor="ctr"/>
+          <a:lstStyle/>
+          <a:p>
+            <a:pPr algn="ctr"/>
+            <a:r>
+              <a:rPr lang="en-PL" dirty="0"/>
+              <a:t>SPI</a:t>
+            </a:r>
+          </a:p>
+        </p:txBody>
+      </p:sp>
+    </p:spTree>
+    <p:extLst>
+      <p:ext uri="{BB962C8B-B14F-4D97-AF65-F5344CB8AC3E}">
+        <p14:creationId xmlns:p14="http://schemas.microsoft.com/office/powerpoint/2010/main" val="3561412773"/>
+      </p:ext>
+    </p:extLst>
+  </p:cSld>
+  <p:clrMapOvr>
+    <a:masterClrMapping/>
+  </p:clrMapOvr>
+</p:sld>
+</file>
+
+<file path=ppt/slides/slide4.xml><?xml version="1.0" encoding="utf-8"?>
+<p:sld xmlns:a="http://schemas.openxmlformats.org/drawingml/2006/main" xmlns:r="http://schemas.openxmlformats.org/officeDocument/2006/relationships" xmlns:p="http://schemas.openxmlformats.org/presentationml/2006/main">
+  <p:cSld>
+    <p:spTree>
+      <p:nvGrpSpPr>
+        <p:cNvPr id="1" name=""/>
+        <p:cNvGrpSpPr/>
+        <p:nvPr/>
+      </p:nvGrpSpPr>
+      <p:grpSpPr>
+        <a:xfrm>
+          <a:off x="0" y="0"/>
+          <a:ext cx="0" cy="0"/>
+          <a:chOff x="0" y="0"/>
+          <a:chExt cx="0" cy="0"/>
+        </a:xfrm>
+      </p:grpSpPr>
+      <p:sp>
+        <p:nvSpPr>
+          <p:cNvPr id="2" name="Title 1">
+            <a:extLst>
+              <a:ext uri="{FF2B5EF4-FFF2-40B4-BE49-F238E27FC236}">
+                <a16:creationId xmlns:a16="http://schemas.microsoft.com/office/drawing/2014/main" id="{F77B5A6D-5EF3-D085-378D-9904EB4FE03D}"/>
+              </a:ext>
+            </a:extLst>
+          </p:cNvPr>
+          <p:cNvSpPr>
+            <a:spLocks noGrp="1"/>
+          </p:cNvSpPr>
+          <p:nvPr>
+            <p:ph type="title"/>
+          </p:nvPr>
+        </p:nvSpPr>
+        <p:spPr/>
+        <p:txBody>
+          <a:bodyPr/>
+          <a:lstStyle/>
+          <a:p>
+            <a:r>
+              <a:rPr lang="en-PL" dirty="0"/>
+              <a:t>Funkcjonalności</a:t>
+            </a:r>
+          </a:p>
+        </p:txBody>
+      </p:sp>
+      <p:sp>
+        <p:nvSpPr>
+          <p:cNvPr id="3" name="Content Placeholder 2">
+            <a:extLst>
+              <a:ext uri="{FF2B5EF4-FFF2-40B4-BE49-F238E27FC236}">
+                <a16:creationId xmlns:a16="http://schemas.microsoft.com/office/drawing/2014/main" id="{7A0BAD60-911C-5920-4B42-43DB680C8112}"/>
+              </a:ext>
+            </a:extLst>
+          </p:cNvPr>
+          <p:cNvSpPr>
+            <a:spLocks noGrp="1"/>
+          </p:cNvSpPr>
+          <p:nvPr>
+            <p:ph idx="1"/>
+          </p:nvPr>
+        </p:nvSpPr>
+        <p:spPr/>
+        <p:txBody>
+          <a:bodyPr/>
+          <a:lstStyle/>
+          <a:p>
+            <a:r>
+              <a:rPr lang="en-PL" dirty="0"/>
+              <a:t>Pomiar:</a:t>
+            </a:r>
+          </a:p>
+          <a:p>
+            <a:pPr lvl="1"/>
+            <a:r>
+              <a:rPr lang="en-PL" dirty="0"/>
+              <a:t>podkręcenia piłki</a:t>
+            </a:r>
+          </a:p>
+          <a:p>
+            <a:pPr lvl="1"/>
+            <a:r>
+              <a:rPr lang="en-PL" dirty="0"/>
+              <a:t>siły uderzenia</a:t>
+            </a:r>
+          </a:p>
+          <a:p>
+            <a:r>
+              <a:rPr lang="en-PL" dirty="0"/>
+              <a:t>Wyznaczenie toru lotu piłki</a:t>
+            </a:r>
+          </a:p>
+          <a:p>
+            <a:r>
+              <a:rPr lang="en-PL" dirty="0"/>
+              <a:t>Aproksymacja miejsca uderzenia/kopnięcia</a:t>
+            </a:r>
+          </a:p>
+          <a:p>
+            <a:r>
+              <a:rPr lang="en-PL" dirty="0"/>
+              <a:t>Gromadzenie </a:t>
+            </a:r>
+            <a:r>
+              <a:rPr lang="en-GB" dirty="0"/>
+              <a:t>i</a:t>
+            </a:r>
+            <a:r>
+              <a:rPr lang="en-PL" dirty="0"/>
+              <a:t> wyświetlanie informacji w aplikacji mobilnej</a:t>
+            </a:r>
+          </a:p>
+          <a:p>
+            <a:pPr marL="0" indent="0">
+              <a:buNone/>
+            </a:pPr>
+            <a:endParaRPr lang="en-PL" dirty="0"/>
+          </a:p>
+        </p:txBody>
+      </p:sp>
+    </p:spTree>
+    <p:extLst>
+      <p:ext uri="{BB962C8B-B14F-4D97-AF65-F5344CB8AC3E}">
+        <p14:creationId xmlns:p14="http://schemas.microsoft.com/office/powerpoint/2010/main" val="2474828624"/>
+      </p:ext>
+    </p:extLst>
+  </p:cSld>
+  <p:clrMapOvr>
+    <a:masterClrMapping/>
+  </p:clrMapOvr>
+</p:sld>
+</file>
+
+<file path=ppt/slides/slide5.xml><?xml version="1.0" encoding="utf-8"?>
 <p:sld xmlns:a="http://schemas.openxmlformats.org/drawingml/2006/main" xmlns:r="http://schemas.openxmlformats.org/officeDocument/2006/relationships" xmlns:p="http://schemas.openxmlformats.org/presentationml/2006/main">
   <p:cSld>
     <p:bg>
@@ -7509,7 +10257,7 @@
 </p:sld>
 </file>
 
-<file path=ppt/slides/slide4.xml><?xml version="1.0" encoding="utf-8"?>
+<file path=ppt/slides/slide6.xml><?xml version="1.0" encoding="utf-8"?>
 <p:sld xmlns:a="http://schemas.openxmlformats.org/drawingml/2006/main" xmlns:r="http://schemas.openxmlformats.org/officeDocument/2006/relationships" xmlns:p="http://schemas.openxmlformats.org/presentationml/2006/main">
   <p:cSld>
     <p:bg>
@@ -7894,13 +10642,13 @@
           <a:lstStyle/>
           <a:p>
             <a:r>
-              <a:rPr lang="pl-PL" sz="1800"/>
-              <a:t>pomiar o wysokiej rozdzielczości do ±200 g.</a:t>
+              <a:rPr lang="pl-PL" sz="1800" dirty="0"/>
+              <a:t>pomiar o wysokiej rozdzielczości do ±400 g.</a:t>
             </a:r>
           </a:p>
           <a:p>
             <a:r>
-              <a:rPr lang="pl-PL" sz="1800"/>
+              <a:rPr lang="pl-PL" sz="1800" dirty="0"/>
               <a:t>Pomiar w 3 wymiarach</a:t>
             </a:r>
           </a:p>
@@ -7908,13 +10656,13 @@
             <a:pPr marL="0" indent="0">
               <a:buNone/>
             </a:pPr>
-            <a:endParaRPr lang="pl-PL" sz="1800"/>
+            <a:endParaRPr lang="pl-PL" sz="1800" dirty="0"/>
           </a:p>
           <a:p>
             <a:pPr marL="0" indent="0">
               <a:buNone/>
             </a:pPr>
-            <a:endParaRPr lang="pl-PL" sz="1800"/>
+            <a:endParaRPr lang="pl-PL" sz="1800" dirty="0"/>
           </a:p>
         </p:txBody>
       </p:sp>
@@ -8662,7 +11410,7 @@
 </p:sld>
 </file>
 
-<file path=ppt/slides/slide5.xml><?xml version="1.0" encoding="utf-8"?>
+<file path=ppt/slides/slide7.xml><?xml version="1.0" encoding="utf-8"?>
 <p:sld xmlns:a="http://schemas.openxmlformats.org/drawingml/2006/main" xmlns:r="http://schemas.openxmlformats.org/officeDocument/2006/relationships" xmlns:p="http://schemas.openxmlformats.org/presentationml/2006/main">
   <p:cSld>
     <p:bg>
@@ -10281,7 +13029,7 @@
 </p:sld>
 </file>
 
-<file path=ppt/slides/slide6.xml><?xml version="1.0" encoding="utf-8"?>
+<file path=ppt/slides/slide8.xml><?xml version="1.0" encoding="utf-8"?>
 <p:sld xmlns:a="http://schemas.openxmlformats.org/drawingml/2006/main" xmlns:r="http://schemas.openxmlformats.org/officeDocument/2006/relationships" xmlns:p="http://schemas.openxmlformats.org/presentationml/2006/main">
   <p:cSld>
     <p:bg>
@@ -10755,7 +13503,7 @@
         </p:blipFill>
         <p:spPr bwMode="auto">
           <a:xfrm>
-            <a:off x="5648762" y="285249"/>
+            <a:off x="5403713" y="171390"/>
             <a:ext cx="6515220" cy="6515220"/>
           </a:xfrm>
           <a:prstGeom prst="rect">
@@ -10786,7 +13534,7 @@
 </p:sld>
 </file>
 
-<file path=ppt/slides/slide7.xml><?xml version="1.0" encoding="utf-8"?>
+<file path=ppt/slides/slide9.xml><?xml version="1.0" encoding="utf-8"?>
 <p:sld xmlns:a="http://schemas.openxmlformats.org/drawingml/2006/main" xmlns:r="http://schemas.openxmlformats.org/officeDocument/2006/relationships" xmlns:p="http://schemas.openxmlformats.org/presentationml/2006/main">
   <p:cSld>
     <p:bg>
@@ -11762,2062 +14510,6 @@
     <p:extLst>
       <p:ext uri="{BB962C8B-B14F-4D97-AF65-F5344CB8AC3E}">
         <p14:creationId xmlns:p14="http://schemas.microsoft.com/office/powerpoint/2010/main" val="35650660"/>
-      </p:ext>
-    </p:extLst>
-  </p:cSld>
-  <p:clrMapOvr>
-    <a:masterClrMapping/>
-  </p:clrMapOvr>
-</p:sld>
-</file>
-
-<file path=ppt/slides/slide8.xml><?xml version="1.0" encoding="utf-8"?>
-<p:sld xmlns:a="http://schemas.openxmlformats.org/drawingml/2006/main" xmlns:r="http://schemas.openxmlformats.org/officeDocument/2006/relationships" xmlns:p="http://schemas.openxmlformats.org/presentationml/2006/main">
-  <p:cSld>
-    <p:bg>
-      <p:bgPr>
-        <a:solidFill>
-          <a:schemeClr val="bg1"/>
-        </a:solidFill>
-        <a:effectLst/>
-      </p:bgPr>
-    </p:bg>
-    <p:spTree>
-      <p:nvGrpSpPr>
-        <p:cNvPr id="1" name=""/>
-        <p:cNvGrpSpPr/>
-        <p:nvPr/>
-      </p:nvGrpSpPr>
-      <p:grpSpPr>
-        <a:xfrm>
-          <a:off x="0" y="0"/>
-          <a:ext cx="0" cy="0"/>
-          <a:chOff x="0" y="0"/>
-          <a:chExt cx="0" cy="0"/>
-        </a:xfrm>
-      </p:grpSpPr>
-      <p:sp useBgFill="1">
-        <p:nvSpPr>
-          <p:cNvPr id="9" name="Rectangle 8">
-            <a:extLst>
-              <a:ext uri="{FF2B5EF4-FFF2-40B4-BE49-F238E27FC236}">
-                <a16:creationId xmlns:a16="http://schemas.microsoft.com/office/drawing/2014/main" id="{A8384FB5-9ADC-4DDC-881B-597D56F5B15D}"/>
-              </a:ext>
-              <a:ext uri="{C183D7F6-B498-43B3-948B-1728B52AA6E4}">
-                <adec:decorative xmlns:adec="http://schemas.microsoft.com/office/drawing/2017/decorative" val="1"/>
-              </a:ext>
-            </a:extLst>
-          </p:cNvPr>
-          <p:cNvSpPr>
-            <a:spLocks noGrp="1" noRot="1" noChangeAspect="1" noMove="1" noResize="1" noEditPoints="1" noAdjustHandles="1" noChangeArrowheads="1" noChangeShapeType="1" noTextEdit="1"/>
-          </p:cNvSpPr>
-          <p:nvPr>
-            <p:extLst>
-              <p:ext uri="{386F3935-93C4-4BCD-93E2-E3B085C9AB24}">
-                <p16:designElem xmlns:p16="http://schemas.microsoft.com/office/powerpoint/2015/main" val="1"/>
-              </p:ext>
-            </p:extLst>
-          </p:nvPr>
-        </p:nvSpPr>
-        <p:spPr>
-          <a:xfrm>
-            <a:off x="0" y="0"/>
-            <a:ext cx="12192000" cy="6858000"/>
-          </a:xfrm>
-          <a:prstGeom prst="rect">
-            <a:avLst/>
-          </a:prstGeom>
-          <a:ln w="12700" cap="flat" cmpd="sng" algn="ctr">
-            <a:noFill/>
-            <a:prstDash val="solid"/>
-            <a:miter lim="800000"/>
-          </a:ln>
-          <a:effectLst/>
-          <a:extLst>
-            <a:ext uri="{91240B29-F687-4F45-9708-019B960494DF}">
-              <a14:hiddenLine xmlns:a14="http://schemas.microsoft.com/office/drawing/2010/main" w="12700" cap="flat" cmpd="sng" algn="ctr">
-                <a:solidFill>
-                  <a:schemeClr val="accent1">
-                    <a:shade val="50000"/>
-                  </a:schemeClr>
-                </a:solidFill>
-                <a:prstDash val="solid"/>
-                <a:miter lim="800000"/>
-              </a14:hiddenLine>
-            </a:ext>
-          </a:extLst>
-        </p:spPr>
-        <p:style>
-          <a:lnRef idx="2">
-            <a:schemeClr val="accent1">
-              <a:shade val="50000"/>
-            </a:schemeClr>
-          </a:lnRef>
-          <a:fillRef idx="1">
-            <a:schemeClr val="accent1"/>
-          </a:fillRef>
-          <a:effectRef idx="0">
-            <a:schemeClr val="accent1"/>
-          </a:effectRef>
-          <a:fontRef idx="minor">
-            <a:schemeClr val="lt1"/>
-          </a:fontRef>
-        </p:style>
-        <p:txBody>
-          <a:bodyPr rtlCol="0" anchor="ctr"/>
-          <a:lstStyle/>
-          <a:p>
-            <a:pPr algn="ctr"/>
-            <a:endParaRPr lang="en-US"/>
-          </a:p>
-        </p:txBody>
-      </p:sp>
-      <p:sp>
-        <p:nvSpPr>
-          <p:cNvPr id="11" name="Rectangle 10">
-            <a:extLst>
-              <a:ext uri="{FF2B5EF4-FFF2-40B4-BE49-F238E27FC236}">
-                <a16:creationId xmlns:a16="http://schemas.microsoft.com/office/drawing/2014/main" id="{1199E1B1-A8C0-4FE8-A5A8-1CB41D69F857}"/>
-              </a:ext>
-              <a:ext uri="{C183D7F6-B498-43B3-948B-1728B52AA6E4}">
-                <adec:decorative xmlns:adec="http://schemas.microsoft.com/office/drawing/2017/decorative" val="1"/>
-              </a:ext>
-            </a:extLst>
-          </p:cNvPr>
-          <p:cNvSpPr>
-            <a:spLocks noGrp="1" noRot="1" noChangeAspect="1" noMove="1" noResize="1" noEditPoints="1" noAdjustHandles="1" noChangeArrowheads="1" noChangeShapeType="1" noTextEdit="1"/>
-          </p:cNvSpPr>
-          <p:nvPr>
-            <p:extLst>
-              <p:ext uri="{386F3935-93C4-4BCD-93E2-E3B085C9AB24}">
-                <p16:designElem xmlns:p16="http://schemas.microsoft.com/office/powerpoint/2015/main" val="1"/>
-              </p:ext>
-            </p:extLst>
-          </p:nvPr>
-        </p:nvSpPr>
-        <p:spPr>
-          <a:xfrm rot="10800000" flipH="1">
-            <a:off x="2" y="0"/>
-            <a:ext cx="12191998" cy="1575955"/>
-          </a:xfrm>
-          <a:prstGeom prst="rect">
-            <a:avLst/>
-          </a:prstGeom>
-          <a:gradFill>
-            <a:gsLst>
-              <a:gs pos="0">
-                <a:srgbClr val="000000">
-                  <a:alpha val="96000"/>
-                </a:srgbClr>
-              </a:gs>
-              <a:gs pos="100000">
-                <a:schemeClr val="accent1">
-                  <a:lumMod val="75000"/>
-                </a:schemeClr>
-              </a:gs>
-            </a:gsLst>
-            <a:lin ang="6000000" scaled="0"/>
-          </a:gradFill>
-          <a:ln>
-            <a:noFill/>
-          </a:ln>
-        </p:spPr>
-        <p:style>
-          <a:lnRef idx="2">
-            <a:schemeClr val="accent1">
-              <a:shade val="50000"/>
-            </a:schemeClr>
-          </a:lnRef>
-          <a:fillRef idx="1">
-            <a:schemeClr val="accent1"/>
-          </a:fillRef>
-          <a:effectRef idx="0">
-            <a:schemeClr val="accent1"/>
-          </a:effectRef>
-          <a:fontRef idx="minor">
-            <a:schemeClr val="lt1"/>
-          </a:fontRef>
-        </p:style>
-        <p:txBody>
-          <a:bodyPr rtlCol="0" anchor="ctr"/>
-          <a:lstStyle/>
-          <a:p>
-            <a:pPr algn="ctr"/>
-            <a:endParaRPr lang="en-US"/>
-          </a:p>
-        </p:txBody>
-      </p:sp>
-      <p:sp>
-        <p:nvSpPr>
-          <p:cNvPr id="13" name="Rectangle 12">
-            <a:extLst>
-              <a:ext uri="{FF2B5EF4-FFF2-40B4-BE49-F238E27FC236}">
-                <a16:creationId xmlns:a16="http://schemas.microsoft.com/office/drawing/2014/main" id="{84A8DE83-DE75-4B41-9DB4-A7EC0B0DEC0B}"/>
-              </a:ext>
-              <a:ext uri="{C183D7F6-B498-43B3-948B-1728B52AA6E4}">
-                <adec:decorative xmlns:adec="http://schemas.microsoft.com/office/drawing/2017/decorative" val="1"/>
-              </a:ext>
-            </a:extLst>
-          </p:cNvPr>
-          <p:cNvSpPr>
-            <a:spLocks noGrp="1" noRot="1" noChangeAspect="1" noMove="1" noResize="1" noEditPoints="1" noAdjustHandles="1" noChangeArrowheads="1" noChangeShapeType="1" noTextEdit="1"/>
-          </p:cNvSpPr>
-          <p:nvPr>
-            <p:extLst>
-              <p:ext uri="{386F3935-93C4-4BCD-93E2-E3B085C9AB24}">
-                <p16:designElem xmlns:p16="http://schemas.microsoft.com/office/powerpoint/2015/main" val="1"/>
-              </p:ext>
-            </p:extLst>
-          </p:nvPr>
-        </p:nvSpPr>
-        <p:spPr>
-          <a:xfrm>
-            <a:off x="0" y="0"/>
-            <a:ext cx="8128856" cy="1575461"/>
-          </a:xfrm>
-          <a:prstGeom prst="rect">
-            <a:avLst/>
-          </a:prstGeom>
-          <a:gradFill>
-            <a:gsLst>
-              <a:gs pos="0">
-                <a:schemeClr val="accent1">
-                  <a:alpha val="41000"/>
-                </a:schemeClr>
-              </a:gs>
-              <a:gs pos="74000">
-                <a:schemeClr val="accent1">
-                  <a:lumMod val="60000"/>
-                  <a:lumOff val="40000"/>
-                  <a:alpha val="0"/>
-                </a:schemeClr>
-              </a:gs>
-            </a:gsLst>
-            <a:lin ang="8400000" scaled="0"/>
-          </a:gradFill>
-          <a:ln>
-            <a:noFill/>
-          </a:ln>
-        </p:spPr>
-        <p:style>
-          <a:lnRef idx="2">
-            <a:schemeClr val="accent1">
-              <a:shade val="50000"/>
-            </a:schemeClr>
-          </a:lnRef>
-          <a:fillRef idx="1">
-            <a:schemeClr val="accent1"/>
-          </a:fillRef>
-          <a:effectRef idx="0">
-            <a:schemeClr val="accent1"/>
-          </a:effectRef>
-          <a:fontRef idx="minor">
-            <a:schemeClr val="lt1"/>
-          </a:fontRef>
-        </p:style>
-        <p:txBody>
-          <a:bodyPr rtlCol="0" anchor="ctr"/>
-          <a:lstStyle/>
-          <a:p>
-            <a:pPr algn="ctr"/>
-            <a:endParaRPr lang="en-US"/>
-          </a:p>
-        </p:txBody>
-      </p:sp>
-      <p:sp>
-        <p:nvSpPr>
-          <p:cNvPr id="15" name="Rectangle 14">
-            <a:extLst>
-              <a:ext uri="{FF2B5EF4-FFF2-40B4-BE49-F238E27FC236}">
-                <a16:creationId xmlns:a16="http://schemas.microsoft.com/office/drawing/2014/main" id="{A7009A0A-BEF5-4EAC-AF15-E4F9F002E239}"/>
-              </a:ext>
-              <a:ext uri="{C183D7F6-B498-43B3-948B-1728B52AA6E4}">
-                <adec:decorative xmlns:adec="http://schemas.microsoft.com/office/drawing/2017/decorative" val="1"/>
-              </a:ext>
-            </a:extLst>
-          </p:cNvPr>
-          <p:cNvSpPr>
-            <a:spLocks noGrp="1" noRot="1" noChangeAspect="1" noMove="1" noResize="1" noEditPoints="1" noAdjustHandles="1" noChangeArrowheads="1" noChangeShapeType="1" noTextEdit="1"/>
-          </p:cNvSpPr>
-          <p:nvPr>
-            <p:extLst>
-              <p:ext uri="{386F3935-93C4-4BCD-93E2-E3B085C9AB24}">
-                <p16:designElem xmlns:p16="http://schemas.microsoft.com/office/powerpoint/2015/main" val="1"/>
-              </p:ext>
-            </p:extLst>
-          </p:nvPr>
-        </p:nvSpPr>
-        <p:spPr>
-          <a:xfrm flipH="1">
-            <a:off x="-3" y="-1"/>
-            <a:ext cx="12192002" cy="1574311"/>
-          </a:xfrm>
-          <a:prstGeom prst="rect">
-            <a:avLst/>
-          </a:prstGeom>
-          <a:gradFill>
-            <a:gsLst>
-              <a:gs pos="0">
-                <a:srgbClr val="000000">
-                  <a:alpha val="63000"/>
-                </a:srgbClr>
-              </a:gs>
-              <a:gs pos="78000">
-                <a:schemeClr val="accent1">
-                  <a:alpha val="15000"/>
-                </a:schemeClr>
-              </a:gs>
-            </a:gsLst>
-            <a:lin ang="15600000" scaled="0"/>
-          </a:gradFill>
-          <a:ln>
-            <a:noFill/>
-          </a:ln>
-        </p:spPr>
-        <p:style>
-          <a:lnRef idx="2">
-            <a:schemeClr val="accent1">
-              <a:shade val="50000"/>
-            </a:schemeClr>
-          </a:lnRef>
-          <a:fillRef idx="1">
-            <a:schemeClr val="accent1"/>
-          </a:fillRef>
-          <a:effectRef idx="0">
-            <a:schemeClr val="accent1"/>
-          </a:effectRef>
-          <a:fontRef idx="minor">
-            <a:schemeClr val="lt1"/>
-          </a:fontRef>
-        </p:style>
-        <p:txBody>
-          <a:bodyPr rtlCol="0" anchor="ctr"/>
-          <a:lstStyle/>
-          <a:p>
-            <a:pPr algn="ctr"/>
-            <a:endParaRPr lang="en-US"/>
-          </a:p>
-        </p:txBody>
-      </p:sp>
-      <p:sp>
-        <p:nvSpPr>
-          <p:cNvPr id="2" name="Title 1">
-            <a:extLst>
-              <a:ext uri="{FF2B5EF4-FFF2-40B4-BE49-F238E27FC236}">
-                <a16:creationId xmlns:a16="http://schemas.microsoft.com/office/drawing/2014/main" id="{9FB2FDB8-4429-972E-A3CA-83B0FDC57953}"/>
-              </a:ext>
-            </a:extLst>
-          </p:cNvPr>
-          <p:cNvSpPr>
-            <a:spLocks noGrp="1"/>
-          </p:cNvSpPr>
-          <p:nvPr>
-            <p:ph type="title"/>
-          </p:nvPr>
-        </p:nvSpPr>
-        <p:spPr>
-          <a:xfrm>
-            <a:off x="699713" y="248038"/>
-            <a:ext cx="7063721" cy="1159200"/>
-          </a:xfrm>
-        </p:spPr>
-        <p:txBody>
-          <a:bodyPr vert="horz" lIns="91440" tIns="45720" rIns="91440" bIns="45720" rtlCol="0" anchor="ctr">
-            <a:normAutofit/>
-          </a:bodyPr>
-          <a:lstStyle/>
-          <a:p>
-            <a:r>
-              <a:rPr lang="en-US" sz="4000" kern="1200">
-                <a:solidFill>
-                  <a:srgbClr val="FFFFFF"/>
-                </a:solidFill>
-                <a:latin typeface="+mj-lt"/>
-                <a:ea typeface="+mj-ea"/>
-                <a:cs typeface="+mj-cs"/>
-              </a:rPr>
-              <a:t>Dostępne czujniki</a:t>
-            </a:r>
-          </a:p>
-        </p:txBody>
-      </p:sp>
-      <p:graphicFrame>
-        <p:nvGraphicFramePr>
-          <p:cNvPr id="4" name="Content Placeholder 3">
-            <a:extLst>
-              <a:ext uri="{FF2B5EF4-FFF2-40B4-BE49-F238E27FC236}">
-                <a16:creationId xmlns:a16="http://schemas.microsoft.com/office/drawing/2014/main" id="{308C0FAC-A52E-0D03-0BC4-86390973888F}"/>
-              </a:ext>
-            </a:extLst>
-          </p:cNvPr>
-          <p:cNvGraphicFramePr>
-            <a:graphicFrameLocks noGrp="1"/>
-          </p:cNvGraphicFramePr>
-          <p:nvPr>
-            <p:ph idx="1"/>
-            <p:extLst>
-              <p:ext uri="{D42A27DB-BD31-4B8C-83A1-F6EECF244321}">
-                <p14:modId xmlns:p14="http://schemas.microsoft.com/office/powerpoint/2010/main" val="3490197104"/>
-              </p:ext>
-            </p:extLst>
-          </p:nvPr>
-        </p:nvGraphicFramePr>
-        <p:xfrm>
-          <a:off x="2292515" y="1966293"/>
-          <a:ext cx="7606971" cy="4452176"/>
-        </p:xfrm>
-        <a:graphic>
-          <a:graphicData uri="http://schemas.openxmlformats.org/drawingml/2006/table">
-            <a:tbl>
-              <a:tblPr>
-                <a:tableStyleId>{69012ECD-51FC-41F1-AA8D-1B2483CD663E}</a:tableStyleId>
-              </a:tblPr>
-              <a:tblGrid>
-                <a:gridCol w="2285698">
-                  <a:extLst>
-                    <a:ext uri="{9D8B030D-6E8A-4147-A177-3AD203B41FA5}">
-                      <a16:colId xmlns:a16="http://schemas.microsoft.com/office/drawing/2014/main" val="2096868303"/>
-                    </a:ext>
-                  </a:extLst>
-                </a:gridCol>
-                <a:gridCol w="2371019">
-                  <a:extLst>
-                    <a:ext uri="{9D8B030D-6E8A-4147-A177-3AD203B41FA5}">
-                      <a16:colId xmlns:a16="http://schemas.microsoft.com/office/drawing/2014/main" val="2021592566"/>
-                    </a:ext>
-                  </a:extLst>
-                </a:gridCol>
-                <a:gridCol w="2950254">
-                  <a:extLst>
-                    <a:ext uri="{9D8B030D-6E8A-4147-A177-3AD203B41FA5}">
-                      <a16:colId xmlns:a16="http://schemas.microsoft.com/office/drawing/2014/main" val="2784358822"/>
-                    </a:ext>
-                  </a:extLst>
-                </a:gridCol>
-              </a:tblGrid>
-              <a:tr h="236920">
-                <a:tc>
-                  <a:txBody>
-                    <a:bodyPr/>
-                    <a:lstStyle/>
-                    <a:p>
-                      <a:pPr algn="l" fontAlgn="b">
-                        <a:buNone/>
-                      </a:pPr>
-                      <a:r>
-                        <a:rPr lang="pl-PL" sz="1200" u="none" strike="noStrike">
-                          <a:effectLst/>
-                        </a:rPr>
-                        <a:t>Urzadzenie</a:t>
-                      </a:r>
-                      <a:endParaRPr lang="pl-PL" sz="1200" b="0" i="0" u="none" strike="noStrike">
-                        <a:solidFill>
-                          <a:srgbClr val="000000"/>
-                        </a:solidFill>
-                        <a:effectLst/>
-                        <a:latin typeface="Aptos Narrow" panose="020B0004020202020204" pitchFamily="34" charset="0"/>
-                      </a:endParaRPr>
-                    </a:p>
-                  </a:txBody>
-                  <a:tcPr marL="8368" marR="8368" marT="8368" marB="0" anchor="b"/>
-                </a:tc>
-                <a:tc>
-                  <a:txBody>
-                    <a:bodyPr/>
-                    <a:lstStyle/>
-                    <a:p>
-                      <a:pPr algn="l" fontAlgn="b">
-                        <a:buNone/>
-                      </a:pPr>
-                      <a:r>
-                        <a:rPr lang="pl-PL" sz="1200" u="none" strike="noStrike">
-                          <a:effectLst/>
-                        </a:rPr>
-                        <a:t>IAM-20380HT</a:t>
-                      </a:r>
-                      <a:endParaRPr lang="pl-PL" sz="1200" b="0" i="0" u="none" strike="noStrike">
-                        <a:solidFill>
-                          <a:srgbClr val="000000"/>
-                        </a:solidFill>
-                        <a:effectLst/>
-                        <a:latin typeface="Calibri" panose="020F0502020204030204" pitchFamily="34" charset="0"/>
-                      </a:endParaRPr>
-                    </a:p>
-                  </a:txBody>
-                  <a:tcPr marL="8368" marR="8368" marT="8368" marB="0" anchor="b"/>
-                </a:tc>
-                <a:tc>
-                  <a:txBody>
-                    <a:bodyPr/>
-                    <a:lstStyle/>
-                    <a:p>
-                      <a:pPr algn="l" fontAlgn="b">
-                        <a:buNone/>
-                      </a:pPr>
-                      <a:r>
-                        <a:rPr lang="pl-PL" sz="1200" u="none" strike="noStrike" dirty="0">
-                          <a:effectLst/>
-                        </a:rPr>
-                        <a:t>I3G4250DTR</a:t>
-                      </a:r>
-                      <a:endParaRPr lang="pl-PL" sz="1200" b="0" i="0" u="none" strike="noStrike" dirty="0">
-                        <a:solidFill>
-                          <a:srgbClr val="000000"/>
-                        </a:solidFill>
-                        <a:effectLst/>
-                        <a:latin typeface="Calibri" panose="020F0502020204030204" pitchFamily="34" charset="0"/>
-                      </a:endParaRPr>
-                    </a:p>
-                  </a:txBody>
-                  <a:tcPr marL="8368" marR="8368" marT="8368" marB="0" anchor="b"/>
-                </a:tc>
-                <a:extLst>
-                  <a:ext uri="{0D108BD9-81ED-4DB2-BD59-A6C34878D82A}">
-                    <a16:rowId xmlns:a16="http://schemas.microsoft.com/office/drawing/2014/main" val="6816885"/>
-                  </a:ext>
-                </a:extLst>
-              </a:tr>
-              <a:tr h="424536">
-                <a:tc>
-                  <a:txBody>
-                    <a:bodyPr/>
-                    <a:lstStyle/>
-                    <a:p>
-                      <a:pPr algn="l" fontAlgn="b">
-                        <a:buNone/>
-                      </a:pPr>
-                      <a:r>
-                        <a:rPr lang="pl-PL" sz="1200" u="none" strike="noStrike">
-                          <a:effectLst/>
-                        </a:rPr>
-                        <a:t>Maks. Zakres FSR</a:t>
-                      </a:r>
-                      <a:endParaRPr lang="pl-PL" sz="1200" b="0" i="0" u="none" strike="noStrike">
-                        <a:solidFill>
-                          <a:srgbClr val="000000"/>
-                        </a:solidFill>
-                        <a:effectLst/>
-                        <a:latin typeface="Aptos Narrow" panose="020B0004020202020204" pitchFamily="34" charset="0"/>
-                      </a:endParaRPr>
-                    </a:p>
-                  </a:txBody>
-                  <a:tcPr marL="8368" marR="8368" marT="8368" marB="0" anchor="b"/>
-                </a:tc>
-                <a:tc>
-                  <a:txBody>
-                    <a:bodyPr/>
-                    <a:lstStyle/>
-                    <a:p>
-                      <a:pPr algn="l" fontAlgn="b">
-                        <a:buNone/>
-                      </a:pPr>
-                      <a:r>
-                        <a:rPr lang="en-US" sz="1200" u="none" strike="noStrike">
-                          <a:effectLst/>
-                        </a:rPr>
-                        <a:t>±250dps, ±500dps, ±1000dps, and ±2000dps,</a:t>
-                      </a:r>
-                      <a:endParaRPr lang="en-US" sz="1200" b="0" i="0" u="none" strike="noStrike">
-                        <a:solidFill>
-                          <a:srgbClr val="000000"/>
-                        </a:solidFill>
-                        <a:effectLst/>
-                        <a:latin typeface="Aptos Narrow" panose="020B0004020202020204" pitchFamily="34" charset="0"/>
-                      </a:endParaRPr>
-                    </a:p>
-                  </a:txBody>
-                  <a:tcPr marL="8368" marR="8368" marT="8368" marB="0" anchor="b"/>
-                </a:tc>
-                <a:tc>
-                  <a:txBody>
-                    <a:bodyPr/>
-                    <a:lstStyle/>
-                    <a:p>
-                      <a:pPr algn="l" fontAlgn="b">
-                        <a:buNone/>
-                      </a:pPr>
-                      <a:r>
-                        <a:rPr lang="pl-PL" sz="1200" u="none" strike="noStrike">
-                          <a:effectLst/>
-                        </a:rPr>
-                        <a:t>±245/±500/±2000g</a:t>
-                      </a:r>
-                      <a:endParaRPr lang="pl-PL" sz="1200" b="0" i="0" u="none" strike="noStrike">
-                        <a:solidFill>
-                          <a:srgbClr val="000000"/>
-                        </a:solidFill>
-                        <a:effectLst/>
-                        <a:latin typeface="Aptos Narrow" panose="020B0004020202020204" pitchFamily="34" charset="0"/>
-                      </a:endParaRPr>
-                    </a:p>
-                  </a:txBody>
-                  <a:tcPr marL="8368" marR="8368" marT="8368" marB="0" anchor="b"/>
-                </a:tc>
-                <a:extLst>
-                  <a:ext uri="{0D108BD9-81ED-4DB2-BD59-A6C34878D82A}">
-                    <a16:rowId xmlns:a16="http://schemas.microsoft.com/office/drawing/2014/main" val="1609692079"/>
-                  </a:ext>
-                </a:extLst>
-              </a:tr>
-              <a:tr h="236920">
-                <a:tc>
-                  <a:txBody>
-                    <a:bodyPr/>
-                    <a:lstStyle/>
-                    <a:p>
-                      <a:pPr algn="l" fontAlgn="b">
-                        <a:buNone/>
-                      </a:pPr>
-                      <a:r>
-                        <a:rPr lang="pl-PL" sz="1200" u="none" strike="noStrike">
-                          <a:effectLst/>
-                        </a:rPr>
-                        <a:t>Rozdzielczość ADCs</a:t>
-                      </a:r>
-                      <a:endParaRPr lang="pl-PL" sz="1200" b="0" i="0" u="none" strike="noStrike">
-                        <a:solidFill>
-                          <a:srgbClr val="000000"/>
-                        </a:solidFill>
-                        <a:effectLst/>
-                        <a:latin typeface="Aptos Narrow" panose="020B0004020202020204" pitchFamily="34" charset="0"/>
-                      </a:endParaRPr>
-                    </a:p>
-                  </a:txBody>
-                  <a:tcPr marL="8368" marR="8368" marT="8368" marB="0" anchor="b"/>
-                </a:tc>
-                <a:tc>
-                  <a:txBody>
-                    <a:bodyPr/>
-                    <a:lstStyle/>
-                    <a:p>
-                      <a:pPr algn="l" fontAlgn="b">
-                        <a:buNone/>
-                      </a:pPr>
-                      <a:r>
-                        <a:rPr lang="pl-PL" sz="1200" u="none" strike="noStrike">
-                          <a:effectLst/>
-                        </a:rPr>
-                        <a:t>16 bit</a:t>
-                      </a:r>
-                      <a:endParaRPr lang="pl-PL" sz="1200" b="0" i="0" u="none" strike="noStrike">
-                        <a:solidFill>
-                          <a:srgbClr val="000000"/>
-                        </a:solidFill>
-                        <a:effectLst/>
-                        <a:latin typeface="Aptos Narrow" panose="020B0004020202020204" pitchFamily="34" charset="0"/>
-                      </a:endParaRPr>
-                    </a:p>
-                  </a:txBody>
-                  <a:tcPr marL="8368" marR="8368" marT="8368" marB="0" anchor="b"/>
-                </a:tc>
-                <a:tc>
-                  <a:txBody>
-                    <a:bodyPr/>
-                    <a:lstStyle/>
-                    <a:p>
-                      <a:pPr algn="l" fontAlgn="b">
-                        <a:buNone/>
-                      </a:pPr>
-                      <a:r>
-                        <a:rPr lang="pl-PL" sz="1200" u="none" strike="noStrike">
-                          <a:effectLst/>
-                        </a:rPr>
-                        <a:t>16 bit</a:t>
-                      </a:r>
-                      <a:endParaRPr lang="pl-PL" sz="1200" b="0" i="0" u="none" strike="noStrike">
-                        <a:solidFill>
-                          <a:srgbClr val="000000"/>
-                        </a:solidFill>
-                        <a:effectLst/>
-                        <a:latin typeface="Aptos Narrow" panose="020B0004020202020204" pitchFamily="34" charset="0"/>
-                      </a:endParaRPr>
-                    </a:p>
-                  </a:txBody>
-                  <a:tcPr marL="8368" marR="8368" marT="8368" marB="0" anchor="b"/>
-                </a:tc>
-                <a:extLst>
-                  <a:ext uri="{0D108BD9-81ED-4DB2-BD59-A6C34878D82A}">
-                    <a16:rowId xmlns:a16="http://schemas.microsoft.com/office/drawing/2014/main" val="1503203970"/>
-                  </a:ext>
-                </a:extLst>
-              </a:tr>
-              <a:tr h="236920">
-                <a:tc>
-                  <a:txBody>
-                    <a:bodyPr/>
-                    <a:lstStyle/>
-                    <a:p>
-                      <a:pPr algn="l" fontAlgn="b">
-                        <a:buNone/>
-                      </a:pPr>
-                      <a:r>
-                        <a:rPr lang="pl-PL" sz="1200" u="none" strike="noStrike">
-                          <a:effectLst/>
-                        </a:rPr>
-                        <a:t>Odpornosc na wstrzasy</a:t>
-                      </a:r>
-                      <a:endParaRPr lang="pl-PL" sz="1200" b="0" i="0" u="none" strike="noStrike">
-                        <a:solidFill>
-                          <a:srgbClr val="000000"/>
-                        </a:solidFill>
-                        <a:effectLst/>
-                        <a:latin typeface="Aptos Narrow" panose="020B0004020202020204" pitchFamily="34" charset="0"/>
-                      </a:endParaRPr>
-                    </a:p>
-                  </a:txBody>
-                  <a:tcPr marL="8368" marR="8368" marT="8368" marB="0" anchor="b"/>
-                </a:tc>
-                <a:tc>
-                  <a:txBody>
-                    <a:bodyPr/>
-                    <a:lstStyle/>
-                    <a:p>
-                      <a:pPr algn="l" fontAlgn="b">
-                        <a:buNone/>
-                      </a:pPr>
-                      <a:r>
-                        <a:rPr lang="pl-PL" sz="1200" u="none" strike="noStrike">
-                          <a:effectLst/>
-                        </a:rPr>
-                        <a:t>10000g</a:t>
-                      </a:r>
-                      <a:endParaRPr lang="pl-PL" sz="1200" b="0" i="0" u="none" strike="noStrike">
-                        <a:solidFill>
-                          <a:srgbClr val="000000"/>
-                        </a:solidFill>
-                        <a:effectLst/>
-                        <a:latin typeface="Aptos Narrow" panose="020B0004020202020204" pitchFamily="34" charset="0"/>
-                      </a:endParaRPr>
-                    </a:p>
-                  </a:txBody>
-                  <a:tcPr marL="8368" marR="8368" marT="8368" marB="0" anchor="b"/>
-                </a:tc>
-                <a:tc>
-                  <a:txBody>
-                    <a:bodyPr/>
-                    <a:lstStyle/>
-                    <a:p>
-                      <a:pPr algn="l" fontAlgn="b">
-                        <a:buNone/>
-                      </a:pPr>
-                      <a:r>
-                        <a:rPr lang="pl-PL" sz="1200" u="none" strike="noStrike">
-                          <a:effectLst/>
-                        </a:rPr>
-                        <a:t>10000g</a:t>
-                      </a:r>
-                      <a:endParaRPr lang="pl-PL" sz="1200" b="0" i="0" u="none" strike="noStrike">
-                        <a:solidFill>
-                          <a:srgbClr val="000000"/>
-                        </a:solidFill>
-                        <a:effectLst/>
-                        <a:latin typeface="Aptos Narrow" panose="020B0004020202020204" pitchFamily="34" charset="0"/>
-                      </a:endParaRPr>
-                    </a:p>
-                  </a:txBody>
-                  <a:tcPr marL="8368" marR="8368" marT="8368" marB="0" anchor="b"/>
-                </a:tc>
-                <a:extLst>
-                  <a:ext uri="{0D108BD9-81ED-4DB2-BD59-A6C34878D82A}">
-                    <a16:rowId xmlns:a16="http://schemas.microsoft.com/office/drawing/2014/main" val="2705847026"/>
-                  </a:ext>
-                </a:extLst>
-              </a:tr>
-              <a:tr h="236920">
-                <a:tc>
-                  <a:txBody>
-                    <a:bodyPr/>
-                    <a:lstStyle/>
-                    <a:p>
-                      <a:pPr algn="l" fontAlgn="b">
-                        <a:buNone/>
-                      </a:pPr>
-                      <a:r>
-                        <a:rPr lang="pl-PL" sz="1200" u="none" strike="noStrike">
-                          <a:effectLst/>
-                        </a:rPr>
-                        <a:t>Zakres temperatur</a:t>
-                      </a:r>
-                      <a:endParaRPr lang="pl-PL" sz="1200" b="0" i="0" u="none" strike="noStrike">
-                        <a:solidFill>
-                          <a:srgbClr val="000000"/>
-                        </a:solidFill>
-                        <a:effectLst/>
-                        <a:latin typeface="Aptos Narrow" panose="020B0004020202020204" pitchFamily="34" charset="0"/>
-                      </a:endParaRPr>
-                    </a:p>
-                  </a:txBody>
-                  <a:tcPr marL="8368" marR="8368" marT="8368" marB="0" anchor="b"/>
-                </a:tc>
-                <a:tc>
-                  <a:txBody>
-                    <a:bodyPr/>
-                    <a:lstStyle/>
-                    <a:p>
-                      <a:pPr algn="l" fontAlgn="b">
-                        <a:buNone/>
-                      </a:pPr>
-                      <a:r>
-                        <a:rPr lang="pl-PL" sz="1200" u="none" strike="noStrike">
-                          <a:effectLst/>
-                        </a:rPr>
-                        <a:t>-40°C to +105°C</a:t>
-                      </a:r>
-                      <a:endParaRPr lang="pl-PL" sz="1200" b="0" i="0" u="none" strike="noStrike">
-                        <a:solidFill>
-                          <a:srgbClr val="000000"/>
-                        </a:solidFill>
-                        <a:effectLst/>
-                        <a:latin typeface="Aptos Narrow" panose="020B0004020202020204" pitchFamily="34" charset="0"/>
-                      </a:endParaRPr>
-                    </a:p>
-                  </a:txBody>
-                  <a:tcPr marL="8368" marR="8368" marT="8368" marB="0" anchor="b"/>
-                </a:tc>
-                <a:tc>
-                  <a:txBody>
-                    <a:bodyPr/>
-                    <a:lstStyle/>
-                    <a:p>
-                      <a:pPr algn="l" fontAlgn="b">
-                        <a:buNone/>
-                      </a:pPr>
-                      <a:r>
-                        <a:rPr lang="pl-PL" sz="1200" u="none" strike="noStrike">
-                          <a:effectLst/>
-                        </a:rPr>
-                        <a:t>-40°C to +85°C</a:t>
-                      </a:r>
-                      <a:endParaRPr lang="pl-PL" sz="1200" b="0" i="0" u="none" strike="noStrike">
-                        <a:solidFill>
-                          <a:srgbClr val="000000"/>
-                        </a:solidFill>
-                        <a:effectLst/>
-                        <a:latin typeface="Aptos Narrow" panose="020B0004020202020204" pitchFamily="34" charset="0"/>
-                      </a:endParaRPr>
-                    </a:p>
-                  </a:txBody>
-                  <a:tcPr marL="8368" marR="8368" marT="8368" marB="0" anchor="b"/>
-                </a:tc>
-                <a:extLst>
-                  <a:ext uri="{0D108BD9-81ED-4DB2-BD59-A6C34878D82A}">
-                    <a16:rowId xmlns:a16="http://schemas.microsoft.com/office/drawing/2014/main" val="3225427140"/>
-                  </a:ext>
-                </a:extLst>
-              </a:tr>
-              <a:tr h="236920">
-                <a:tc>
-                  <a:txBody>
-                    <a:bodyPr/>
-                    <a:lstStyle/>
-                    <a:p>
-                      <a:pPr algn="l" fontAlgn="b">
-                        <a:buNone/>
-                      </a:pPr>
-                      <a:r>
-                        <a:rPr lang="pl-PL" sz="1200" u="none" strike="noStrike">
-                          <a:effectLst/>
-                        </a:rPr>
-                        <a:t>Zasilanie</a:t>
-                      </a:r>
-                      <a:endParaRPr lang="pl-PL" sz="1200" b="0" i="0" u="none" strike="noStrike">
-                        <a:solidFill>
-                          <a:srgbClr val="000000"/>
-                        </a:solidFill>
-                        <a:effectLst/>
-                        <a:latin typeface="Aptos Narrow" panose="020B0004020202020204" pitchFamily="34" charset="0"/>
-                      </a:endParaRPr>
-                    </a:p>
-                  </a:txBody>
-                  <a:tcPr marL="8368" marR="8368" marT="8368" marB="0" anchor="b"/>
-                </a:tc>
-                <a:tc>
-                  <a:txBody>
-                    <a:bodyPr/>
-                    <a:lstStyle/>
-                    <a:p>
-                      <a:pPr algn="l" fontAlgn="b">
-                        <a:buNone/>
-                      </a:pPr>
-                      <a:r>
-                        <a:rPr lang="pl-PL" sz="1200" u="none" strike="noStrike">
-                          <a:effectLst/>
-                        </a:rPr>
-                        <a:t>1,71V to  3,6V</a:t>
-                      </a:r>
-                      <a:endParaRPr lang="pl-PL" sz="1200" b="0" i="0" u="none" strike="noStrike">
-                        <a:solidFill>
-                          <a:srgbClr val="000000"/>
-                        </a:solidFill>
-                        <a:effectLst/>
-                        <a:latin typeface="Aptos Narrow" panose="020B0004020202020204" pitchFamily="34" charset="0"/>
-                      </a:endParaRPr>
-                    </a:p>
-                  </a:txBody>
-                  <a:tcPr marL="8368" marR="8368" marT="8368" marB="0" anchor="b"/>
-                </a:tc>
-                <a:tc>
-                  <a:txBody>
-                    <a:bodyPr/>
-                    <a:lstStyle/>
-                    <a:p>
-                      <a:pPr algn="l" fontAlgn="b">
-                        <a:buNone/>
-                      </a:pPr>
-                      <a:r>
-                        <a:rPr lang="pl-PL" sz="1200" u="none" strike="noStrike">
-                          <a:effectLst/>
-                        </a:rPr>
-                        <a:t>2,4 V to 3,6V</a:t>
-                      </a:r>
-                      <a:endParaRPr lang="pl-PL" sz="1200" b="0" i="0" u="none" strike="noStrike">
-                        <a:solidFill>
-                          <a:srgbClr val="000000"/>
-                        </a:solidFill>
-                        <a:effectLst/>
-                        <a:latin typeface="Aptos Narrow" panose="020B0004020202020204" pitchFamily="34" charset="0"/>
-                      </a:endParaRPr>
-                    </a:p>
-                  </a:txBody>
-                  <a:tcPr marL="8368" marR="8368" marT="8368" marB="0" anchor="b"/>
-                </a:tc>
-                <a:extLst>
-                  <a:ext uri="{0D108BD9-81ED-4DB2-BD59-A6C34878D82A}">
-                    <a16:rowId xmlns:a16="http://schemas.microsoft.com/office/drawing/2014/main" val="452462919"/>
-                  </a:ext>
-                </a:extLst>
-              </a:tr>
-              <a:tr h="236920">
-                <a:tc>
-                  <a:txBody>
-                    <a:bodyPr/>
-                    <a:lstStyle/>
-                    <a:p>
-                      <a:pPr algn="l" fontAlgn="b">
-                        <a:buNone/>
-                      </a:pPr>
-                      <a:r>
-                        <a:rPr lang="pl-PL" sz="1200" u="none" strike="noStrike">
-                          <a:effectLst/>
-                        </a:rPr>
-                        <a:t>Rozmiar kolejki</a:t>
-                      </a:r>
-                      <a:endParaRPr lang="pl-PL" sz="1200" b="0" i="0" u="none" strike="noStrike">
-                        <a:solidFill>
-                          <a:srgbClr val="000000"/>
-                        </a:solidFill>
-                        <a:effectLst/>
-                        <a:latin typeface="Aptos Narrow" panose="020B0004020202020204" pitchFamily="34" charset="0"/>
-                      </a:endParaRPr>
-                    </a:p>
-                  </a:txBody>
-                  <a:tcPr marL="8368" marR="8368" marT="8368" marB="0" anchor="b"/>
-                </a:tc>
-                <a:tc>
-                  <a:txBody>
-                    <a:bodyPr/>
-                    <a:lstStyle/>
-                    <a:p>
-                      <a:pPr algn="l" fontAlgn="b">
-                        <a:buNone/>
-                      </a:pPr>
-                      <a:r>
-                        <a:rPr lang="pl-PL" sz="1200" u="none" strike="noStrike">
-                          <a:effectLst/>
-                        </a:rPr>
-                        <a:t>4096-byte FIFO</a:t>
-                      </a:r>
-                      <a:endParaRPr lang="pl-PL" sz="1200" b="0" i="0" u="none" strike="noStrike">
-                        <a:solidFill>
-                          <a:srgbClr val="000000"/>
-                        </a:solidFill>
-                        <a:effectLst/>
-                        <a:latin typeface="Aptos Narrow" panose="020B0004020202020204" pitchFamily="34" charset="0"/>
-                      </a:endParaRPr>
-                    </a:p>
-                  </a:txBody>
-                  <a:tcPr marL="8368" marR="8368" marT="8368" marB="0" anchor="b"/>
-                </a:tc>
-                <a:tc>
-                  <a:txBody>
-                    <a:bodyPr/>
-                    <a:lstStyle/>
-                    <a:p>
-                      <a:pPr algn="l" fontAlgn="b">
-                        <a:buNone/>
-                      </a:pPr>
-                      <a:r>
-                        <a:rPr lang="pl-PL" sz="1200" u="none" strike="noStrike">
-                          <a:effectLst/>
-                        </a:rPr>
-                        <a:t>192-byte FIFO</a:t>
-                      </a:r>
-                      <a:endParaRPr lang="pl-PL" sz="1200" b="0" i="0" u="none" strike="noStrike">
-                        <a:solidFill>
-                          <a:srgbClr val="000000"/>
-                        </a:solidFill>
-                        <a:effectLst/>
-                        <a:latin typeface="Aptos Narrow" panose="020B0004020202020204" pitchFamily="34" charset="0"/>
-                      </a:endParaRPr>
-                    </a:p>
-                  </a:txBody>
-                  <a:tcPr marL="8368" marR="8368" marT="8368" marB="0" anchor="b"/>
-                </a:tc>
-                <a:extLst>
-                  <a:ext uri="{0D108BD9-81ED-4DB2-BD59-A6C34878D82A}">
-                    <a16:rowId xmlns:a16="http://schemas.microsoft.com/office/drawing/2014/main" val="1601881336"/>
-                  </a:ext>
-                </a:extLst>
-              </a:tr>
-              <a:tr h="236920">
-                <a:tc gridSpan="3">
-                  <a:txBody>
-                    <a:bodyPr/>
-                    <a:lstStyle/>
-                    <a:p>
-                      <a:pPr algn="ctr" fontAlgn="b">
-                        <a:buNone/>
-                      </a:pPr>
-                      <a:r>
-                        <a:rPr lang="pl-PL" sz="1200" u="none" strike="noStrike">
-                          <a:effectLst/>
-                        </a:rPr>
-                        <a:t>Interfejsy cyfrowe</a:t>
-                      </a:r>
-                      <a:endParaRPr lang="pl-PL" sz="1200" b="0" i="0" u="none" strike="noStrike">
-                        <a:solidFill>
-                          <a:srgbClr val="000000"/>
-                        </a:solidFill>
-                        <a:effectLst/>
-                        <a:latin typeface="Aptos Narrow" panose="020B0004020202020204" pitchFamily="34" charset="0"/>
-                      </a:endParaRPr>
-                    </a:p>
-                  </a:txBody>
-                  <a:tcPr marL="8368" marR="8368" marT="8368" marB="0" anchor="b"/>
-                </a:tc>
-                <a:tc hMerge="1">
-                  <a:txBody>
-                    <a:bodyPr/>
-                    <a:lstStyle/>
-                    <a:p>
-                      <a:endParaRPr lang="pl-PL"/>
-                    </a:p>
-                  </a:txBody>
-                  <a:tcPr/>
-                </a:tc>
-                <a:tc hMerge="1">
-                  <a:txBody>
-                    <a:bodyPr/>
-                    <a:lstStyle/>
-                    <a:p>
-                      <a:endParaRPr lang="pl-PL"/>
-                    </a:p>
-                  </a:txBody>
-                  <a:tcPr/>
-                </a:tc>
-                <a:extLst>
-                  <a:ext uri="{0D108BD9-81ED-4DB2-BD59-A6C34878D82A}">
-                    <a16:rowId xmlns:a16="http://schemas.microsoft.com/office/drawing/2014/main" val="1716561002"/>
-                  </a:ext>
-                </a:extLst>
-              </a:tr>
-              <a:tr h="236920">
-                <a:tc>
-                  <a:txBody>
-                    <a:bodyPr/>
-                    <a:lstStyle/>
-                    <a:p>
-                      <a:pPr algn="l" fontAlgn="b">
-                        <a:buNone/>
-                      </a:pPr>
-                      <a:r>
-                        <a:rPr lang="pl-PL" sz="1200" u="none" strike="noStrike">
-                          <a:effectLst/>
-                        </a:rPr>
-                        <a:t>I2C</a:t>
-                      </a:r>
-                      <a:endParaRPr lang="pl-PL" sz="1200" b="0" i="0" u="none" strike="noStrike">
-                        <a:solidFill>
-                          <a:srgbClr val="000000"/>
-                        </a:solidFill>
-                        <a:effectLst/>
-                        <a:latin typeface="Aptos Narrow" panose="020B0004020202020204" pitchFamily="34" charset="0"/>
-                      </a:endParaRPr>
-                    </a:p>
-                  </a:txBody>
-                  <a:tcPr marL="8368" marR="8368" marT="8368" marB="0" anchor="b"/>
-                </a:tc>
-                <a:tc>
-                  <a:txBody>
-                    <a:bodyPr/>
-                    <a:lstStyle/>
-                    <a:p>
-                      <a:pPr algn="l" fontAlgn="b">
-                        <a:buNone/>
-                      </a:pPr>
-                      <a:r>
-                        <a:rPr lang="pl-PL" sz="1200" u="none" strike="noStrike">
-                          <a:effectLst/>
-                        </a:rPr>
-                        <a:t>400 kHz</a:t>
-                      </a:r>
-                      <a:endParaRPr lang="pl-PL" sz="1200" b="0" i="0" u="none" strike="noStrike">
-                        <a:solidFill>
-                          <a:srgbClr val="000000"/>
-                        </a:solidFill>
-                        <a:effectLst/>
-                        <a:latin typeface="Aptos Narrow" panose="020B0004020202020204" pitchFamily="34" charset="0"/>
-                      </a:endParaRPr>
-                    </a:p>
-                  </a:txBody>
-                  <a:tcPr marL="8368" marR="8368" marT="8368" marB="0" anchor="b"/>
-                </a:tc>
-                <a:tc>
-                  <a:txBody>
-                    <a:bodyPr/>
-                    <a:lstStyle/>
-                    <a:p>
-                      <a:pPr algn="l" fontAlgn="b">
-                        <a:buNone/>
-                      </a:pPr>
-                      <a:r>
-                        <a:rPr lang="pl-PL" sz="1200" u="none" strike="noStrike">
-                          <a:effectLst/>
-                        </a:rPr>
-                        <a:t>400 kHz</a:t>
-                      </a:r>
-                      <a:endParaRPr lang="pl-PL" sz="1200" b="0" i="0" u="none" strike="noStrike">
-                        <a:solidFill>
-                          <a:srgbClr val="000000"/>
-                        </a:solidFill>
-                        <a:effectLst/>
-                        <a:latin typeface="Aptos Narrow" panose="020B0004020202020204" pitchFamily="34" charset="0"/>
-                      </a:endParaRPr>
-                    </a:p>
-                  </a:txBody>
-                  <a:tcPr marL="8368" marR="8368" marT="8368" marB="0" anchor="b"/>
-                </a:tc>
-                <a:extLst>
-                  <a:ext uri="{0D108BD9-81ED-4DB2-BD59-A6C34878D82A}">
-                    <a16:rowId xmlns:a16="http://schemas.microsoft.com/office/drawing/2014/main" val="2708043197"/>
-                  </a:ext>
-                </a:extLst>
-              </a:tr>
-              <a:tr h="236920">
-                <a:tc>
-                  <a:txBody>
-                    <a:bodyPr/>
-                    <a:lstStyle/>
-                    <a:p>
-                      <a:pPr algn="l" fontAlgn="b">
-                        <a:buNone/>
-                      </a:pPr>
-                      <a:r>
-                        <a:rPr lang="pl-PL" sz="1200" u="none" strike="noStrike">
-                          <a:effectLst/>
-                        </a:rPr>
-                        <a:t>SPI</a:t>
-                      </a:r>
-                      <a:endParaRPr lang="pl-PL" sz="1200" b="0" i="0" u="none" strike="noStrike">
-                        <a:solidFill>
-                          <a:srgbClr val="000000"/>
-                        </a:solidFill>
-                        <a:effectLst/>
-                        <a:latin typeface="Aptos Narrow" panose="020B0004020202020204" pitchFamily="34" charset="0"/>
-                      </a:endParaRPr>
-                    </a:p>
-                  </a:txBody>
-                  <a:tcPr marL="8368" marR="8368" marT="8368" marB="0" anchor="b"/>
-                </a:tc>
-                <a:tc>
-                  <a:txBody>
-                    <a:bodyPr/>
-                    <a:lstStyle/>
-                    <a:p>
-                      <a:pPr algn="l" fontAlgn="b">
-                        <a:buNone/>
-                      </a:pPr>
-                      <a:r>
-                        <a:rPr lang="pl-PL" sz="1200" u="none" strike="noStrike">
-                          <a:effectLst/>
-                        </a:rPr>
-                        <a:t>8 MHz</a:t>
-                      </a:r>
-                      <a:endParaRPr lang="pl-PL" sz="1200" b="0" i="0" u="none" strike="noStrike">
-                        <a:solidFill>
-                          <a:srgbClr val="000000"/>
-                        </a:solidFill>
-                        <a:effectLst/>
-                        <a:latin typeface="Aptos Narrow" panose="020B0004020202020204" pitchFamily="34" charset="0"/>
-                      </a:endParaRPr>
-                    </a:p>
-                  </a:txBody>
-                  <a:tcPr marL="8368" marR="8368" marT="8368" marB="0" anchor="b"/>
-                </a:tc>
-                <a:tc>
-                  <a:txBody>
-                    <a:bodyPr/>
-                    <a:lstStyle/>
-                    <a:p>
-                      <a:pPr algn="l" fontAlgn="b">
-                        <a:buNone/>
-                      </a:pPr>
-                      <a:r>
-                        <a:rPr lang="pl-PL" sz="1200" u="none" strike="noStrike">
-                          <a:effectLst/>
-                        </a:rPr>
-                        <a:t>10 MHz</a:t>
-                      </a:r>
-                      <a:endParaRPr lang="pl-PL" sz="1200" b="0" i="0" u="none" strike="noStrike">
-                        <a:solidFill>
-                          <a:srgbClr val="000000"/>
-                        </a:solidFill>
-                        <a:effectLst/>
-                        <a:latin typeface="Aptos Narrow" panose="020B0004020202020204" pitchFamily="34" charset="0"/>
-                      </a:endParaRPr>
-                    </a:p>
-                  </a:txBody>
-                  <a:tcPr marL="8368" marR="8368" marT="8368" marB="0" anchor="b"/>
-                </a:tc>
-                <a:extLst>
-                  <a:ext uri="{0D108BD9-81ED-4DB2-BD59-A6C34878D82A}">
-                    <a16:rowId xmlns:a16="http://schemas.microsoft.com/office/drawing/2014/main" val="2514809380"/>
-                  </a:ext>
-                </a:extLst>
-              </a:tr>
-              <a:tr h="236920">
-                <a:tc gridSpan="3">
-                  <a:txBody>
-                    <a:bodyPr/>
-                    <a:lstStyle/>
-                    <a:p>
-                      <a:pPr algn="ctr" fontAlgn="b">
-                        <a:buNone/>
-                      </a:pPr>
-                      <a:r>
-                        <a:rPr lang="pl-PL" sz="1200" u="none" strike="noStrike">
-                          <a:effectLst/>
-                        </a:rPr>
-                        <a:t>Filtry</a:t>
-                      </a:r>
-                      <a:endParaRPr lang="pl-PL" sz="1200" b="0" i="0" u="none" strike="noStrike">
-                        <a:solidFill>
-                          <a:srgbClr val="000000"/>
-                        </a:solidFill>
-                        <a:effectLst/>
-                        <a:latin typeface="Aptos Narrow" panose="020B0004020202020204" pitchFamily="34" charset="0"/>
-                      </a:endParaRPr>
-                    </a:p>
-                  </a:txBody>
-                  <a:tcPr marL="8368" marR="8368" marT="8368" marB="0" anchor="b"/>
-                </a:tc>
-                <a:tc hMerge="1">
-                  <a:txBody>
-                    <a:bodyPr/>
-                    <a:lstStyle/>
-                    <a:p>
-                      <a:endParaRPr lang="pl-PL"/>
-                    </a:p>
-                  </a:txBody>
-                  <a:tcPr/>
-                </a:tc>
-                <a:tc hMerge="1">
-                  <a:txBody>
-                    <a:bodyPr/>
-                    <a:lstStyle/>
-                    <a:p>
-                      <a:endParaRPr lang="pl-PL"/>
-                    </a:p>
-                  </a:txBody>
-                  <a:tcPr/>
-                </a:tc>
-                <a:extLst>
-                  <a:ext uri="{0D108BD9-81ED-4DB2-BD59-A6C34878D82A}">
-                    <a16:rowId xmlns:a16="http://schemas.microsoft.com/office/drawing/2014/main" val="3987051602"/>
-                  </a:ext>
-                </a:extLst>
-              </a:tr>
-              <a:tr h="236920">
-                <a:tc>
-                  <a:txBody>
-                    <a:bodyPr/>
-                    <a:lstStyle/>
-                    <a:p>
-                      <a:pPr algn="l" fontAlgn="b">
-                        <a:buNone/>
-                      </a:pPr>
-                      <a:r>
-                        <a:rPr lang="pl-PL" sz="1200" u="none" strike="noStrike">
-                          <a:effectLst/>
-                        </a:rPr>
-                        <a:t>dolnoprzepustowy</a:t>
-                      </a:r>
-                      <a:endParaRPr lang="pl-PL" sz="1200" b="0" i="0" u="none" strike="noStrike">
-                        <a:solidFill>
-                          <a:srgbClr val="000000"/>
-                        </a:solidFill>
-                        <a:effectLst/>
-                        <a:latin typeface="Aptos Narrow" panose="020B0004020202020204" pitchFamily="34" charset="0"/>
-                      </a:endParaRPr>
-                    </a:p>
-                  </a:txBody>
-                  <a:tcPr marL="8368" marR="8368" marT="8368" marB="0" anchor="b"/>
-                </a:tc>
-                <a:tc>
-                  <a:txBody>
-                    <a:bodyPr/>
-                    <a:lstStyle/>
-                    <a:p>
-                      <a:pPr algn="l" fontAlgn="b">
-                        <a:buNone/>
-                      </a:pPr>
-                      <a:r>
-                        <a:rPr lang="pl-PL" sz="1200" u="none" strike="noStrike">
-                          <a:effectLst/>
-                        </a:rPr>
-                        <a:t>programowalny, cyfrowy</a:t>
-                      </a:r>
-                      <a:endParaRPr lang="pl-PL" sz="1200" b="0" i="0" u="none" strike="noStrike">
-                        <a:solidFill>
-                          <a:srgbClr val="000000"/>
-                        </a:solidFill>
-                        <a:effectLst/>
-                        <a:latin typeface="Aptos Narrow" panose="020B0004020202020204" pitchFamily="34" charset="0"/>
-                      </a:endParaRPr>
-                    </a:p>
-                  </a:txBody>
-                  <a:tcPr marL="8368" marR="8368" marT="8368" marB="0" anchor="b"/>
-                </a:tc>
-                <a:tc>
-                  <a:txBody>
-                    <a:bodyPr/>
-                    <a:lstStyle/>
-                    <a:p>
-                      <a:pPr algn="l" fontAlgn="b">
-                        <a:buNone/>
-                      </a:pPr>
-                      <a:r>
-                        <a:rPr lang="pl-PL" sz="1200" u="none" strike="noStrike">
-                          <a:effectLst/>
-                        </a:rPr>
-                        <a:t>programowalny, cyfrowy</a:t>
-                      </a:r>
-                      <a:endParaRPr lang="pl-PL" sz="1200" b="0" i="0" u="none" strike="noStrike">
-                        <a:solidFill>
-                          <a:srgbClr val="000000"/>
-                        </a:solidFill>
-                        <a:effectLst/>
-                        <a:latin typeface="Aptos Narrow" panose="020B0004020202020204" pitchFamily="34" charset="0"/>
-                      </a:endParaRPr>
-                    </a:p>
-                  </a:txBody>
-                  <a:tcPr marL="8368" marR="8368" marT="8368" marB="0" anchor="b"/>
-                </a:tc>
-                <a:extLst>
-                  <a:ext uri="{0D108BD9-81ED-4DB2-BD59-A6C34878D82A}">
-                    <a16:rowId xmlns:a16="http://schemas.microsoft.com/office/drawing/2014/main" val="1441305028"/>
-                  </a:ext>
-                </a:extLst>
-              </a:tr>
-              <a:tr h="236920">
-                <a:tc>
-                  <a:txBody>
-                    <a:bodyPr/>
-                    <a:lstStyle/>
-                    <a:p>
-                      <a:pPr algn="l" fontAlgn="b">
-                        <a:buNone/>
-                      </a:pPr>
-                      <a:r>
-                        <a:rPr lang="pl-PL" sz="1200" u="none" strike="noStrike">
-                          <a:effectLst/>
-                        </a:rPr>
-                        <a:t>górnoprzepustowy</a:t>
-                      </a:r>
-                      <a:endParaRPr lang="pl-PL" sz="1200" b="0" i="0" u="none" strike="noStrike">
-                        <a:solidFill>
-                          <a:srgbClr val="000000"/>
-                        </a:solidFill>
-                        <a:effectLst/>
-                        <a:latin typeface="Aptos Narrow" panose="020B0004020202020204" pitchFamily="34" charset="0"/>
-                      </a:endParaRPr>
-                    </a:p>
-                  </a:txBody>
-                  <a:tcPr marL="8368" marR="8368" marT="8368" marB="0" anchor="b"/>
-                </a:tc>
-                <a:tc>
-                  <a:txBody>
-                    <a:bodyPr/>
-                    <a:lstStyle/>
-                    <a:p>
-                      <a:pPr algn="l" fontAlgn="b">
-                        <a:buNone/>
-                      </a:pPr>
-                      <a:r>
-                        <a:rPr lang="pl-PL" sz="1200" u="none" strike="noStrike">
-                          <a:effectLst/>
-                        </a:rPr>
-                        <a:t>brak</a:t>
-                      </a:r>
-                      <a:endParaRPr lang="pl-PL" sz="1200" b="0" i="0" u="none" strike="noStrike">
-                        <a:solidFill>
-                          <a:srgbClr val="000000"/>
-                        </a:solidFill>
-                        <a:effectLst/>
-                        <a:latin typeface="Aptos Narrow" panose="020B0004020202020204" pitchFamily="34" charset="0"/>
-                      </a:endParaRPr>
-                    </a:p>
-                  </a:txBody>
-                  <a:tcPr marL="8368" marR="8368" marT="8368" marB="0" anchor="b"/>
-                </a:tc>
-                <a:tc>
-                  <a:txBody>
-                    <a:bodyPr/>
-                    <a:lstStyle/>
-                    <a:p>
-                      <a:pPr algn="l" fontAlgn="b">
-                        <a:buNone/>
-                      </a:pPr>
-                      <a:r>
-                        <a:rPr lang="pl-PL" sz="1200" u="none" strike="noStrike">
-                          <a:effectLst/>
-                        </a:rPr>
-                        <a:t>programowalny, cyfrowy</a:t>
-                      </a:r>
-                      <a:endParaRPr lang="pl-PL" sz="1200" b="0" i="0" u="none" strike="noStrike">
-                        <a:solidFill>
-                          <a:srgbClr val="000000"/>
-                        </a:solidFill>
-                        <a:effectLst/>
-                        <a:latin typeface="Aptos Narrow" panose="020B0004020202020204" pitchFamily="34" charset="0"/>
-                      </a:endParaRPr>
-                    </a:p>
-                  </a:txBody>
-                  <a:tcPr marL="8368" marR="8368" marT="8368" marB="0" anchor="b"/>
-                </a:tc>
-                <a:extLst>
-                  <a:ext uri="{0D108BD9-81ED-4DB2-BD59-A6C34878D82A}">
-                    <a16:rowId xmlns:a16="http://schemas.microsoft.com/office/drawing/2014/main" val="3819864575"/>
-                  </a:ext>
-                </a:extLst>
-              </a:tr>
-              <a:tr h="236920">
-                <a:tc>
-                  <a:txBody>
-                    <a:bodyPr/>
-                    <a:lstStyle/>
-                    <a:p>
-                      <a:pPr algn="l" fontAlgn="b">
-                        <a:buNone/>
-                      </a:pPr>
-                      <a:r>
-                        <a:rPr lang="pl-PL" sz="1200" u="none" strike="noStrike">
-                          <a:effectLst/>
-                        </a:rPr>
-                        <a:t>Cena:</a:t>
-                      </a:r>
-                      <a:endParaRPr lang="pl-PL" sz="1200" b="0" i="0" u="none" strike="noStrike">
-                        <a:solidFill>
-                          <a:srgbClr val="000000"/>
-                        </a:solidFill>
-                        <a:effectLst/>
-                        <a:latin typeface="Aptos Narrow" panose="020B0004020202020204" pitchFamily="34" charset="0"/>
-                      </a:endParaRPr>
-                    </a:p>
-                  </a:txBody>
-                  <a:tcPr marL="8368" marR="8368" marT="8368" marB="0" anchor="b"/>
-                </a:tc>
-                <a:tc>
-                  <a:txBody>
-                    <a:bodyPr/>
-                    <a:lstStyle/>
-                    <a:p>
-                      <a:pPr algn="l" fontAlgn="b">
-                        <a:buNone/>
-                      </a:pPr>
-                      <a:r>
-                        <a:rPr lang="pl-PL" sz="1200" u="none" strike="noStrike">
-                          <a:effectLst/>
-                        </a:rPr>
-                        <a:t> </a:t>
-                      </a:r>
-                      <a:endParaRPr lang="pl-PL" sz="1200" b="0" i="0" u="none" strike="noStrike">
-                        <a:solidFill>
-                          <a:srgbClr val="000000"/>
-                        </a:solidFill>
-                        <a:effectLst/>
-                        <a:latin typeface="Aptos Narrow" panose="020B0004020202020204" pitchFamily="34" charset="0"/>
-                      </a:endParaRPr>
-                    </a:p>
-                  </a:txBody>
-                  <a:tcPr marL="8368" marR="8368" marT="8368" marB="0" anchor="b"/>
-                </a:tc>
-                <a:tc>
-                  <a:txBody>
-                    <a:bodyPr/>
-                    <a:lstStyle/>
-                    <a:p>
-                      <a:pPr algn="l" fontAlgn="b">
-                        <a:buNone/>
-                      </a:pPr>
-                      <a:r>
-                        <a:rPr lang="pl-PL" sz="1200" u="none" strike="noStrike">
-                          <a:effectLst/>
-                        </a:rPr>
-                        <a:t> </a:t>
-                      </a:r>
-                      <a:endParaRPr lang="pl-PL" sz="1200" b="0" i="0" u="none" strike="noStrike">
-                        <a:solidFill>
-                          <a:srgbClr val="000000"/>
-                        </a:solidFill>
-                        <a:effectLst/>
-                        <a:latin typeface="Aptos Narrow" panose="020B0004020202020204" pitchFamily="34" charset="0"/>
-                      </a:endParaRPr>
-                    </a:p>
-                  </a:txBody>
-                  <a:tcPr marL="8368" marR="8368" marT="8368" marB="0" anchor="b"/>
-                </a:tc>
-                <a:extLst>
-                  <a:ext uri="{0D108BD9-81ED-4DB2-BD59-A6C34878D82A}">
-                    <a16:rowId xmlns:a16="http://schemas.microsoft.com/office/drawing/2014/main" val="3945094788"/>
-                  </a:ext>
-                </a:extLst>
-              </a:tr>
-              <a:tr h="236920">
-                <a:tc>
-                  <a:txBody>
-                    <a:bodyPr/>
-                    <a:lstStyle/>
-                    <a:p>
-                      <a:pPr algn="l" fontAlgn="b">
-                        <a:buNone/>
-                      </a:pPr>
-                      <a:r>
-                        <a:rPr lang="pl-PL" sz="1200" u="none" strike="noStrike">
-                          <a:effectLst/>
-                        </a:rPr>
-                        <a:t>Evaluation board</a:t>
-                      </a:r>
-                      <a:endParaRPr lang="pl-PL" sz="1200" b="0" i="0" u="none" strike="noStrike">
-                        <a:solidFill>
-                          <a:srgbClr val="000000"/>
-                        </a:solidFill>
-                        <a:effectLst/>
-                        <a:latin typeface="Aptos Narrow" panose="020B0004020202020204" pitchFamily="34" charset="0"/>
-                      </a:endParaRPr>
-                    </a:p>
-                  </a:txBody>
-                  <a:tcPr marL="8368" marR="8368" marT="8368" marB="0" anchor="b"/>
-                </a:tc>
-                <a:tc>
-                  <a:txBody>
-                    <a:bodyPr/>
-                    <a:lstStyle/>
-                    <a:p>
-                      <a:pPr algn="l" fontAlgn="b">
-                        <a:buNone/>
-                      </a:pPr>
-                      <a:r>
-                        <a:rPr lang="pl-PL" sz="1200" u="none" strike="noStrike">
-                          <a:effectLst/>
-                        </a:rPr>
-                        <a:t>33 $</a:t>
-                      </a:r>
-                      <a:endParaRPr lang="pl-PL" sz="1200" b="0" i="0" u="none" strike="noStrike">
-                        <a:solidFill>
-                          <a:srgbClr val="000000"/>
-                        </a:solidFill>
-                        <a:effectLst/>
-                        <a:latin typeface="Aptos Narrow" panose="020B0004020202020204" pitchFamily="34" charset="0"/>
-                      </a:endParaRPr>
-                    </a:p>
-                  </a:txBody>
-                  <a:tcPr marL="8368" marR="8368" marT="8368" marB="0" anchor="b"/>
-                </a:tc>
-                <a:tc>
-                  <a:txBody>
-                    <a:bodyPr/>
-                    <a:lstStyle/>
-                    <a:p>
-                      <a:pPr algn="l" fontAlgn="b">
-                        <a:buNone/>
-                      </a:pPr>
-                      <a:r>
-                        <a:rPr lang="pl-PL" sz="1200" u="none" strike="noStrike">
-                          <a:effectLst/>
-                        </a:rPr>
-                        <a:t>13 $</a:t>
-                      </a:r>
-                      <a:endParaRPr lang="pl-PL" sz="1200" b="0" i="0" u="none" strike="noStrike">
-                        <a:solidFill>
-                          <a:srgbClr val="000000"/>
-                        </a:solidFill>
-                        <a:effectLst/>
-                        <a:latin typeface="Aptos Narrow" panose="020B0004020202020204" pitchFamily="34" charset="0"/>
-                      </a:endParaRPr>
-                    </a:p>
-                  </a:txBody>
-                  <a:tcPr marL="8368" marR="8368" marT="8368" marB="0" anchor="b"/>
-                </a:tc>
-                <a:extLst>
-                  <a:ext uri="{0D108BD9-81ED-4DB2-BD59-A6C34878D82A}">
-                    <a16:rowId xmlns:a16="http://schemas.microsoft.com/office/drawing/2014/main" val="2850689103"/>
-                  </a:ext>
-                </a:extLst>
-              </a:tr>
-              <a:tr h="236920">
-                <a:tc>
-                  <a:txBody>
-                    <a:bodyPr/>
-                    <a:lstStyle/>
-                    <a:p>
-                      <a:pPr algn="l" fontAlgn="b">
-                        <a:buNone/>
-                      </a:pPr>
-                      <a:r>
-                        <a:rPr lang="pl-PL" sz="1200" u="none" strike="noStrike">
-                          <a:effectLst/>
-                        </a:rPr>
-                        <a:t>Chip</a:t>
-                      </a:r>
-                      <a:endParaRPr lang="pl-PL" sz="1200" b="0" i="0" u="none" strike="noStrike">
-                        <a:solidFill>
-                          <a:srgbClr val="000000"/>
-                        </a:solidFill>
-                        <a:effectLst/>
-                        <a:latin typeface="Aptos Narrow" panose="020B0004020202020204" pitchFamily="34" charset="0"/>
-                      </a:endParaRPr>
-                    </a:p>
-                  </a:txBody>
-                  <a:tcPr marL="8368" marR="8368" marT="8368" marB="0" anchor="b"/>
-                </a:tc>
-                <a:tc>
-                  <a:txBody>
-                    <a:bodyPr/>
-                    <a:lstStyle/>
-                    <a:p>
-                      <a:pPr algn="l" fontAlgn="b">
-                        <a:buNone/>
-                      </a:pPr>
-                      <a:r>
-                        <a:rPr lang="pl-PL" sz="1200" u="none" strike="noStrike">
-                          <a:effectLst/>
-                        </a:rPr>
-                        <a:t>11 $</a:t>
-                      </a:r>
-                      <a:endParaRPr lang="pl-PL" sz="1200" b="0" i="0" u="none" strike="noStrike">
-                        <a:solidFill>
-                          <a:srgbClr val="000000"/>
-                        </a:solidFill>
-                        <a:effectLst/>
-                        <a:latin typeface="Aptos Narrow" panose="020B0004020202020204" pitchFamily="34" charset="0"/>
-                      </a:endParaRPr>
-                    </a:p>
-                  </a:txBody>
-                  <a:tcPr marL="8368" marR="8368" marT="8368" marB="0" anchor="b"/>
-                </a:tc>
-                <a:tc>
-                  <a:txBody>
-                    <a:bodyPr/>
-                    <a:lstStyle/>
-                    <a:p>
-                      <a:pPr algn="l" fontAlgn="b">
-                        <a:buNone/>
-                      </a:pPr>
-                      <a:r>
-                        <a:rPr lang="pl-PL" sz="1200" u="none" strike="noStrike">
-                          <a:effectLst/>
-                        </a:rPr>
-                        <a:t>9 $</a:t>
-                      </a:r>
-                      <a:endParaRPr lang="pl-PL" sz="1200" b="0" i="0" u="none" strike="noStrike">
-                        <a:solidFill>
-                          <a:srgbClr val="000000"/>
-                        </a:solidFill>
-                        <a:effectLst/>
-                        <a:latin typeface="Aptos Narrow" panose="020B0004020202020204" pitchFamily="34" charset="0"/>
-                      </a:endParaRPr>
-                    </a:p>
-                  </a:txBody>
-                  <a:tcPr marL="8368" marR="8368" marT="8368" marB="0" anchor="b"/>
-                </a:tc>
-                <a:extLst>
-                  <a:ext uri="{0D108BD9-81ED-4DB2-BD59-A6C34878D82A}">
-                    <a16:rowId xmlns:a16="http://schemas.microsoft.com/office/drawing/2014/main" val="4205969179"/>
-                  </a:ext>
-                </a:extLst>
-              </a:tr>
-              <a:tr h="236920">
-                <a:tc gridSpan="3">
-                  <a:txBody>
-                    <a:bodyPr/>
-                    <a:lstStyle/>
-                    <a:p>
-                      <a:pPr algn="ctr" fontAlgn="b">
-                        <a:buNone/>
-                      </a:pPr>
-                      <a:r>
-                        <a:rPr lang="pl-PL" sz="1200" u="none" strike="noStrike">
-                          <a:effectLst/>
-                        </a:rPr>
-                        <a:t>Dodatkowe cechy</a:t>
-                      </a:r>
-                      <a:endParaRPr lang="pl-PL" sz="1200" b="0" i="0" u="none" strike="noStrike">
-                        <a:solidFill>
-                          <a:srgbClr val="000000"/>
-                        </a:solidFill>
-                        <a:effectLst/>
-                        <a:latin typeface="Aptos Narrow" panose="020B0004020202020204" pitchFamily="34" charset="0"/>
-                      </a:endParaRPr>
-                    </a:p>
-                  </a:txBody>
-                  <a:tcPr marL="8368" marR="8368" marT="8368" marB="0" anchor="b"/>
-                </a:tc>
-                <a:tc hMerge="1">
-                  <a:txBody>
-                    <a:bodyPr/>
-                    <a:lstStyle/>
-                    <a:p>
-                      <a:endParaRPr lang="pl-PL"/>
-                    </a:p>
-                  </a:txBody>
-                  <a:tcPr/>
-                </a:tc>
-                <a:tc hMerge="1">
-                  <a:txBody>
-                    <a:bodyPr/>
-                    <a:lstStyle/>
-                    <a:p>
-                      <a:endParaRPr lang="pl-PL"/>
-                    </a:p>
-                  </a:txBody>
-                  <a:tcPr/>
-                </a:tc>
-                <a:extLst>
-                  <a:ext uri="{0D108BD9-81ED-4DB2-BD59-A6C34878D82A}">
-                    <a16:rowId xmlns:a16="http://schemas.microsoft.com/office/drawing/2014/main" val="1174610392"/>
-                  </a:ext>
-                </a:extLst>
-              </a:tr>
-              <a:tr h="236920">
-                <a:tc>
-                  <a:txBody>
-                    <a:bodyPr/>
-                    <a:lstStyle/>
-                    <a:p>
-                      <a:pPr algn="l" fontAlgn="b">
-                        <a:buNone/>
-                      </a:pPr>
-                      <a:r>
-                        <a:rPr lang="pl-PL" sz="1200" u="none" strike="noStrike">
-                          <a:effectLst/>
-                        </a:rPr>
-                        <a:t> </a:t>
-                      </a:r>
-                      <a:endParaRPr lang="pl-PL" sz="1200" b="0" i="0" u="none" strike="noStrike">
-                        <a:solidFill>
-                          <a:srgbClr val="000000"/>
-                        </a:solidFill>
-                        <a:effectLst/>
-                        <a:latin typeface="Aptos Narrow" panose="020B0004020202020204" pitchFamily="34" charset="0"/>
-                      </a:endParaRPr>
-                    </a:p>
-                  </a:txBody>
-                  <a:tcPr marL="8368" marR="8368" marT="8368" marB="0" anchor="b"/>
-                </a:tc>
-                <a:tc>
-                  <a:txBody>
-                    <a:bodyPr/>
-                    <a:lstStyle/>
-                    <a:p>
-                      <a:pPr algn="l" fontAlgn="b">
-                        <a:buNone/>
-                      </a:pPr>
-                      <a:r>
-                        <a:rPr lang="pl-PL" sz="1200" u="none" strike="noStrike">
-                          <a:effectLst/>
-                        </a:rPr>
-                        <a:t>termometr</a:t>
-                      </a:r>
-                      <a:endParaRPr lang="pl-PL" sz="1200" b="0" i="0" u="none" strike="noStrike">
-                        <a:solidFill>
-                          <a:srgbClr val="000000"/>
-                        </a:solidFill>
-                        <a:effectLst/>
-                        <a:latin typeface="Aptos Narrow" panose="020B0004020202020204" pitchFamily="34" charset="0"/>
-                      </a:endParaRPr>
-                    </a:p>
-                  </a:txBody>
-                  <a:tcPr marL="8368" marR="8368" marT="8368" marB="0" anchor="b"/>
-                </a:tc>
-                <a:tc>
-                  <a:txBody>
-                    <a:bodyPr/>
-                    <a:lstStyle/>
-                    <a:p>
-                      <a:pPr algn="l" fontAlgn="b">
-                        <a:buNone/>
-                      </a:pPr>
-                      <a:r>
-                        <a:rPr lang="pl-PL" sz="1200" u="none" strike="noStrike" dirty="0">
-                          <a:effectLst/>
-                        </a:rPr>
-                        <a:t>termometr</a:t>
-                      </a:r>
-                      <a:endParaRPr lang="pl-PL" sz="1200" b="0" i="0" u="none" strike="noStrike" dirty="0">
-                        <a:solidFill>
-                          <a:srgbClr val="000000"/>
-                        </a:solidFill>
-                        <a:effectLst/>
-                        <a:latin typeface="Aptos Narrow" panose="020B0004020202020204" pitchFamily="34" charset="0"/>
-                      </a:endParaRPr>
-                    </a:p>
-                  </a:txBody>
-                  <a:tcPr marL="8368" marR="8368" marT="8368" marB="0" anchor="b"/>
-                </a:tc>
-                <a:extLst>
-                  <a:ext uri="{0D108BD9-81ED-4DB2-BD59-A6C34878D82A}">
-                    <a16:rowId xmlns:a16="http://schemas.microsoft.com/office/drawing/2014/main" val="3627437822"/>
-                  </a:ext>
-                </a:extLst>
-              </a:tr>
-            </a:tbl>
-          </a:graphicData>
-        </a:graphic>
-      </p:graphicFrame>
-    </p:spTree>
-    <p:extLst>
-      <p:ext uri="{BB962C8B-B14F-4D97-AF65-F5344CB8AC3E}">
-        <p14:creationId xmlns:p14="http://schemas.microsoft.com/office/powerpoint/2010/main" val="1376789889"/>
-      </p:ext>
-    </p:extLst>
-  </p:cSld>
-  <p:clrMapOvr>
-    <a:masterClrMapping/>
-  </p:clrMapOvr>
-</p:sld>
-</file>
-
-<file path=ppt/slides/slide9.xml><?xml version="1.0" encoding="utf-8"?>
-<p:sld xmlns:a="http://schemas.openxmlformats.org/drawingml/2006/main" xmlns:r="http://schemas.openxmlformats.org/officeDocument/2006/relationships" xmlns:p="http://schemas.openxmlformats.org/presentationml/2006/main">
-  <p:cSld>
-    <p:spTree>
-      <p:nvGrpSpPr>
-        <p:cNvPr id="1" name=""/>
-        <p:cNvGrpSpPr/>
-        <p:nvPr/>
-      </p:nvGrpSpPr>
-      <p:grpSpPr>
-        <a:xfrm>
-          <a:off x="0" y="0"/>
-          <a:ext cx="0" cy="0"/>
-          <a:chOff x="0" y="0"/>
-          <a:chExt cx="0" cy="0"/>
-        </a:xfrm>
-      </p:grpSpPr>
-      <p:sp>
-        <p:nvSpPr>
-          <p:cNvPr id="2" name="Title 1">
-            <a:extLst>
-              <a:ext uri="{FF2B5EF4-FFF2-40B4-BE49-F238E27FC236}">
-                <a16:creationId xmlns:a16="http://schemas.microsoft.com/office/drawing/2014/main" id="{95D8128B-F3F5-0374-DC89-A323F292678C}"/>
-              </a:ext>
-            </a:extLst>
-          </p:cNvPr>
-          <p:cNvSpPr>
-            <a:spLocks noGrp="1"/>
-          </p:cNvSpPr>
-          <p:nvPr>
-            <p:ph type="title"/>
-          </p:nvPr>
-        </p:nvSpPr>
-        <p:spPr/>
-        <p:txBody>
-          <a:bodyPr/>
-          <a:lstStyle/>
-          <a:p>
-            <a:r>
-              <a:rPr lang="pl-PL" dirty="0"/>
-              <a:t>Wykrywanie, w którym miejscu została uderzona piłka</a:t>
-            </a:r>
-          </a:p>
-        </p:txBody>
-      </p:sp>
-      <p:sp>
-        <p:nvSpPr>
-          <p:cNvPr id="3" name="Content Placeholder 2">
-            <a:extLst>
-              <a:ext uri="{FF2B5EF4-FFF2-40B4-BE49-F238E27FC236}">
-                <a16:creationId xmlns:a16="http://schemas.microsoft.com/office/drawing/2014/main" id="{E773D8DE-712B-7F95-2B6C-2C6A8F80E265}"/>
-              </a:ext>
-            </a:extLst>
-          </p:cNvPr>
-          <p:cNvSpPr>
-            <a:spLocks noGrp="1"/>
-          </p:cNvSpPr>
-          <p:nvPr>
-            <p:ph idx="1"/>
-          </p:nvPr>
-        </p:nvSpPr>
-        <p:spPr/>
-        <p:txBody>
-          <a:bodyPr/>
-          <a:lstStyle/>
-          <a:p>
-            <a:r>
-              <a:rPr lang="pl-PL" dirty="0"/>
-              <a:t>Czujniki siły nacisku</a:t>
-            </a:r>
-          </a:p>
-          <a:p>
-            <a:pPr lvl="1"/>
-            <a:r>
-              <a:rPr lang="pl-PL" dirty="0"/>
-              <a:t>Czujniki tensometryczne – do 50 kg(tylko do mierzenia ścisku piłki)</a:t>
-            </a:r>
-            <a:br>
-              <a:rPr lang="pl-PL" dirty="0"/>
-            </a:br>
-            <a:r>
-              <a:rPr lang="pl-PL" dirty="0"/>
-              <a:t>Wolne, statyczne zmiany siły nacisku</a:t>
-            </a:r>
-          </a:p>
-          <a:p>
-            <a:pPr lvl="1"/>
-            <a:r>
-              <a:rPr lang="pl-PL" dirty="0"/>
-              <a:t>Czujniki piezoelektryczne – do 15kgf</a:t>
-            </a:r>
-            <a:br>
-              <a:rPr lang="pl-PL" dirty="0"/>
-            </a:br>
-            <a:r>
-              <a:rPr lang="pl-PL" dirty="0"/>
-              <a:t>Szybkie, krótkotrwałe zmiany siły nacisku</a:t>
-            </a:r>
-          </a:p>
-          <a:p>
-            <a:pPr marL="457200" lvl="1" indent="0">
-              <a:buNone/>
-            </a:pPr>
-            <a:endParaRPr lang="pl-PL" dirty="0"/>
-          </a:p>
-          <a:p>
-            <a:endParaRPr lang="pl-PL" dirty="0"/>
-          </a:p>
-          <a:p>
-            <a:pPr marL="0" indent="0">
-              <a:buNone/>
-            </a:pPr>
-            <a:endParaRPr lang="pl-PL" dirty="0"/>
-          </a:p>
-          <a:p>
-            <a:pPr marL="0" indent="0">
-              <a:buNone/>
-            </a:pPr>
-            <a:endParaRPr lang="pl-PL" dirty="0"/>
-          </a:p>
-        </p:txBody>
-      </p:sp>
-      <p:pic>
-        <p:nvPicPr>
-          <p:cNvPr id="5122" name="Picture 2" descr="FSR06BE">
-            <a:extLst>
-              <a:ext uri="{FF2B5EF4-FFF2-40B4-BE49-F238E27FC236}">
-                <a16:creationId xmlns:a16="http://schemas.microsoft.com/office/drawing/2014/main" id="{60FC08A9-8065-1678-D7E5-ED04F64CB31E}"/>
-              </a:ext>
-            </a:extLst>
-          </p:cNvPr>
-          <p:cNvPicPr>
-            <a:picLocks noChangeAspect="1" noChangeArrowheads="1"/>
-          </p:cNvPicPr>
-          <p:nvPr/>
-        </p:nvPicPr>
-        <p:blipFill>
-          <a:blip r:embed="rId2">
-            <a:extLst>
-              <a:ext uri="{28A0092B-C50C-407E-A947-70E740481C1C}">
-                <a14:useLocalDpi xmlns:a14="http://schemas.microsoft.com/office/drawing/2010/main" val="0"/>
-              </a:ext>
-            </a:extLst>
-          </a:blip>
-          <a:srcRect/>
-          <a:stretch>
-            <a:fillRect/>
-          </a:stretch>
-        </p:blipFill>
-        <p:spPr bwMode="auto">
-          <a:xfrm>
-            <a:off x="2220522" y="3675274"/>
-            <a:ext cx="2636626" cy="2636626"/>
-          </a:xfrm>
-          <a:prstGeom prst="rect">
-            <a:avLst/>
-          </a:prstGeom>
-          <a:noFill/>
-          <a:extLst>
-            <a:ext uri="{909E8E84-426E-40DD-AFC4-6F175D3DCCD1}">
-              <a14:hiddenFill xmlns:a14="http://schemas.microsoft.com/office/drawing/2010/main">
-                <a:solidFill>
-                  <a:srgbClr val="FFFFFF"/>
-                </a:solidFill>
-              </a14:hiddenFill>
-            </a:ext>
-          </a:extLst>
-        </p:spPr>
-      </p:pic>
-      <p:pic>
-        <p:nvPicPr>
-          <p:cNvPr id="5126" name="Picture 6">
-            <a:extLst>
-              <a:ext uri="{FF2B5EF4-FFF2-40B4-BE49-F238E27FC236}">
-                <a16:creationId xmlns:a16="http://schemas.microsoft.com/office/drawing/2014/main" id="{9F7252CE-47A0-1CD6-25CD-754549B2A0C4}"/>
-              </a:ext>
-            </a:extLst>
-          </p:cNvPr>
-          <p:cNvPicPr>
-            <a:picLocks noChangeAspect="1" noChangeArrowheads="1"/>
-          </p:cNvPicPr>
-          <p:nvPr/>
-        </p:nvPicPr>
-        <p:blipFill>
-          <a:blip r:embed="rId3">
-            <a:extLst>
-              <a:ext uri="{28A0092B-C50C-407E-A947-70E740481C1C}">
-                <a14:useLocalDpi xmlns:a14="http://schemas.microsoft.com/office/drawing/2010/main" val="0"/>
-              </a:ext>
-            </a:extLst>
-          </a:blip>
-          <a:srcRect/>
-          <a:stretch>
-            <a:fillRect/>
-          </a:stretch>
-        </p:blipFill>
-        <p:spPr bwMode="auto">
-          <a:xfrm>
-            <a:off x="7334853" y="2994409"/>
-            <a:ext cx="3605060" cy="3605060"/>
-          </a:xfrm>
-          <a:prstGeom prst="rect">
-            <a:avLst/>
-          </a:prstGeom>
-          <a:noFill/>
-          <a:extLst>
-            <a:ext uri="{909E8E84-426E-40DD-AFC4-6F175D3DCCD1}">
-              <a14:hiddenFill xmlns:a14="http://schemas.microsoft.com/office/drawing/2010/main">
-                <a:solidFill>
-                  <a:srgbClr val="FFFFFF"/>
-                </a:solidFill>
-              </a14:hiddenFill>
-            </a:ext>
-          </a:extLst>
-        </p:spPr>
-      </p:pic>
-    </p:spTree>
-    <p:extLst>
-      <p:ext uri="{BB962C8B-B14F-4D97-AF65-F5344CB8AC3E}">
-        <p14:creationId xmlns:p14="http://schemas.microsoft.com/office/powerpoint/2010/main" val="1880629775"/>
       </p:ext>
     </p:extLst>
   </p:cSld>

--- a/Prezentacja/Smart-piłka_prez.pptx
+++ b/Prezentacja/Smart-piłka_prez.pptx
@@ -4802,7 +4802,7 @@
             <p:ph idx="1"/>
             <p:extLst>
               <p:ext uri="{D42A27DB-BD31-4B8C-83A1-F6EECF244321}">
-                <p14:modId xmlns:p14="http://schemas.microsoft.com/office/powerpoint/2010/main" val="3490197104"/>
+                <p14:modId xmlns:p14="http://schemas.microsoft.com/office/powerpoint/2010/main" val="94870497"/>
               </p:ext>
             </p:extLst>
           </p:nvPr>
@@ -4875,12 +4875,12 @@
                         <a:buNone/>
                       </a:pPr>
                       <a:r>
-                        <a:rPr lang="pl-PL" sz="1200" u="none" strike="noStrike">
+                        <a:rPr lang="pl-PL" sz="1200" b="1" u="none" strike="noStrike" dirty="0">
                           <a:effectLst/>
                         </a:rPr>
                         <a:t>IAM-20380HT</a:t>
                       </a:r>
-                      <a:endParaRPr lang="pl-PL" sz="1200" b="0" i="0" u="none" strike="noStrike">
+                      <a:endParaRPr lang="pl-PL" sz="1200" b="1" i="0" u="none" strike="noStrike" dirty="0">
                         <a:solidFill>
                           <a:srgbClr val="000000"/>
                         </a:solidFill>
@@ -4900,7 +4900,7 @@
                         <a:buNone/>
                       </a:pPr>
                       <a:r>
-                        <a:rPr lang="pl-PL" sz="1200" u="none" strike="noStrike" dirty="0">
+                        <a:rPr lang="pl-PL" sz="1200" b="0" u="none" strike="noStrike" dirty="0">
                           <a:effectLst/>
                         </a:rPr>
                         <a:t>I3G4250DTR</a:t>
@@ -4982,12 +4982,14 @@
                         <a:buNone/>
                       </a:pPr>
                       <a:r>
-                        <a:rPr lang="pl-PL" sz="1200" u="none" strike="noStrike">
-                          <a:effectLst/>
-                        </a:rPr>
-                        <a:t>±245/±500/±2000g</a:t>
-                      </a:r>
-                      <a:endParaRPr lang="pl-PL" sz="1200" b="0" i="0" u="none" strike="noStrike">
+                        <a:rPr lang="pl-PL" sz="1200" dirty="0"/>
+                        <a:t>±245/±500/±2000 </a:t>
+                      </a:r>
+                      <a:r>
+                        <a:rPr lang="pl-PL" sz="1200" dirty="0" err="1"/>
+                        <a:t>dps</a:t>
+                      </a:r>
+                      <a:endParaRPr lang="pl-PL" sz="1200" b="0" i="0" u="none" strike="noStrike" dirty="0">
                         <a:solidFill>
                           <a:srgbClr val="000000"/>
                         </a:solidFill>
@@ -5064,12 +5066,12 @@
                         <a:buNone/>
                       </a:pPr>
                       <a:r>
-                        <a:rPr lang="pl-PL" sz="1200" u="none" strike="noStrike">
+                        <a:rPr lang="pl-PL" sz="1200" u="none" strike="noStrike" dirty="0">
                           <a:effectLst/>
                         </a:rPr>
                         <a:t>16 bit</a:t>
                       </a:r>
-                      <a:endParaRPr lang="pl-PL" sz="1200" b="0" i="0" u="none" strike="noStrike">
+                      <a:endParaRPr lang="pl-PL" sz="1200" b="0" i="0" u="none" strike="noStrike" dirty="0">
                         <a:solidFill>
                           <a:srgbClr val="000000"/>
                         </a:solidFill>
@@ -5285,12 +5287,12 @@
                         <a:buNone/>
                       </a:pPr>
                       <a:r>
-                        <a:rPr lang="pl-PL" sz="1200" u="none" strike="noStrike">
+                        <a:rPr lang="pl-PL" sz="1200" u="none" strike="noStrike" dirty="0">
                           <a:effectLst/>
                         </a:rPr>
                         <a:t>1,71V to  3,6V</a:t>
                       </a:r>
-                      <a:endParaRPr lang="pl-PL" sz="1200" b="0" i="0" u="none" strike="noStrike">
+                      <a:endParaRPr lang="pl-PL" sz="1200" b="0" i="0" u="none" strike="noStrike" dirty="0">
                         <a:solidFill>
                           <a:srgbClr val="000000"/>
                         </a:solidFill>
@@ -5342,12 +5344,12 @@
                         <a:buNone/>
                       </a:pPr>
                       <a:r>
-                        <a:rPr lang="pl-PL" sz="1200" u="none" strike="noStrike">
-                          <a:effectLst/>
-                        </a:rPr>
-                        <a:t>Rozmiar kolejki</a:t>
-                      </a:r>
-                      <a:endParaRPr lang="pl-PL" sz="1200" b="0" i="0" u="none" strike="noStrike">
+                        <a:rPr lang="pl-PL" sz="1200" u="none" strike="noStrike" dirty="0">
+                          <a:effectLst/>
+                        </a:rPr>
+                        <a:t>Zużycie energii</a:t>
+                      </a:r>
+                      <a:endParaRPr lang="pl-PL" sz="1200" b="0" i="0" u="none" strike="noStrike" dirty="0">
                         <a:solidFill>
                           <a:srgbClr val="000000"/>
                         </a:solidFill>
@@ -5367,12 +5369,26 @@
                         <a:buNone/>
                       </a:pPr>
                       <a:r>
-                        <a:rPr lang="pl-PL" sz="1200" u="none" strike="noStrike">
-                          <a:effectLst/>
-                        </a:rPr>
-                        <a:t>4096-byte FIFO</a:t>
-                      </a:r>
-                      <a:endParaRPr lang="pl-PL" sz="1200" b="0" i="0" u="none" strike="noStrike">
+                        <a:rPr lang="pl-PL" sz="1200" b="0" i="0" u="none" strike="noStrike" dirty="0">
+                          <a:solidFill>
+                            <a:srgbClr val="000000"/>
+                          </a:solidFill>
+                          <a:effectLst/>
+                          <a:latin typeface="Aptos Narrow" panose="020B0004020202020204" pitchFamily="34" charset="0"/>
+                        </a:rPr>
+                        <a:t>2,6 </a:t>
+                      </a:r>
+                      <a:r>
+                        <a:rPr lang="pl-PL" sz="1200" b="0" i="0" u="none" strike="noStrike" dirty="0" err="1">
+                          <a:solidFill>
+                            <a:srgbClr val="000000"/>
+                          </a:solidFill>
+                          <a:effectLst/>
+                          <a:latin typeface="Aptos Narrow" panose="020B0004020202020204" pitchFamily="34" charset="0"/>
+                        </a:rPr>
+                        <a:t>mA</a:t>
+                      </a:r>
+                      <a:endParaRPr lang="pl-PL" sz="1200" b="0" i="0" u="none" strike="noStrike" dirty="0">
                         <a:solidFill>
                           <a:srgbClr val="000000"/>
                         </a:solidFill>
@@ -5392,12 +5408,18 @@
                         <a:buNone/>
                       </a:pPr>
                       <a:r>
-                        <a:rPr lang="pl-PL" sz="1200" u="none" strike="noStrike">
-                          <a:effectLst/>
-                        </a:rPr>
-                        <a:t>192-byte FIFO</a:t>
-                      </a:r>
-                      <a:endParaRPr lang="pl-PL" sz="1200" b="0" i="0" u="none" strike="noStrike">
+                        <a:rPr lang="pl-PL" sz="1200" u="none" strike="noStrike" dirty="0">
+                          <a:effectLst/>
+                        </a:rPr>
+                        <a:t>6,1 </a:t>
+                      </a:r>
+                      <a:r>
+                        <a:rPr lang="pl-PL" sz="1200" u="none" strike="noStrike" dirty="0" err="1">
+                          <a:effectLst/>
+                        </a:rPr>
+                        <a:t>mA</a:t>
+                      </a:r>
+                      <a:endParaRPr lang="pl-PL" sz="1200" b="0" i="0" u="none" strike="noStrike" dirty="0">
                         <a:solidFill>
                           <a:srgbClr val="000000"/>
                         </a:solidFill>
@@ -5824,12 +5846,12 @@
                         <a:buNone/>
                       </a:pPr>
                       <a:r>
-                        <a:rPr lang="pl-PL" sz="1200" u="none" strike="noStrike">
+                        <a:rPr lang="pl-PL" sz="1200" u="none" strike="noStrike" dirty="0">
                           <a:effectLst/>
                         </a:rPr>
                         <a:t>programowalny, cyfrowy</a:t>
                       </a:r>
-                      <a:endParaRPr lang="pl-PL" sz="1200" b="0" i="0" u="none" strike="noStrike">
+                      <a:endParaRPr lang="pl-PL" sz="1200" b="0" i="0" u="none" strike="noStrike" dirty="0">
                         <a:solidFill>
                           <a:srgbClr val="000000"/>
                         </a:solidFill>
@@ -7707,7 +7729,7 @@
             <p:ph idx="1"/>
             <p:extLst>
               <p:ext uri="{D42A27DB-BD31-4B8C-83A1-F6EECF244321}">
-                <p14:modId xmlns:p14="http://schemas.microsoft.com/office/powerpoint/2010/main" val="4216555451"/>
+                <p14:modId xmlns:p14="http://schemas.microsoft.com/office/powerpoint/2010/main" val="3807545888"/>
               </p:ext>
             </p:extLst>
           </p:nvPr>
@@ -7780,12 +7802,18 @@
                         <a:buNone/>
                       </a:pPr>
                       <a:r>
-                        <a:rPr lang="pl-PL" sz="1500" u="none" strike="noStrike">
-                          <a:effectLst/>
-                        </a:rPr>
-                        <a:t>Esp 32-WROOM-32EU</a:t>
-                      </a:r>
-                      <a:endParaRPr lang="pl-PL" sz="1500" b="0" i="0" u="none" strike="noStrike">
+                        <a:rPr lang="pl-PL" sz="1500" b="1" u="none" strike="noStrike" dirty="0" err="1">
+                          <a:effectLst/>
+                        </a:rPr>
+                        <a:t>Esp</a:t>
+                      </a:r>
+                      <a:r>
+                        <a:rPr lang="pl-PL" sz="1500" b="1" u="none" strike="noStrike" dirty="0">
+                          <a:effectLst/>
+                        </a:rPr>
+                        <a:t> 32-WROOM-32EU</a:t>
+                      </a:r>
+                      <a:endParaRPr lang="pl-PL" sz="1500" b="1" i="0" u="none" strike="noStrike" dirty="0">
                         <a:solidFill>
                           <a:srgbClr val="000000"/>
                         </a:solidFill>
@@ -7862,12 +7890,36 @@
                         <a:buNone/>
                       </a:pPr>
                       <a:r>
-                        <a:rPr lang="pl-PL" sz="1500" u="none" strike="noStrike">
-                          <a:effectLst/>
-                        </a:rPr>
-                        <a:t>Xtensa® dual-core 32-bit LX6 microprocessor</a:t>
-                      </a:r>
-                      <a:endParaRPr lang="pl-PL" sz="1500" b="0" i="0" u="none" strike="noStrike">
+                        <a:rPr lang="pl-PL" sz="1500" u="none" strike="noStrike" dirty="0" err="1">
+                          <a:effectLst/>
+                        </a:rPr>
+                        <a:t>Xtensa</a:t>
+                      </a:r>
+                      <a:r>
+                        <a:rPr lang="pl-PL" sz="1500" u="none" strike="noStrike" dirty="0">
+                          <a:effectLst/>
+                        </a:rPr>
+                        <a:t>® dual-</a:t>
+                      </a:r>
+                      <a:r>
+                        <a:rPr lang="pl-PL" sz="1500" u="none" strike="noStrike" dirty="0" err="1">
+                          <a:effectLst/>
+                        </a:rPr>
+                        <a:t>core</a:t>
+                      </a:r>
+                      <a:r>
+                        <a:rPr lang="pl-PL" sz="1500" u="none" strike="noStrike" dirty="0">
+                          <a:effectLst/>
+                        </a:rPr>
+                        <a:t> 32-bit LX6 </a:t>
+                      </a:r>
+                      <a:r>
+                        <a:rPr lang="pl-PL" sz="1500" u="none" strike="noStrike" dirty="0" err="1">
+                          <a:effectLst/>
+                        </a:rPr>
+                        <a:t>microprocessor</a:t>
+                      </a:r>
+                      <a:endParaRPr lang="pl-PL" sz="1500" b="0" i="0" u="none" strike="noStrike" dirty="0">
                         <a:solidFill>
                           <a:srgbClr val="000000"/>
                         </a:solidFill>
@@ -7944,12 +7996,12 @@
                         <a:buNone/>
                       </a:pPr>
                       <a:r>
-                        <a:rPr lang="pl-PL" sz="1500" u="none" strike="noStrike">
+                        <a:rPr lang="pl-PL" sz="1500" u="none" strike="noStrike" dirty="0">
                           <a:effectLst/>
                         </a:rPr>
                         <a:t>240 MHz</a:t>
                       </a:r>
-                      <a:endParaRPr lang="pl-PL" sz="1500" b="0" i="0" u="none" strike="noStrike">
+                      <a:endParaRPr lang="pl-PL" sz="1500" b="0" i="0" u="none" strike="noStrike" dirty="0">
                         <a:solidFill>
                           <a:srgbClr val="000000"/>
                         </a:solidFill>
@@ -8001,12 +8053,12 @@
                         <a:buNone/>
                       </a:pPr>
                       <a:r>
-                        <a:rPr lang="pl-PL" sz="1500" u="none" strike="noStrike">
+                        <a:rPr lang="pl-PL" sz="1500" u="none" strike="noStrike" dirty="0">
                           <a:effectLst/>
                         </a:rPr>
                         <a:t>Flash</a:t>
                       </a:r>
-                      <a:endParaRPr lang="pl-PL" sz="1500" b="0" i="0" u="none" strike="noStrike">
+                      <a:endParaRPr lang="pl-PL" sz="1500" b="0" i="0" u="none" strike="noStrike" dirty="0">
                         <a:solidFill>
                           <a:srgbClr val="000000"/>
                         </a:solidFill>
@@ -8026,12 +8078,12 @@
                         <a:buNone/>
                       </a:pPr>
                       <a:r>
-                        <a:rPr lang="pl-PL" sz="1500" u="none" strike="noStrike">
+                        <a:rPr lang="pl-PL" sz="1500" u="none" strike="noStrike" dirty="0">
                           <a:effectLst/>
                         </a:rPr>
                         <a:t>4 - 16 MB</a:t>
                       </a:r>
-                      <a:endParaRPr lang="pl-PL" sz="1500" b="0" i="0" u="none" strike="noStrike">
+                      <a:endParaRPr lang="pl-PL" sz="1500" b="0" i="0" u="none" strike="noStrike" dirty="0">
                         <a:solidFill>
                           <a:srgbClr val="000000"/>
                         </a:solidFill>
@@ -8108,12 +8160,18 @@
                         <a:buNone/>
                       </a:pPr>
                       <a:r>
-                        <a:rPr lang="pl-PL" sz="1500" u="none" strike="noStrike">
-                          <a:effectLst/>
-                        </a:rPr>
-                        <a:t>520 kB</a:t>
-                      </a:r>
-                      <a:endParaRPr lang="pl-PL" sz="1500" b="0" i="0" u="none" strike="noStrike">
+                        <a:rPr lang="pl-PL" sz="1500" u="none" strike="noStrike" dirty="0">
+                          <a:effectLst/>
+                        </a:rPr>
+                        <a:t>520 </a:t>
+                      </a:r>
+                      <a:r>
+                        <a:rPr lang="pl-PL" sz="1500" u="none" strike="noStrike" dirty="0" err="1">
+                          <a:effectLst/>
+                        </a:rPr>
+                        <a:t>kB</a:t>
+                      </a:r>
+                      <a:endParaRPr lang="pl-PL" sz="1500" b="0" i="0" u="none" strike="noStrike" dirty="0">
                         <a:solidFill>
                           <a:srgbClr val="000000"/>
                         </a:solidFill>
@@ -8133,12 +8191,18 @@
                         <a:buNone/>
                       </a:pPr>
                       <a:r>
-                        <a:rPr lang="pl-PL" sz="1500" u="none" strike="noStrike">
-                          <a:effectLst/>
-                        </a:rPr>
-                        <a:t>256 kB</a:t>
-                      </a:r>
-                      <a:endParaRPr lang="pl-PL" sz="1500" b="0" i="0" u="none" strike="noStrike">
+                        <a:rPr lang="pl-PL" sz="1500" u="none" strike="noStrike" dirty="0">
+                          <a:effectLst/>
+                        </a:rPr>
+                        <a:t>256 </a:t>
+                      </a:r>
+                      <a:r>
+                        <a:rPr lang="pl-PL" sz="1500" u="none" strike="noStrike" dirty="0" err="1">
+                          <a:effectLst/>
+                        </a:rPr>
+                        <a:t>kB</a:t>
+                      </a:r>
+                      <a:endParaRPr lang="pl-PL" sz="1500" b="0" i="0" u="none" strike="noStrike" dirty="0">
                         <a:solidFill>
                           <a:srgbClr val="000000"/>
                         </a:solidFill>
@@ -8165,12 +8229,12 @@
                         <a:buNone/>
                       </a:pPr>
                       <a:r>
-                        <a:rPr lang="pl-PL" sz="1500" u="none" strike="noStrike">
+                        <a:rPr lang="pl-PL" sz="1500" u="none" strike="noStrike" dirty="0">
                           <a:effectLst/>
                         </a:rPr>
                         <a:t>Łączność</a:t>
                       </a:r>
-                      <a:endParaRPr lang="pl-PL" sz="1500" b="0" i="0" u="none" strike="noStrike">
+                      <a:endParaRPr lang="pl-PL" sz="1500" b="0" i="0" u="none" strike="noStrike" dirty="0">
                         <a:solidFill>
                           <a:srgbClr val="000000"/>
                         </a:solidFill>
@@ -8242,12 +8306,12 @@
                         <a:buNone/>
                       </a:pPr>
                       <a:r>
-                        <a:rPr lang="pt-BR" sz="1500" u="none" strike="noStrike">
+                        <a:rPr lang="pt-BR" sz="1500" u="none" strike="noStrike" dirty="0">
                           <a:effectLst/>
                         </a:rPr>
                         <a:t>802.11b/g/n (do 150 Mbps)</a:t>
                       </a:r>
-                      <a:endParaRPr lang="pt-BR" sz="1500" b="0" i="0" u="none" strike="noStrike">
+                      <a:endParaRPr lang="pt-BR" sz="1500" b="0" i="0" u="none" strike="noStrike" dirty="0">
                         <a:solidFill>
                           <a:srgbClr val="000000"/>
                         </a:solidFill>
@@ -8324,12 +8388,24 @@
                         <a:buNone/>
                       </a:pPr>
                       <a:r>
-                        <a:rPr lang="en-US" sz="1500" u="none" strike="noStrike">
-                          <a:effectLst/>
-                        </a:rPr>
-                        <a:t>Bluetooth V4.2 BR/EDR i Bluetooth LE</a:t>
-                      </a:r>
-                      <a:endParaRPr lang="en-US" sz="1500" b="0" i="0" u="none" strike="noStrike">
+                        <a:rPr lang="en-US" sz="1500" u="none" strike="noStrike" dirty="0">
+                          <a:effectLst/>
+                        </a:rPr>
+                        <a:t>Bluetooth V4.2 BR/EDR </a:t>
+                      </a:r>
+                      <a:r>
+                        <a:rPr lang="en-US" sz="1500" u="none" strike="noStrike" dirty="0" err="1">
+                          <a:effectLst/>
+                        </a:rPr>
+                        <a:t>i</a:t>
+                      </a:r>
+                      <a:r>
+                        <a:rPr lang="en-US" sz="1500" u="none" strike="noStrike" dirty="0">
+                          <a:effectLst/>
+                        </a:rPr>
+                        <a:t> Bluetooth LE</a:t>
+                      </a:r>
+                      <a:endParaRPr lang="en-US" sz="1500" b="0" i="0" u="none" strike="noStrike" dirty="0">
                         <a:solidFill>
                           <a:srgbClr val="000000"/>
                         </a:solidFill>
@@ -8406,12 +8482,12 @@
                         <a:buNone/>
                       </a:pPr>
                       <a:r>
-                        <a:rPr lang="pl-PL" sz="1500" u="none" strike="noStrike">
+                        <a:rPr lang="pl-PL" sz="1500" u="none" strike="noStrike" dirty="0">
                           <a:effectLst/>
                         </a:rPr>
                         <a:t>30</a:t>
                       </a:r>
-                      <a:endParaRPr lang="pl-PL" sz="1500" b="0" i="0" u="none" strike="noStrike">
+                      <a:endParaRPr lang="pl-PL" sz="1500" b="0" i="0" u="none" strike="noStrike" dirty="0">
                         <a:solidFill>
                           <a:srgbClr val="000000"/>
                         </a:solidFill>
@@ -8545,12 +8621,12 @@
                         <a:buNone/>
                       </a:pPr>
                       <a:r>
-                        <a:rPr lang="pl-PL" sz="1500" u="none" strike="noStrike">
+                        <a:rPr lang="pl-PL" sz="1500" u="none" strike="noStrike" dirty="0">
                           <a:effectLst/>
                         </a:rPr>
                         <a:t>Dodatkowe elementy</a:t>
                       </a:r>
-                      <a:endParaRPr lang="pl-PL" sz="1500" b="0" i="0" u="none" strike="noStrike">
+                      <a:endParaRPr lang="pl-PL" sz="1500" b="0" i="0" u="none" strike="noStrike" dirty="0">
                         <a:solidFill>
                           <a:srgbClr val="000000"/>
                         </a:solidFill>
@@ -8622,12 +8698,12 @@
                         <a:buNone/>
                       </a:pPr>
                       <a:r>
-                        <a:rPr lang="pl-PL" sz="1500" u="none" strike="noStrike">
+                        <a:rPr lang="pl-PL" sz="1500" u="none" strike="noStrike" dirty="0">
                           <a:effectLst/>
                         </a:rPr>
                         <a:t> </a:t>
                       </a:r>
-                      <a:endParaRPr lang="pl-PL" sz="1500" b="0" i="0" u="none" strike="noStrike">
+                      <a:endParaRPr lang="pl-PL" sz="1500" b="0" i="0" u="none" strike="noStrike" dirty="0">
                         <a:solidFill>
                           <a:srgbClr val="000000"/>
                         </a:solidFill>
@@ -8647,12 +8723,18 @@
                         <a:buNone/>
                       </a:pPr>
                       <a:r>
-                        <a:rPr lang="pl-PL" sz="1500" u="none" strike="noStrike">
-                          <a:effectLst/>
-                        </a:rPr>
-                        <a:t>Akcelererometr - do 16g</a:t>
-                      </a:r>
-                      <a:endParaRPr lang="pl-PL" sz="1500" b="0" i="0" u="none" strike="noStrike">
+                        <a:rPr lang="pl-PL" sz="1500" u="none" strike="noStrike" dirty="0" err="1">
+                          <a:effectLst/>
+                        </a:rPr>
+                        <a:t>Akcelererometr</a:t>
+                      </a:r>
+                      <a:r>
+                        <a:rPr lang="pl-PL" sz="1500" u="none" strike="noStrike" dirty="0">
+                          <a:effectLst/>
+                        </a:rPr>
+                        <a:t> - do 16g</a:t>
+                      </a:r>
+                      <a:endParaRPr lang="pl-PL" sz="1500" b="0" i="0" u="none" strike="noStrike" dirty="0">
                         <a:solidFill>
                           <a:srgbClr val="000000"/>
                         </a:solidFill>
@@ -8704,12 +8786,12 @@
                         <a:buNone/>
                       </a:pPr>
                       <a:r>
-                        <a:rPr lang="pl-PL" sz="1500" u="none" strike="noStrike">
+                        <a:rPr lang="pl-PL" sz="1500" u="none" strike="noStrike" dirty="0">
                           <a:effectLst/>
                         </a:rPr>
                         <a:t> </a:t>
                       </a:r>
-                      <a:endParaRPr lang="pl-PL" sz="1500" b="0" i="0" u="none" strike="noStrike">
+                      <a:endParaRPr lang="pl-PL" sz="1500" b="0" i="0" u="none" strike="noStrike" dirty="0">
                         <a:solidFill>
                           <a:srgbClr val="000000"/>
                         </a:solidFill>
@@ -8786,12 +8868,12 @@
                         <a:buNone/>
                       </a:pPr>
                       <a:r>
-                        <a:rPr lang="pl-PL" sz="1500" u="none" strike="noStrike">
+                        <a:rPr lang="pl-PL" sz="1500" u="none" strike="noStrike" dirty="0">
                           <a:effectLst/>
                         </a:rPr>
                         <a:t> </a:t>
                       </a:r>
-                      <a:endParaRPr lang="pl-PL" sz="1500" b="0" i="0" u="none" strike="noStrike">
+                      <a:endParaRPr lang="pl-PL" sz="1500" b="0" i="0" u="none" strike="noStrike" dirty="0">
                         <a:solidFill>
                           <a:srgbClr val="000000"/>
                         </a:solidFill>
@@ -8811,12 +8893,12 @@
                         <a:buNone/>
                       </a:pPr>
                       <a:r>
-                        <a:rPr lang="pl-PL" sz="1500" u="none" strike="noStrike">
+                        <a:rPr lang="pl-PL" sz="1500" u="none" strike="noStrike" dirty="0">
                           <a:effectLst/>
                         </a:rPr>
                         <a:t>Magnetometr 3 osiowy</a:t>
                       </a:r>
-                      <a:endParaRPr lang="pl-PL" sz="1500" b="0" i="0" u="none" strike="noStrike">
+                      <a:endParaRPr lang="pl-PL" sz="1500" b="0" i="0" u="none" strike="noStrike" dirty="0">
                         <a:solidFill>
                           <a:srgbClr val="000000"/>
                         </a:solidFill>
@@ -8853,6 +8935,14 @@
 <file path=ppt/slides/slide14.xml><?xml version="1.0" encoding="utf-8"?>
 <p:sld xmlns:a="http://schemas.openxmlformats.org/drawingml/2006/main" xmlns:r="http://schemas.openxmlformats.org/officeDocument/2006/relationships" xmlns:p="http://schemas.openxmlformats.org/presentationml/2006/main">
   <p:cSld>
+    <p:bg>
+      <p:bgPr>
+        <a:solidFill>
+          <a:schemeClr val="bg1"/>
+        </a:solidFill>
+        <a:effectLst/>
+      </p:bgPr>
+    </p:bg>
     <p:spTree>
       <p:nvGrpSpPr>
         <p:cNvPr id="1" name=""/>
@@ -8867,6 +8957,195 @@
           <a:chExt cx="0" cy="0"/>
         </a:xfrm>
       </p:grpSpPr>
+      <p:sp useBgFill="1">
+        <p:nvSpPr>
+          <p:cNvPr id="1031" name="Rectangle 1030">
+            <a:extLst>
+              <a:ext uri="{FF2B5EF4-FFF2-40B4-BE49-F238E27FC236}">
+                <a16:creationId xmlns:a16="http://schemas.microsoft.com/office/drawing/2014/main" id="{19D32F93-50AC-4C46-A5DB-291C60DDB7BD}"/>
+              </a:ext>
+              <a:ext uri="{C183D7F6-B498-43B3-948B-1728B52AA6E4}">
+                <adec:decorative xmlns:adec="http://schemas.microsoft.com/office/drawing/2017/decorative" val="1"/>
+              </a:ext>
+            </a:extLst>
+          </p:cNvPr>
+          <p:cNvSpPr>
+            <a:spLocks noGrp="1" noRot="1" noChangeAspect="1" noMove="1" noResize="1" noEditPoints="1" noAdjustHandles="1" noChangeArrowheads="1" noChangeShapeType="1" noTextEdit="1"/>
+          </p:cNvSpPr>
+          <p:nvPr>
+            <p:extLst>
+              <p:ext uri="{386F3935-93C4-4BCD-93E2-E3B085C9AB24}">
+                <p16:designElem xmlns:p16="http://schemas.microsoft.com/office/powerpoint/2015/main" val="1"/>
+              </p:ext>
+            </p:extLst>
+          </p:nvPr>
+        </p:nvSpPr>
+        <p:spPr>
+          <a:xfrm>
+            <a:off x="0" y="0"/>
+            <a:ext cx="12192000" cy="6858000"/>
+          </a:xfrm>
+          <a:prstGeom prst="rect">
+            <a:avLst/>
+          </a:prstGeom>
+          <a:ln>
+            <a:noFill/>
+          </a:ln>
+        </p:spPr>
+        <p:style>
+          <a:lnRef idx="2">
+            <a:schemeClr val="accent1">
+              <a:shade val="50000"/>
+            </a:schemeClr>
+          </a:lnRef>
+          <a:fillRef idx="1">
+            <a:schemeClr val="accent1"/>
+          </a:fillRef>
+          <a:effectRef idx="0">
+            <a:schemeClr val="accent1"/>
+          </a:effectRef>
+          <a:fontRef idx="minor">
+            <a:schemeClr val="lt1"/>
+          </a:fontRef>
+        </p:style>
+        <p:txBody>
+          <a:bodyPr rtlCol="0" anchor="ctr"/>
+          <a:lstStyle/>
+          <a:p>
+            <a:pPr algn="ctr"/>
+            <a:endParaRPr lang="en-US"/>
+          </a:p>
+        </p:txBody>
+      </p:sp>
+      <p:sp>
+        <p:nvSpPr>
+          <p:cNvPr id="1033" name="Right Triangle 1032">
+            <a:extLst>
+              <a:ext uri="{FF2B5EF4-FFF2-40B4-BE49-F238E27FC236}">
+                <a16:creationId xmlns:a16="http://schemas.microsoft.com/office/drawing/2014/main" id="{827DC2C4-B485-428A-BF4A-472D2967F47F}"/>
+              </a:ext>
+              <a:ext uri="{C183D7F6-B498-43B3-948B-1728B52AA6E4}">
+                <adec:decorative xmlns:adec="http://schemas.microsoft.com/office/drawing/2017/decorative" val="1"/>
+              </a:ext>
+            </a:extLst>
+          </p:cNvPr>
+          <p:cNvSpPr>
+            <a:spLocks noGrp="1" noRot="1" noChangeAspect="1" noMove="1" noResize="1" noEditPoints="1" noAdjustHandles="1" noChangeArrowheads="1" noChangeShapeType="1" noTextEdit="1"/>
+          </p:cNvSpPr>
+          <p:nvPr>
+            <p:extLst>
+              <p:ext uri="{386F3935-93C4-4BCD-93E2-E3B085C9AB24}">
+                <p16:designElem xmlns:p16="http://schemas.microsoft.com/office/powerpoint/2015/main" val="1"/>
+              </p:ext>
+            </p:extLst>
+          </p:nvPr>
+        </p:nvSpPr>
+        <p:spPr>
+          <a:xfrm flipH="1">
+            <a:off x="8576720" y="3335867"/>
+            <a:ext cx="3291840" cy="3200400"/>
+          </a:xfrm>
+          <a:prstGeom prst="rtTriangle">
+            <a:avLst/>
+          </a:prstGeom>
+          <a:solidFill>
+            <a:schemeClr val="accent4"/>
+          </a:solidFill>
+          <a:ln>
+            <a:noFill/>
+          </a:ln>
+        </p:spPr>
+        <p:style>
+          <a:lnRef idx="2">
+            <a:schemeClr val="accent1">
+              <a:shade val="50000"/>
+            </a:schemeClr>
+          </a:lnRef>
+          <a:fillRef idx="1">
+            <a:schemeClr val="accent1"/>
+          </a:fillRef>
+          <a:effectRef idx="0">
+            <a:schemeClr val="accent1"/>
+          </a:effectRef>
+          <a:fontRef idx="minor">
+            <a:schemeClr val="lt1"/>
+          </a:fontRef>
+        </p:style>
+        <p:txBody>
+          <a:bodyPr rtlCol="0" anchor="ctr"/>
+          <a:lstStyle/>
+          <a:p>
+            <a:pPr algn="ctr"/>
+            <a:endParaRPr lang="en-US" dirty="0"/>
+          </a:p>
+        </p:txBody>
+      </p:sp>
+      <p:sp>
+        <p:nvSpPr>
+          <p:cNvPr id="1035" name="Rectangle 1034">
+            <a:extLst>
+              <a:ext uri="{FF2B5EF4-FFF2-40B4-BE49-F238E27FC236}">
+                <a16:creationId xmlns:a16="http://schemas.microsoft.com/office/drawing/2014/main" id="{EE04B5EB-F158-4507-90DD-BD23620C7CC9}"/>
+              </a:ext>
+              <a:ext uri="{C183D7F6-B498-43B3-948B-1728B52AA6E4}">
+                <adec:decorative xmlns:adec="http://schemas.microsoft.com/office/drawing/2017/decorative" val="1"/>
+              </a:ext>
+            </a:extLst>
+          </p:cNvPr>
+          <p:cNvSpPr>
+            <a:spLocks noGrp="1" noRot="1" noChangeAspect="1" noMove="1" noResize="1" noEditPoints="1" noAdjustHandles="1" noChangeArrowheads="1" noChangeShapeType="1" noTextEdit="1"/>
+          </p:cNvSpPr>
+          <p:nvPr>
+            <p:extLst>
+              <p:ext uri="{386F3935-93C4-4BCD-93E2-E3B085C9AB24}">
+                <p16:designElem xmlns:p16="http://schemas.microsoft.com/office/powerpoint/2015/main" val="1"/>
+              </p:ext>
+            </p:extLst>
+          </p:nvPr>
+        </p:nvSpPr>
+        <p:spPr>
+          <a:xfrm>
+            <a:off x="641774" y="623275"/>
+            <a:ext cx="10905053" cy="5607882"/>
+          </a:xfrm>
+          <a:prstGeom prst="rect">
+            <a:avLst/>
+          </a:prstGeom>
+          <a:noFill/>
+          <a:ln w="19050">
+            <a:solidFill>
+              <a:schemeClr val="tx1">
+                <a:lumMod val="75000"/>
+                <a:lumOff val="25000"/>
+              </a:schemeClr>
+            </a:solidFill>
+          </a:ln>
+        </p:spPr>
+        <p:style>
+          <a:lnRef idx="2">
+            <a:schemeClr val="accent1">
+              <a:shade val="50000"/>
+            </a:schemeClr>
+          </a:lnRef>
+          <a:fillRef idx="1">
+            <a:schemeClr val="accent1"/>
+          </a:fillRef>
+          <a:effectRef idx="0">
+            <a:schemeClr val="accent1"/>
+          </a:effectRef>
+          <a:fontRef idx="minor">
+            <a:schemeClr val="lt1"/>
+          </a:fontRef>
+        </p:style>
+        <p:txBody>
+          <a:bodyPr rtlCol="0" anchor="ctr"/>
+          <a:lstStyle/>
+          <a:p>
+            <a:pPr algn="ctr"/>
+            <a:endParaRPr lang="en-US"/>
+          </a:p>
+        </p:txBody>
+      </p:sp>
       <p:sp>
         <p:nvSpPr>
           <p:cNvPr id="2" name="Title 1">
@@ -8883,13 +9162,28 @@
             <p:ph type="title"/>
           </p:nvPr>
         </p:nvSpPr>
-        <p:spPr/>
+        <p:spPr>
+          <a:xfrm>
+            <a:off x="965201" y="1036674"/>
+            <a:ext cx="3689096" cy="3514364"/>
+          </a:xfrm>
+        </p:spPr>
         <p:txBody>
-          <a:bodyPr/>
+          <a:bodyPr vert="horz" lIns="91440" tIns="45720" rIns="91440" bIns="45720" rtlCol="0" anchor="b">
+            <a:normAutofit/>
+          </a:bodyPr>
           <a:lstStyle/>
           <a:p>
+            <a:pPr algn="r"/>
             <a:r>
-              <a:rPr lang="en-PL" dirty="0"/>
+              <a:rPr lang="en-US" sz="4000" kern="1200">
+                <a:solidFill>
+                  <a:schemeClr val="tx1"/>
+                </a:solidFill>
+                <a:latin typeface="+mj-lt"/>
+                <a:ea typeface="+mj-ea"/>
+                <a:cs typeface="+mj-cs"/>
+              </a:rPr>
               <a:t>Środowisko programistyczne</a:t>
             </a:r>
           </a:p>
@@ -8911,15 +9205,81 @@
             <p:ph idx="1"/>
           </p:nvPr>
         </p:nvSpPr>
-        <p:spPr/>
+        <p:spPr>
+          <a:xfrm>
+            <a:off x="965202" y="4582814"/>
+            <a:ext cx="3689094" cy="1312657"/>
+          </a:xfrm>
+        </p:spPr>
         <p:txBody>
-          <a:bodyPr/>
+          <a:bodyPr vert="horz" lIns="91440" tIns="45720" rIns="91440" bIns="45720" rtlCol="0" anchor="t">
+            <a:normAutofit/>
+          </a:bodyPr>
           <a:lstStyle/>
           <a:p>
-            <a:endParaRPr lang="en-PL" dirty="0"/>
+            <a:pPr marL="0" indent="0" algn="r">
+              <a:buNone/>
+            </a:pPr>
+            <a:r>
+              <a:rPr lang="en-US" sz="2000" kern="1200">
+                <a:solidFill>
+                  <a:schemeClr val="tx1"/>
+                </a:solidFill>
+                <a:latin typeface="+mn-lt"/>
+                <a:ea typeface="+mn-ea"/>
+                <a:cs typeface="+mn-cs"/>
+              </a:rPr>
+              <a:t>VS Code +  ESP-IDF </a:t>
+            </a:r>
           </a:p>
         </p:txBody>
       </p:sp>
+      <p:pic>
+        <p:nvPicPr>
+          <p:cNvPr id="1026" name="Picture 2" descr="Getting Started With ESP-IDF | Set Up Espressif IDE – RoboticWorx">
+            <a:extLst>
+              <a:ext uri="{FF2B5EF4-FFF2-40B4-BE49-F238E27FC236}">
+                <a16:creationId xmlns:a16="http://schemas.microsoft.com/office/drawing/2014/main" id="{27401CF1-204F-A204-A18E-AB6674A1EB6D}"/>
+              </a:ext>
+            </a:extLst>
+          </p:cNvPr>
+          <p:cNvPicPr>
+            <a:picLocks noChangeAspect="1" noChangeArrowheads="1"/>
+          </p:cNvPicPr>
+          <p:nvPr/>
+        </p:nvPicPr>
+        <p:blipFill>
+          <a:blip r:embed="rId2">
+            <a:extLst>
+              <a:ext uri="{28A0092B-C50C-407E-A947-70E740481C1C}">
+                <a14:useLocalDpi xmlns:a14="http://schemas.microsoft.com/office/drawing/2010/main" val="0"/>
+              </a:ext>
+            </a:extLst>
+          </a:blip>
+          <a:stretch>
+            <a:fillRect/>
+          </a:stretch>
+        </p:blipFill>
+        <p:spPr bwMode="auto">
+          <a:xfrm>
+            <a:off x="5358843" y="1424763"/>
+            <a:ext cx="4779910" cy="3441535"/>
+          </a:xfrm>
+          <a:prstGeom prst="rect">
+            <a:avLst/>
+          </a:prstGeom>
+          <a:noFill/>
+          <a:extLst>
+            <a:ext uri="{909E8E84-426E-40DD-AFC4-6F175D3DCCD1}">
+              <a14:hiddenFill xmlns:a14="http://schemas.microsoft.com/office/drawing/2010/main">
+                <a:solidFill>
+                  <a:srgbClr val="FFFFFF"/>
+                </a:solidFill>
+              </a14:hiddenFill>
+            </a:ext>
+          </a:extLst>
+        </p:spPr>
+      </p:pic>
     </p:spTree>
     <p:extLst>
       <p:ext uri="{BB962C8B-B14F-4D97-AF65-F5344CB8AC3E}">
@@ -9503,6 +9863,52 @@
               <a:rPr lang="en-PL" dirty="0"/>
               <a:t>SPI</a:t>
             </a:r>
+          </a:p>
+        </p:txBody>
+      </p:sp>
+      <p:sp>
+        <p:nvSpPr>
+          <p:cNvPr id="5" name="Strzałka: w górę 4">
+            <a:extLst>
+              <a:ext uri="{FF2B5EF4-FFF2-40B4-BE49-F238E27FC236}">
+                <a16:creationId xmlns:a16="http://schemas.microsoft.com/office/drawing/2014/main" id="{809714AE-1FB0-2790-18BB-B1BEAD6D0818}"/>
+              </a:ext>
+            </a:extLst>
+          </p:cNvPr>
+          <p:cNvSpPr/>
+          <p:nvPr/>
+        </p:nvSpPr>
+        <p:spPr>
+          <a:xfrm>
+            <a:off x="5830916" y="4864867"/>
+            <a:ext cx="483079" cy="494695"/>
+          </a:xfrm>
+          <a:prstGeom prst="upArrow">
+            <a:avLst/>
+          </a:prstGeom>
+        </p:spPr>
+        <p:style>
+          <a:lnRef idx="2">
+            <a:schemeClr val="accent1">
+              <a:shade val="15000"/>
+            </a:schemeClr>
+          </a:lnRef>
+          <a:fillRef idx="1">
+            <a:schemeClr val="accent1"/>
+          </a:fillRef>
+          <a:effectRef idx="0">
+            <a:schemeClr val="accent1"/>
+          </a:effectRef>
+          <a:fontRef idx="minor">
+            <a:schemeClr val="lt1"/>
+          </a:fontRef>
+        </p:style>
+        <p:txBody>
+          <a:bodyPr rtlCol="0" anchor="ctr"/>
+          <a:lstStyle/>
+          <a:p>
+            <a:pPr algn="ctr"/>
+            <a:endParaRPr lang="pl-PL"/>
           </a:p>
         </p:txBody>
       </p:sp>
@@ -11792,7 +12198,7 @@
             <p:ph idx="1"/>
             <p:extLst>
               <p:ext uri="{D42A27DB-BD31-4B8C-83A1-F6EECF244321}">
-                <p14:modId xmlns:p14="http://schemas.microsoft.com/office/powerpoint/2010/main" val="1191421666"/>
+                <p14:modId xmlns:p14="http://schemas.microsoft.com/office/powerpoint/2010/main" val="514585083"/>
               </p:ext>
             </p:extLst>
           </p:nvPr>
@@ -11890,12 +12296,12 @@
                         <a:buNone/>
                       </a:pPr>
                       <a:r>
-                        <a:rPr lang="pl-PL" sz="1400" u="none" strike="noStrike" dirty="0">
+                        <a:rPr lang="pl-PL" sz="1400" b="1" u="none" strike="noStrike" dirty="0">
                           <a:effectLst/>
                         </a:rPr>
                         <a:t>ADXL 373</a:t>
                       </a:r>
-                      <a:endParaRPr lang="pl-PL" sz="1400" b="0" i="0" u="none" strike="noStrike" dirty="0">
+                      <a:endParaRPr lang="pl-PL" sz="1400" b="1" i="0" u="none" strike="noStrike" dirty="0">
                         <a:solidFill>
                           <a:srgbClr val="000000"/>
                         </a:solidFill>
@@ -12029,12 +12435,24 @@
                         <a:buNone/>
                       </a:pPr>
                       <a:r>
-                        <a:rPr lang="pl-PL" sz="1400" u="none" strike="noStrike">
-                          <a:effectLst/>
-                        </a:rPr>
-                        <a:t>0,5 Hz - 1 kHz</a:t>
-                      </a:r>
-                      <a:endParaRPr lang="pl-PL" sz="1400" b="0" i="0" u="none" strike="noStrike">
+                        <a:rPr lang="pl-PL" sz="1400" u="none" strike="noStrike" dirty="0">
+                          <a:effectLst/>
+                        </a:rPr>
+                        <a:t>0,5 </a:t>
+                      </a:r>
+                      <a:r>
+                        <a:rPr lang="pl-PL" sz="1400" u="none" strike="noStrike" dirty="0" err="1">
+                          <a:effectLst/>
+                        </a:rPr>
+                        <a:t>Hz</a:t>
+                      </a:r>
+                      <a:r>
+                        <a:rPr lang="pl-PL" sz="1400" u="none" strike="noStrike" dirty="0">
+                          <a:effectLst/>
+                        </a:rPr>
+                        <a:t> - 1 kHz</a:t>
+                      </a:r>
+                      <a:endParaRPr lang="pl-PL" sz="1400" b="0" i="0" u="none" strike="noStrike" dirty="0">
                         <a:solidFill>
                           <a:srgbClr val="000000"/>
                         </a:solidFill>
@@ -12054,12 +12472,30 @@
                         <a:buNone/>
                       </a:pPr>
                       <a:r>
-                        <a:rPr lang="pl-PL" sz="1400" u="none" strike="noStrike">
-                          <a:effectLst/>
-                        </a:rPr>
-                        <a:t>160 Hz - 2560 Hz</a:t>
-                      </a:r>
-                      <a:endParaRPr lang="pl-PL" sz="1400" b="0" i="0" u="none" strike="noStrike">
+                        <a:rPr lang="pl-PL" sz="1400" b="1" u="none" strike="noStrike" dirty="0">
+                          <a:effectLst/>
+                        </a:rPr>
+                        <a:t>160 </a:t>
+                      </a:r>
+                      <a:r>
+                        <a:rPr lang="pl-PL" sz="1400" b="1" u="none" strike="noStrike" dirty="0" err="1">
+                          <a:effectLst/>
+                        </a:rPr>
+                        <a:t>Hz</a:t>
+                      </a:r>
+                      <a:r>
+                        <a:rPr lang="pl-PL" sz="1400" b="1" u="none" strike="noStrike" dirty="0">
+                          <a:effectLst/>
+                        </a:rPr>
+                        <a:t> - 2560 </a:t>
+                      </a:r>
+                      <a:r>
+                        <a:rPr lang="pl-PL" sz="1400" b="1" u="none" strike="noStrike" dirty="0" err="1">
+                          <a:effectLst/>
+                        </a:rPr>
+                        <a:t>Hz</a:t>
+                      </a:r>
+                      <a:endParaRPr lang="pl-PL" sz="1400" b="1" i="0" u="none" strike="noStrike" dirty="0">
                         <a:solidFill>
                           <a:srgbClr val="000000"/>
                         </a:solidFill>

--- a/Prezentacja/Smart-piłka_prez.pptx
+++ b/Prezentacja/Smart-piłka_prez.pptx
@@ -5,7 +5,7 @@
     <p:sldMasterId id="2147483648" r:id="rId1"/>
   </p:sldMasterIdLst>
   <p:notesMasterIdLst>
-    <p:notesMasterId r:id="rId16"/>
+    <p:notesMasterId r:id="rId17"/>
   </p:notesMasterIdLst>
   <p:sldIdLst>
     <p:sldId id="256" r:id="rId2"/>
@@ -21,7 +21,8 @@
     <p:sldId id="261" r:id="rId12"/>
     <p:sldId id="266" r:id="rId13"/>
     <p:sldId id="267" r:id="rId14"/>
-    <p:sldId id="268" r:id="rId15"/>
+    <p:sldId id="271" r:id="rId15"/>
+    <p:sldId id="268" r:id="rId16"/>
   </p:sldIdLst>
   <p:sldSz cx="12192000" cy="6858000"/>
   <p:notesSz cx="6858000" cy="9144000"/>
@@ -210,7 +211,7 @@
           <a:p>
             <a:fld id="{B12759A3-CAA2-40DA-AA5E-716B696E05E3}" type="datetimeFigureOut">
               <a:rPr lang="pl-PL" smtClean="0"/>
-              <a:t>28.10.2025</a:t>
+              <a:t>29.10.2025</a:t>
             </a:fld>
             <a:endParaRPr lang="pl-PL"/>
           </a:p>
@@ -711,7 +712,7 @@
           <a:p>
             <a:fld id="{B195F02D-787D-418D-91FA-B9ACD8A789B6}" type="datetimeFigureOut">
               <a:rPr lang="pl-PL" smtClean="0"/>
-              <a:t>28.10.2025</a:t>
+              <a:t>29.10.2025</a:t>
             </a:fld>
             <a:endParaRPr lang="pl-PL"/>
           </a:p>
@@ -911,7 +912,7 @@
           <a:p>
             <a:fld id="{B195F02D-787D-418D-91FA-B9ACD8A789B6}" type="datetimeFigureOut">
               <a:rPr lang="pl-PL" smtClean="0"/>
-              <a:t>28.10.2025</a:t>
+              <a:t>29.10.2025</a:t>
             </a:fld>
             <a:endParaRPr lang="pl-PL"/>
           </a:p>
@@ -1121,7 +1122,7 @@
           <a:p>
             <a:fld id="{B195F02D-787D-418D-91FA-B9ACD8A789B6}" type="datetimeFigureOut">
               <a:rPr lang="pl-PL" smtClean="0"/>
-              <a:t>28.10.2025</a:t>
+              <a:t>29.10.2025</a:t>
             </a:fld>
             <a:endParaRPr lang="pl-PL"/>
           </a:p>
@@ -1321,7 +1322,7 @@
           <a:p>
             <a:fld id="{B195F02D-787D-418D-91FA-B9ACD8A789B6}" type="datetimeFigureOut">
               <a:rPr lang="pl-PL" smtClean="0"/>
-              <a:t>28.10.2025</a:t>
+              <a:t>29.10.2025</a:t>
             </a:fld>
             <a:endParaRPr lang="pl-PL"/>
           </a:p>
@@ -1597,7 +1598,7 @@
           <a:p>
             <a:fld id="{B195F02D-787D-418D-91FA-B9ACD8A789B6}" type="datetimeFigureOut">
               <a:rPr lang="pl-PL" smtClean="0"/>
-              <a:t>28.10.2025</a:t>
+              <a:t>29.10.2025</a:t>
             </a:fld>
             <a:endParaRPr lang="pl-PL"/>
           </a:p>
@@ -1865,7 +1866,7 @@
           <a:p>
             <a:fld id="{B195F02D-787D-418D-91FA-B9ACD8A789B6}" type="datetimeFigureOut">
               <a:rPr lang="pl-PL" smtClean="0"/>
-              <a:t>28.10.2025</a:t>
+              <a:t>29.10.2025</a:t>
             </a:fld>
             <a:endParaRPr lang="pl-PL"/>
           </a:p>
@@ -2280,7 +2281,7 @@
           <a:p>
             <a:fld id="{B195F02D-787D-418D-91FA-B9ACD8A789B6}" type="datetimeFigureOut">
               <a:rPr lang="pl-PL" smtClean="0"/>
-              <a:t>28.10.2025</a:t>
+              <a:t>29.10.2025</a:t>
             </a:fld>
             <a:endParaRPr lang="pl-PL"/>
           </a:p>
@@ -2422,7 +2423,7 @@
           <a:p>
             <a:fld id="{B195F02D-787D-418D-91FA-B9ACD8A789B6}" type="datetimeFigureOut">
               <a:rPr lang="pl-PL" smtClean="0"/>
-              <a:t>28.10.2025</a:t>
+              <a:t>29.10.2025</a:t>
             </a:fld>
             <a:endParaRPr lang="pl-PL"/>
           </a:p>
@@ -2535,7 +2536,7 @@
           <a:p>
             <a:fld id="{B195F02D-787D-418D-91FA-B9ACD8A789B6}" type="datetimeFigureOut">
               <a:rPr lang="pl-PL" smtClean="0"/>
-              <a:t>28.10.2025</a:t>
+              <a:t>29.10.2025</a:t>
             </a:fld>
             <a:endParaRPr lang="pl-PL"/>
           </a:p>
@@ -2848,7 +2849,7 @@
           <a:p>
             <a:fld id="{B195F02D-787D-418D-91FA-B9ACD8A789B6}" type="datetimeFigureOut">
               <a:rPr lang="pl-PL" smtClean="0"/>
-              <a:t>28.10.2025</a:t>
+              <a:t>29.10.2025</a:t>
             </a:fld>
             <a:endParaRPr lang="pl-PL"/>
           </a:p>
@@ -3137,7 +3138,7 @@
           <a:p>
             <a:fld id="{B195F02D-787D-418D-91FA-B9ACD8A789B6}" type="datetimeFigureOut">
               <a:rPr lang="pl-PL" smtClean="0"/>
-              <a:t>28.10.2025</a:t>
+              <a:t>29.10.2025</a:t>
             </a:fld>
             <a:endParaRPr lang="pl-PL"/>
           </a:p>
@@ -3380,7 +3381,7 @@
           <a:p>
             <a:fld id="{B195F02D-787D-418D-91FA-B9ACD8A789B6}" type="datetimeFigureOut">
               <a:rPr lang="pl-PL" smtClean="0"/>
-              <a:t>28.10.2025</a:t>
+              <a:t>29.10.2025</a:t>
             </a:fld>
             <a:endParaRPr lang="pl-PL"/>
           </a:p>
@@ -5205,12 +5206,12 @@
                         <a:buNone/>
                       </a:pPr>
                       <a:r>
-                        <a:rPr lang="pl-PL" sz="1200" u="none" strike="noStrike">
+                        <a:rPr lang="pl-PL" sz="1200" u="none" strike="noStrike" dirty="0">
                           <a:effectLst/>
                         </a:rPr>
                         <a:t>-40°C to +105°C</a:t>
                       </a:r>
-                      <a:endParaRPr lang="pl-PL" sz="1200" b="0" i="0" u="none" strike="noStrike">
+                      <a:endParaRPr lang="pl-PL" sz="1200" b="0" i="0" u="none" strike="noStrike" dirty="0">
                         <a:solidFill>
                           <a:srgbClr val="000000"/>
                         </a:solidFill>
@@ -6813,240 +6814,6 @@
           </a:extLst>
         </p:spPr>
       </p:pic>
-      <p:pic>
-        <p:nvPicPr>
-          <p:cNvPr id="9220" name="Picture 4" descr="Arduino Nano 33 BLE Sense Rev2 ze złączami - ABX00070">
-            <a:extLst>
-              <a:ext uri="{FF2B5EF4-FFF2-40B4-BE49-F238E27FC236}">
-                <a16:creationId xmlns:a16="http://schemas.microsoft.com/office/drawing/2014/main" id="{8C2D525B-A82E-40B4-1B05-403933F7D4C2}"/>
-              </a:ext>
-            </a:extLst>
-          </p:cNvPr>
-          <p:cNvPicPr>
-            <a:picLocks noChangeAspect="1" noChangeArrowheads="1"/>
-          </p:cNvPicPr>
-          <p:nvPr/>
-        </p:nvPicPr>
-        <p:blipFill>
-          <a:blip r:embed="rId3">
-            <a:extLst>
-              <a:ext uri="{28A0092B-C50C-407E-A947-70E740481C1C}">
-                <a14:useLocalDpi xmlns:a14="http://schemas.microsoft.com/office/drawing/2010/main" val="0"/>
-              </a:ext>
-            </a:extLst>
-          </a:blip>
-          <a:srcRect r="-3" b="9534"/>
-          <a:stretch>
-            <a:fillRect/>
-          </a:stretch>
-        </p:blipFill>
-        <p:spPr bwMode="auto">
-          <a:xfrm>
-            <a:off x="6019800" y="10"/>
-            <a:ext cx="6172195" cy="4187662"/>
-          </a:xfrm>
-          <a:custGeom>
-            <a:avLst/>
-            <a:gdLst/>
-            <a:ahLst/>
-            <a:cxnLst/>
-            <a:rect l="l" t="t" r="r" b="b"/>
-            <a:pathLst>
-              <a:path w="6006950" h="4187672">
-                <a:moveTo>
-                  <a:pt x="9223" y="0"/>
-                </a:moveTo>
-                <a:lnTo>
-                  <a:pt x="6006950" y="0"/>
-                </a:lnTo>
-                <a:lnTo>
-                  <a:pt x="6006950" y="4169490"/>
-                </a:lnTo>
-                <a:lnTo>
-                  <a:pt x="5787907" y="4174448"/>
-                </a:lnTo>
-                <a:cubicBezTo>
-                  <a:pt x="5713866" y="4173475"/>
-                  <a:pt x="5639861" y="4169853"/>
-                  <a:pt x="5566029" y="4163587"/>
-                </a:cubicBezTo>
-                <a:cubicBezTo>
-                  <a:pt x="5458843" y="4155595"/>
-                  <a:pt x="5350768" y="4144559"/>
-                  <a:pt x="5244343" y="4164855"/>
-                </a:cubicBezTo>
-                <a:cubicBezTo>
-                  <a:pt x="5127517" y="4187307"/>
-                  <a:pt x="5010817" y="4187434"/>
-                  <a:pt x="4892977" y="4181726"/>
-                </a:cubicBezTo>
-                <a:cubicBezTo>
-                  <a:pt x="4792260" y="4176906"/>
-                  <a:pt x="4691923" y="4151536"/>
-                  <a:pt x="4590445" y="4178301"/>
-                </a:cubicBezTo>
-                <a:cubicBezTo>
-                  <a:pt x="4580348" y="4179772"/>
-                  <a:pt x="4570061" y="4179341"/>
-                  <a:pt x="4560128" y="4177032"/>
-                </a:cubicBezTo>
-                <a:cubicBezTo>
-                  <a:pt x="4449137" y="4161684"/>
-                  <a:pt x="4337384" y="4174242"/>
-                  <a:pt x="4226013" y="4169929"/>
-                </a:cubicBezTo>
-                <a:cubicBezTo>
-                  <a:pt x="4174640" y="4167899"/>
-                  <a:pt x="4122252" y="4169041"/>
-                  <a:pt x="4071513" y="4163587"/>
-                </a:cubicBezTo>
-                <a:cubicBezTo>
-                  <a:pt x="3955067" y="4151156"/>
-                  <a:pt x="3838874" y="4144559"/>
-                  <a:pt x="3723697" y="4173861"/>
-                </a:cubicBezTo>
-                <a:cubicBezTo>
-                  <a:pt x="3690082" y="4181764"/>
-                  <a:pt x="3655732" y="4186013"/>
-                  <a:pt x="3621204" y="4186546"/>
-                </a:cubicBezTo>
-                <a:cubicBezTo>
-                  <a:pt x="3508437" y="4190605"/>
-                  <a:pt x="3396050" y="4182867"/>
-                  <a:pt x="3283664" y="4176525"/>
-                </a:cubicBezTo>
-                <a:cubicBezTo>
-                  <a:pt x="3205652" y="4172085"/>
-                  <a:pt x="3127768" y="4162445"/>
-                  <a:pt x="3049630" y="4170563"/>
-                </a:cubicBezTo>
-                <a:cubicBezTo>
-                  <a:pt x="3004218" y="4175257"/>
-                  <a:pt x="2958427" y="4175257"/>
-                  <a:pt x="2913015" y="4170563"/>
-                </a:cubicBezTo>
-                <a:cubicBezTo>
-                  <a:pt x="2829321" y="4160758"/>
-                  <a:pt x="2744879" y="4158931"/>
-                  <a:pt x="2660842" y="4165109"/>
-                </a:cubicBezTo>
-                <a:cubicBezTo>
-                  <a:pt x="2535390" y="4175891"/>
-                  <a:pt x="2410065" y="4184897"/>
-                  <a:pt x="2284232" y="4167773"/>
-                </a:cubicBezTo>
-                <a:cubicBezTo>
-                  <a:pt x="2212868" y="4156559"/>
-                  <a:pt x="2140312" y="4155240"/>
-                  <a:pt x="2068592" y="4163840"/>
-                </a:cubicBezTo>
-                <a:cubicBezTo>
-                  <a:pt x="1897729" y="4187814"/>
-                  <a:pt x="1726485" y="4180077"/>
-                  <a:pt x="1555241" y="4170183"/>
-                </a:cubicBezTo>
-                <a:cubicBezTo>
-                  <a:pt x="1440824" y="4163460"/>
-                  <a:pt x="1325901" y="4151156"/>
-                  <a:pt x="1211738" y="4167392"/>
-                </a:cubicBezTo>
-                <a:cubicBezTo>
-                  <a:pt x="1066118" y="4187688"/>
-                  <a:pt x="920370" y="4180965"/>
-                  <a:pt x="774368" y="4175003"/>
-                </a:cubicBezTo>
-                <a:cubicBezTo>
-                  <a:pt x="667182" y="4170563"/>
-                  <a:pt x="559869" y="4157117"/>
-                  <a:pt x="452430" y="4173734"/>
-                </a:cubicBezTo>
-                <a:cubicBezTo>
-                  <a:pt x="441369" y="4175244"/>
-                  <a:pt x="430117" y="4174115"/>
-                  <a:pt x="419576" y="4170436"/>
-                </a:cubicBezTo>
-                <a:cubicBezTo>
-                  <a:pt x="378807" y="4157016"/>
-                  <a:pt x="335096" y="4155215"/>
-                  <a:pt x="293363" y="4165236"/>
-                </a:cubicBezTo>
-                <a:cubicBezTo>
-                  <a:pt x="216367" y="4182106"/>
-                  <a:pt x="139497" y="4189463"/>
-                  <a:pt x="61105" y="4174115"/>
-                </a:cubicBezTo>
-                <a:lnTo>
-                  <a:pt x="13323" y="4171265"/>
-                </a:lnTo>
-                <a:lnTo>
-                  <a:pt x="28554" y="3843045"/>
-                </a:lnTo>
-                <a:cubicBezTo>
-                  <a:pt x="30457" y="3722610"/>
-                  <a:pt x="27412" y="3602256"/>
-                  <a:pt x="15626" y="3482187"/>
-                </a:cubicBezTo>
-                <a:cubicBezTo>
-                  <a:pt x="-847" y="3335690"/>
-                  <a:pt x="-4304" y="3188124"/>
-                  <a:pt x="5296" y="3041068"/>
-                </a:cubicBezTo>
-                <a:cubicBezTo>
-                  <a:pt x="11786" y="2956911"/>
-                  <a:pt x="18539" y="2872754"/>
-                  <a:pt x="22776" y="2788472"/>
-                </a:cubicBezTo>
-                <a:cubicBezTo>
-                  <a:pt x="28180" y="2668580"/>
-                  <a:pt x="25173" y="2548474"/>
-                  <a:pt x="13771" y="2428964"/>
-                </a:cubicBezTo>
-                <a:cubicBezTo>
-                  <a:pt x="4237" y="2337829"/>
-                  <a:pt x="3177" y="2246070"/>
-                  <a:pt x="10593" y="2154757"/>
-                </a:cubicBezTo>
-                <a:cubicBezTo>
-                  <a:pt x="25690" y="1999286"/>
-                  <a:pt x="9931" y="1843813"/>
-                  <a:pt x="5032" y="1688466"/>
-                </a:cubicBezTo>
-                <a:cubicBezTo>
-                  <a:pt x="-3577" y="1402691"/>
-                  <a:pt x="20393" y="1117045"/>
-                  <a:pt x="9666" y="831270"/>
-                </a:cubicBezTo>
-                <a:cubicBezTo>
-                  <a:pt x="3841" y="689908"/>
-                  <a:pt x="16420" y="548673"/>
-                  <a:pt x="9666" y="407311"/>
-                </a:cubicBezTo>
-                <a:cubicBezTo>
-                  <a:pt x="4105" y="306755"/>
-                  <a:pt x="397" y="206200"/>
-                  <a:pt x="4105" y="105518"/>
-                </a:cubicBezTo>
-                <a:cubicBezTo>
-                  <a:pt x="5164" y="78059"/>
-                  <a:pt x="5826" y="50473"/>
-                  <a:pt x="9534" y="23396"/>
-                </a:cubicBezTo>
-                <a:close/>
-              </a:path>
-            </a:pathLst>
-          </a:custGeom>
-          <a:noFill/>
-          <a:extLst>
-            <a:ext uri="{909E8E84-426E-40DD-AFC4-6F175D3DCCD1}">
-              <a14:hiddenFill xmlns:a14="http://schemas.microsoft.com/office/drawing/2010/main">
-                <a:solidFill>
-                  <a:srgbClr val="FFFFFF"/>
-                </a:solidFill>
-              </a14:hiddenFill>
-            </a:ext>
-          </a:extLst>
-        </p:spPr>
-      </p:pic>
       <p:sp>
         <p:nvSpPr>
           <p:cNvPr id="9227" name="sketch line">
@@ -7334,6 +7101,53 @@
           </a:p>
         </p:txBody>
       </p:sp>
+      <p:pic>
+        <p:nvPicPr>
+          <p:cNvPr id="3074" name="Picture 2" descr="Wireless STM32WBA microcontrollers supporting Bluetooth Low Energy 5.4  connectivity - STMicroelectronics">
+            <a:extLst>
+              <a:ext uri="{FF2B5EF4-FFF2-40B4-BE49-F238E27FC236}">
+                <a16:creationId xmlns:a16="http://schemas.microsoft.com/office/drawing/2014/main" id="{2B0116A0-754F-7CE1-AF6F-FD5EA689DB8C}"/>
+              </a:ext>
+            </a:extLst>
+          </p:cNvPr>
+          <p:cNvPicPr>
+            <a:picLocks noChangeAspect="1" noChangeArrowheads="1"/>
+          </p:cNvPicPr>
+          <p:nvPr/>
+        </p:nvPicPr>
+        <p:blipFill>
+          <a:blip r:embed="rId3">
+            <a:extLst>
+              <a:ext uri="{28A0092B-C50C-407E-A947-70E740481C1C}">
+                <a14:useLocalDpi xmlns:a14="http://schemas.microsoft.com/office/drawing/2010/main" val="0"/>
+              </a:ext>
+            </a:extLst>
+          </a:blip>
+          <a:srcRect/>
+          <a:stretch>
+            <a:fillRect/>
+          </a:stretch>
+        </p:blipFill>
+        <p:spPr bwMode="auto">
+          <a:xfrm>
+            <a:off x="5581649" y="0"/>
+            <a:ext cx="6610351" cy="4250776"/>
+          </a:xfrm>
+          <a:prstGeom prst="rect">
+            <a:avLst/>
+          </a:prstGeom>
+          <a:noFill/>
+          <a:extLst>
+            <a:ext uri="{909E8E84-426E-40DD-AFC4-6F175D3DCCD1}">
+              <a14:hiddenFill xmlns:a14="http://schemas.microsoft.com/office/drawing/2010/main">
+                <a:solidFill>
+                  <a:srgbClr val="FFFFFF"/>
+                </a:solidFill>
+              </a14:hiddenFill>
+            </a:ext>
+          </a:extLst>
+        </p:spPr>
+      </p:pic>
     </p:spTree>
     <p:extLst>
       <p:ext uri="{BB962C8B-B14F-4D97-AF65-F5344CB8AC3E}">
@@ -7729,14 +7543,14 @@
             <p:ph idx="1"/>
             <p:extLst>
               <p:ext uri="{D42A27DB-BD31-4B8C-83A1-F6EECF244321}">
-                <p14:modId xmlns:p14="http://schemas.microsoft.com/office/powerpoint/2010/main" val="3807545888"/>
+                <p14:modId xmlns:p14="http://schemas.microsoft.com/office/powerpoint/2010/main" val="2140955532"/>
               </p:ext>
             </p:extLst>
           </p:nvPr>
         </p:nvGraphicFramePr>
         <p:xfrm>
           <a:off x="1187918" y="2112579"/>
-          <a:ext cx="9840105" cy="4192806"/>
+          <a:ext cx="9840105" cy="4063991"/>
         </p:xfrm>
         <a:graphic>
           <a:graphicData uri="http://schemas.openxmlformats.org/drawingml/2006/table">
@@ -7767,7 +7581,7 @@
                   </a:extLst>
                 </a:gridCol>
               </a:tblGrid>
-              <a:tr h="283463">
+              <a:tr h="331831">
                 <a:tc>
                   <a:txBody>
                     <a:bodyPr/>
@@ -7802,24 +7616,29 @@
                         <a:buNone/>
                       </a:pPr>
                       <a:r>
-                        <a:rPr lang="pl-PL" sz="1500" b="1" u="none" strike="noStrike" dirty="0" err="1">
-                          <a:effectLst/>
+                        <a:rPr lang="pl-PL" sz="1800" b="0" i="0" kern="1200" dirty="0" err="1">
+                          <a:solidFill>
+                            <a:schemeClr val="dk1"/>
+                          </a:solidFill>
+                          <a:effectLst/>
+                          <a:latin typeface="+mn-lt"/>
+                          <a:ea typeface="+mn-ea"/>
+                          <a:cs typeface="+mn-cs"/>
                         </a:rPr>
                         <a:t>Esp</a:t>
                       </a:r>
                       <a:r>
-                        <a:rPr lang="pl-PL" sz="1500" b="1" u="none" strike="noStrike" dirty="0">
-                          <a:effectLst/>
+                        <a:rPr lang="pl-PL" sz="1800" b="0" i="0" kern="1200" dirty="0">
+                          <a:solidFill>
+                            <a:schemeClr val="dk1"/>
+                          </a:solidFill>
+                          <a:effectLst/>
+                          <a:latin typeface="+mn-lt"/>
+                          <a:ea typeface="+mn-ea"/>
+                          <a:cs typeface="+mn-cs"/>
                         </a:rPr>
                         <a:t> 32-WROOM-32EU</a:t>
                       </a:r>
-                      <a:endParaRPr lang="pl-PL" sz="1500" b="1" i="0" u="none" strike="noStrike" dirty="0">
-                        <a:solidFill>
-                          <a:srgbClr val="000000"/>
-                        </a:solidFill>
-                        <a:effectLst/>
-                        <a:latin typeface="Aptos Narrow" panose="020B0004020202020204" pitchFamily="34" charset="0"/>
-                      </a:endParaRPr>
                     </a:p>
                   </a:txBody>
                   <a:tcPr marL="10197" marR="10197" marT="10197" marB="0" anchor="b"/>
@@ -7829,22 +7648,18 @@
                     <a:bodyPr/>
                     <a:lstStyle/>
                     <a:p>
-                      <a:pPr algn="l" fontAlgn="b">
-                        <a:buNone/>
-                      </a:pPr>
-                      <a:r>
-                        <a:rPr lang="pl-PL" sz="1500" u="none" strike="noStrike">
-                          <a:effectLst/>
-                        </a:rPr>
-                        <a:t>Nano 33 BLE Rev2*</a:t>
-                      </a:r>
-                      <a:endParaRPr lang="pl-PL" sz="1500" b="0" i="0" u="none" strike="noStrike">
-                        <a:solidFill>
-                          <a:srgbClr val="000000"/>
-                        </a:solidFill>
-                        <a:effectLst/>
-                        <a:latin typeface="Aptos Narrow" panose="020B0004020202020204" pitchFamily="34" charset="0"/>
-                      </a:endParaRPr>
+                      <a:r>
+                        <a:rPr lang="pl-PL" sz="1800" b="1" i="0" kern="1200" dirty="0">
+                          <a:solidFill>
+                            <a:schemeClr val="dk1"/>
+                          </a:solidFill>
+                          <a:effectLst/>
+                          <a:latin typeface="+mn-lt"/>
+                          <a:ea typeface="+mn-ea"/>
+                          <a:cs typeface="+mn-cs"/>
+                        </a:rPr>
+                        <a:t>STM32WBA55CG</a:t>
+                      </a:r>
                     </a:p>
                   </a:txBody>
                   <a:tcPr marL="10197" marR="10197" marT="10197" marB="0" anchor="b"/>
@@ -7855,7 +7670,7 @@
                   </a:ext>
                 </a:extLst>
               </a:tr>
-              <a:tr h="507787">
+              <a:tr h="545123">
                 <a:tc>
                   <a:txBody>
                     <a:bodyPr/>
@@ -7939,18 +7754,29 @@
                         <a:buNone/>
                       </a:pPr>
                       <a:r>
-                        <a:rPr lang="pl-PL" sz="1500" u="none" strike="noStrike">
-                          <a:effectLst/>
-                        </a:rPr>
-                        <a:t>Arm® Cortex®-M4F (z FPU)</a:t>
-                      </a:r>
-                      <a:endParaRPr lang="pl-PL" sz="1500" b="0" i="0" u="none" strike="noStrike">
-                        <a:solidFill>
-                          <a:srgbClr val="000000"/>
-                        </a:solidFill>
-                        <a:effectLst/>
-                        <a:latin typeface="Aptos Narrow" panose="020B0004020202020204" pitchFamily="34" charset="0"/>
-                      </a:endParaRPr>
+                        <a:rPr lang="pl-PL" sz="1500" u="none" strike="noStrike" kern="1200" dirty="0" err="1">
+                          <a:solidFill>
+                            <a:schemeClr val="dk1"/>
+                          </a:solidFill>
+                          <a:effectLst/>
+                          <a:latin typeface="+mn-lt"/>
+                          <a:ea typeface="+mn-ea"/>
+                          <a:cs typeface="+mn-cs"/>
+                        </a:rPr>
+                        <a:t>Arm</a:t>
+                      </a:r>
+                      <a:r>
+                        <a:rPr lang="pl-PL" sz="1500" u="none" strike="noStrike" kern="1200" dirty="0">
+                          <a:solidFill>
+                            <a:schemeClr val="dk1"/>
+                          </a:solidFill>
+                          <a:effectLst/>
+                          <a:latin typeface="+mn-lt"/>
+                          <a:ea typeface="+mn-ea"/>
+                          <a:cs typeface="+mn-cs"/>
+                        </a:rPr>
+                        <a:t> Cortex-M33</a:t>
+                      </a:r>
                     </a:p>
                   </a:txBody>
                   <a:tcPr marL="10197" marR="10197" marT="10197" marB="0" anchor="b"/>
@@ -7961,7 +7787,7 @@
                   </a:ext>
                 </a:extLst>
               </a:tr>
-              <a:tr h="283463">
+              <a:tr h="293300">
                 <a:tc>
                   <a:txBody>
                     <a:bodyPr/>
@@ -8021,12 +7847,12 @@
                         <a:buNone/>
                       </a:pPr>
                       <a:r>
-                        <a:rPr lang="pl-PL" sz="1500" u="none" strike="noStrike">
-                          <a:effectLst/>
-                        </a:rPr>
-                        <a:t>64 MHz</a:t>
-                      </a:r>
-                      <a:endParaRPr lang="pl-PL" sz="1500" b="0" i="0" u="none" strike="noStrike">
+                        <a:rPr lang="pl-PL" sz="1500" u="none" strike="noStrike" dirty="0">
+                          <a:effectLst/>
+                        </a:rPr>
+                        <a:t>100 MHz</a:t>
+                      </a:r>
+                      <a:endParaRPr lang="pl-PL" sz="1500" b="0" i="0" u="none" strike="noStrike" dirty="0">
                         <a:solidFill>
                           <a:srgbClr val="000000"/>
                         </a:solidFill>
@@ -8043,7 +7869,7 @@
                   </a:ext>
                 </a:extLst>
               </a:tr>
-              <a:tr h="283463">
+              <a:tr h="293300">
                 <a:tc>
                   <a:txBody>
                     <a:bodyPr/>
@@ -8081,7 +7907,7 @@
                         <a:rPr lang="pl-PL" sz="1500" u="none" strike="noStrike" dirty="0">
                           <a:effectLst/>
                         </a:rPr>
-                        <a:t>4 - 16 MB</a:t>
+                        <a:t>4</a:t>
                       </a:r>
                       <a:endParaRPr lang="pl-PL" sz="1500" b="0" i="0" u="none" strike="noStrike" dirty="0">
                         <a:solidFill>
@@ -8103,12 +7929,12 @@
                         <a:buNone/>
                       </a:pPr>
                       <a:r>
-                        <a:rPr lang="pl-PL" sz="1500" u="none" strike="noStrike">
+                        <a:rPr lang="pl-PL" sz="1500" u="none" strike="noStrike" dirty="0">
                           <a:effectLst/>
                         </a:rPr>
                         <a:t>1 MB</a:t>
                       </a:r>
-                      <a:endParaRPr lang="pl-PL" sz="1500" b="0" i="0" u="none" strike="noStrike">
+                      <a:endParaRPr lang="pl-PL" sz="1500" b="0" i="0" u="none" strike="noStrike" dirty="0">
                         <a:solidFill>
                           <a:srgbClr val="000000"/>
                         </a:solidFill>
@@ -8125,7 +7951,7 @@
                   </a:ext>
                 </a:extLst>
               </a:tr>
-              <a:tr h="283463">
+              <a:tr h="293300">
                 <a:tc>
                   <a:txBody>
                     <a:bodyPr/>
@@ -8219,7 +8045,7 @@
                   </a:ext>
                 </a:extLst>
               </a:tr>
-              <a:tr h="283463">
+              <a:tr h="293300">
                 <a:tc gridSpan="3">
                   <a:txBody>
                     <a:bodyPr/>
@@ -8271,7 +8097,7 @@
                   </a:ext>
                 </a:extLst>
               </a:tr>
-              <a:tr h="283463">
+              <a:tr h="293300">
                 <a:tc>
                   <a:txBody>
                     <a:bodyPr/>
@@ -8353,7 +8179,7 @@
                   </a:ext>
                 </a:extLst>
               </a:tr>
-              <a:tr h="283463">
+              <a:tr h="293300">
                 <a:tc>
                   <a:txBody>
                     <a:bodyPr/>
@@ -8425,12 +8251,12 @@
                         <a:buNone/>
                       </a:pPr>
                       <a:r>
-                        <a:rPr lang="pl-PL" sz="1500" u="none" strike="noStrike">
-                          <a:effectLst/>
-                        </a:rPr>
-                        <a:t>Bluetooth 5</a:t>
-                      </a:r>
-                      <a:endParaRPr lang="pl-PL" sz="1500" b="0" i="0" u="none" strike="noStrike">
+                        <a:rPr lang="pl-PL" sz="1500" u="none" strike="noStrike" dirty="0">
+                          <a:effectLst/>
+                        </a:rPr>
+                        <a:t>Bluetooth LE 6.0</a:t>
+                      </a:r>
+                      <a:endParaRPr lang="pl-PL" sz="1500" b="0" i="0" u="none" strike="noStrike" dirty="0">
                         <a:solidFill>
                           <a:srgbClr val="000000"/>
                         </a:solidFill>
@@ -8447,7 +8273,7 @@
                   </a:ext>
                 </a:extLst>
               </a:tr>
-              <a:tr h="283463">
+              <a:tr h="293300">
                 <a:tc>
                   <a:txBody>
                     <a:bodyPr/>
@@ -8478,7 +8304,7 @@
                     <a:bodyPr/>
                     <a:lstStyle/>
                     <a:p>
-                      <a:pPr algn="r" fontAlgn="b">
+                      <a:pPr algn="l" fontAlgn="b">
                         <a:buNone/>
                       </a:pPr>
                       <a:r>
@@ -8507,12 +8333,12 @@
                         <a:buNone/>
                       </a:pPr>
                       <a:r>
-                        <a:rPr lang="pl-PL" sz="1500" u="none" strike="noStrike">
-                          <a:effectLst/>
-                        </a:rPr>
-                        <a:t> </a:t>
-                      </a:r>
-                      <a:endParaRPr lang="pl-PL" sz="1500" b="0" i="0" u="none" strike="noStrike">
+                        <a:rPr lang="pl-PL" sz="1500" u="none" strike="noStrike" dirty="0">
+                          <a:effectLst/>
+                        </a:rPr>
+                        <a:t> 35</a:t>
+                      </a:r>
+                      <a:endParaRPr lang="pl-PL" sz="1500" b="0" i="0" u="none" strike="noStrike" dirty="0">
                         <a:solidFill>
                           <a:srgbClr val="000000"/>
                         </a:solidFill>
@@ -8529,7 +8355,7 @@
                   </a:ext>
                 </a:extLst>
               </a:tr>
-              <a:tr h="283463">
+              <a:tr h="293300">
                 <a:tc>
                   <a:txBody>
                     <a:bodyPr/>
@@ -8564,12 +8390,12 @@
                         <a:buNone/>
                       </a:pPr>
                       <a:r>
-                        <a:rPr lang="pl-PL" sz="1500" u="none" strike="noStrike">
+                        <a:rPr lang="pl-PL" sz="1500" u="none" strike="noStrike" dirty="0">
                           <a:effectLst/>
                         </a:rPr>
                         <a:t>3x UART, 3x SPI, 2x I2C (2x I2S)</a:t>
                       </a:r>
-                      <a:endParaRPr lang="pl-PL" sz="1500" b="0" i="0" u="none" strike="noStrike">
+                      <a:endParaRPr lang="pl-PL" sz="1500" b="0" i="0" u="none" strike="noStrike" dirty="0">
                         <a:solidFill>
                           <a:srgbClr val="000000"/>
                         </a:solidFill>
@@ -8589,12 +8415,12 @@
                         <a:buNone/>
                       </a:pPr>
                       <a:r>
-                        <a:rPr lang="pl-PL" sz="1500" u="none" strike="noStrike">
-                          <a:effectLst/>
-                        </a:rPr>
-                        <a:t>QSPI/SPI/TWI/I²S/PDM/QDEC/I2C</a:t>
-                      </a:r>
-                      <a:endParaRPr lang="pl-PL" sz="1500" b="0" i="0" u="none" strike="noStrike">
+                        <a:rPr lang="pl-PL" sz="1500" u="none" strike="noStrike" dirty="0">
+                          <a:effectLst/>
+                        </a:rPr>
+                        <a:t>2x SPI/I²S/SAI/3x UART//2x I2C</a:t>
+                      </a:r>
+                      <a:endParaRPr lang="pl-PL" sz="1500" b="0" i="0" u="none" strike="noStrike" dirty="0">
                         <a:solidFill>
                           <a:srgbClr val="000000"/>
                         </a:solidFill>
@@ -8611,7 +8437,7 @@
                   </a:ext>
                 </a:extLst>
               </a:tr>
-              <a:tr h="283463">
+              <a:tr h="293300">
                 <a:tc gridSpan="3">
                   <a:txBody>
                     <a:bodyPr/>
@@ -8621,18 +8447,15 @@
                         <a:buNone/>
                       </a:pPr>
                       <a:r>
-                        <a:rPr lang="pl-PL" sz="1500" u="none" strike="noStrike" dirty="0">
-                          <a:effectLst/>
-                        </a:rPr>
-                        <a:t>Dodatkowe elementy</a:t>
-                      </a:r>
-                      <a:endParaRPr lang="pl-PL" sz="1500" b="0" i="0" u="none" strike="noStrike" dirty="0">
-                        <a:solidFill>
-                          <a:srgbClr val="000000"/>
-                        </a:solidFill>
-                        <a:effectLst/>
-                        <a:latin typeface="Aptos Narrow" panose="020B0004020202020204" pitchFamily="34" charset="0"/>
-                      </a:endParaRPr>
+                        <a:rPr lang="pl-PL" sz="1500" b="0" i="0" u="none" strike="noStrike" dirty="0">
+                          <a:solidFill>
+                            <a:srgbClr val="000000"/>
+                          </a:solidFill>
+                          <a:effectLst/>
+                          <a:latin typeface="Aptos Narrow" panose="020B0004020202020204" pitchFamily="34" charset="0"/>
+                        </a:rPr>
+                        <a:t>Zużycie energii</a:t>
+                      </a:r>
                     </a:p>
                   </a:txBody>
                   <a:tcPr marL="10197" marR="10197" marT="10197" marB="0" anchor="b"/>
@@ -8663,7 +8486,7 @@
                   </a:ext>
                 </a:extLst>
               </a:tr>
-              <a:tr h="283463">
+              <a:tr h="293300">
                 <a:tc>
                   <a:txBody>
                     <a:bodyPr/>
@@ -8673,18 +8496,48 @@
                         <a:buNone/>
                       </a:pPr>
                       <a:r>
-                        <a:rPr lang="pl-PL" sz="1500" u="none" strike="noStrike">
+                        <a:rPr lang="pl-PL" sz="1500" u="none" strike="noStrike" dirty="0">
+                          <a:effectLst/>
+                        </a:rPr>
+                        <a:t> Niski pobór mocy</a:t>
+                      </a:r>
+                      <a:endParaRPr lang="pl-PL" sz="1500" b="0" i="0" u="none" strike="noStrike" dirty="0">
+                        <a:solidFill>
+                          <a:srgbClr val="000000"/>
+                        </a:solidFill>
+                        <a:effectLst/>
+                        <a:latin typeface="Aptos Narrow" panose="020B0004020202020204" pitchFamily="34" charset="0"/>
+                      </a:endParaRPr>
+                    </a:p>
+                  </a:txBody>
+                  <a:tcPr marL="10197" marR="10197" marT="10197" marB="0" anchor="b"/>
+                </a:tc>
+                <a:tc>
+                  <a:txBody>
+                    <a:bodyPr/>
+                    <a:lstStyle/>
+                    <a:p>
+                      <a:pPr algn="l" fontAlgn="b">
+                        <a:buNone/>
+                      </a:pPr>
+                      <a:r>
+                        <a:rPr lang="pl-PL" sz="1500" u="none" strike="noStrike" dirty="0">
                           <a:effectLst/>
                         </a:rPr>
                         <a:t> </a:t>
                       </a:r>
-                      <a:endParaRPr lang="pl-PL" sz="1500" b="0" i="0" u="none" strike="noStrike">
-                        <a:solidFill>
-                          <a:srgbClr val="000000"/>
-                        </a:solidFill>
-                        <a:effectLst/>
-                        <a:latin typeface="Aptos Narrow" panose="020B0004020202020204" pitchFamily="34" charset="0"/>
-                      </a:endParaRPr>
+                      <a:r>
+                        <a:rPr lang="pl-PL" sz="1500" u="none" strike="noStrike" kern="1200" dirty="0">
+                          <a:solidFill>
+                            <a:schemeClr val="dk1"/>
+                          </a:solidFill>
+                          <a:effectLst/>
+                          <a:latin typeface="+mn-lt"/>
+                          <a:ea typeface="+mn-ea"/>
+                          <a:cs typeface="+mn-cs"/>
+                        </a:rPr>
+                        <a:t>5 µA</a:t>
+                      </a:r>
                     </a:p>
                   </a:txBody>
                   <a:tcPr marL="10197" marR="10197" marT="10197" marB="0" anchor="b"/>
@@ -8694,53 +8547,21 @@
                     <a:bodyPr/>
                     <a:lstStyle/>
                     <a:p>
-                      <a:pPr algn="l" fontAlgn="b">
-                        <a:buNone/>
-                      </a:pPr>
-                      <a:r>
-                        <a:rPr lang="pl-PL" sz="1500" u="none" strike="noStrike" dirty="0">
-                          <a:effectLst/>
-                        </a:rPr>
-                        <a:t> </a:t>
-                      </a:r>
-                      <a:endParaRPr lang="pl-PL" sz="1500" b="0" i="0" u="none" strike="noStrike" dirty="0">
-                        <a:solidFill>
-                          <a:srgbClr val="000000"/>
-                        </a:solidFill>
-                        <a:effectLst/>
-                        <a:latin typeface="Aptos Narrow" panose="020B0004020202020204" pitchFamily="34" charset="0"/>
-                      </a:endParaRPr>
-                    </a:p>
-                  </a:txBody>
-                  <a:tcPr marL="10197" marR="10197" marT="10197" marB="0" anchor="b"/>
-                </a:tc>
-                <a:tc>
-                  <a:txBody>
-                    <a:bodyPr/>
-                    <a:lstStyle/>
-                    <a:p>
-                      <a:pPr algn="l" fontAlgn="b">
-                        <a:buNone/>
-                      </a:pPr>
-                      <a:r>
-                        <a:rPr lang="pl-PL" sz="1500" u="none" strike="noStrike" dirty="0" err="1">
-                          <a:effectLst/>
-                        </a:rPr>
-                        <a:t>Akcelererometr</a:t>
-                      </a:r>
-                      <a:r>
-                        <a:rPr lang="pl-PL" sz="1500" u="none" strike="noStrike" dirty="0">
-                          <a:effectLst/>
-                        </a:rPr>
-                        <a:t> - do 16g</a:t>
-                      </a:r>
-                      <a:endParaRPr lang="pl-PL" sz="1500" b="0" i="0" u="none" strike="noStrike" dirty="0">
-                        <a:solidFill>
-                          <a:srgbClr val="000000"/>
-                        </a:solidFill>
-                        <a:effectLst/>
-                        <a:latin typeface="Aptos Narrow" panose="020B0004020202020204" pitchFamily="34" charset="0"/>
-                      </a:endParaRPr>
+                      <a:pPr marL="0" algn="l" defTabSz="914400" rtl="0" eaLnBrk="1" fontAlgn="b" latinLnBrk="0" hangingPunct="1">
+                        <a:buNone/>
+                      </a:pPr>
+                      <a:r>
+                        <a:rPr lang="pl-PL" sz="1500" u="none" strike="noStrike" kern="1200" dirty="0">
+                          <a:solidFill>
+                            <a:schemeClr val="dk1"/>
+                          </a:solidFill>
+                          <a:effectLst/>
+                          <a:latin typeface="+mn-lt"/>
+                          <a:ea typeface="+mn-ea"/>
+                          <a:cs typeface="+mn-cs"/>
+                        </a:rPr>
+                        <a:t>Do 0.9 µA</a:t>
+                      </a:r>
                     </a:p>
                   </a:txBody>
                   <a:tcPr marL="10197" marR="10197" marT="10197" marB="0" anchor="b"/>
@@ -8751,7 +8572,7 @@
                   </a:ext>
                 </a:extLst>
               </a:tr>
-              <a:tr h="283463">
+              <a:tr h="0">
                 <a:tc>
                   <a:txBody>
                     <a:bodyPr/>
@@ -8761,17 +8582,72 @@
                         <a:buNone/>
                       </a:pPr>
                       <a:r>
-                        <a:rPr lang="pl-PL" sz="1500" u="none" strike="noStrike">
+                        <a:rPr lang="pl-PL" sz="1500" u="none" strike="noStrike" dirty="0">
+                          <a:effectLst/>
+                        </a:rPr>
+                        <a:t> Aktywna praca</a:t>
+                      </a:r>
+                      <a:endParaRPr lang="pl-PL" sz="1500" b="0" i="0" u="none" strike="noStrike" dirty="0">
+                        <a:solidFill>
+                          <a:srgbClr val="000000"/>
+                        </a:solidFill>
+                        <a:effectLst/>
+                        <a:latin typeface="Aptos Narrow" panose="020B0004020202020204" pitchFamily="34" charset="0"/>
+                      </a:endParaRPr>
+                    </a:p>
+                  </a:txBody>
+                  <a:tcPr marL="10197" marR="10197" marT="10197" marB="0" anchor="b"/>
+                </a:tc>
+                <a:tc>
+                  <a:txBody>
+                    <a:bodyPr/>
+                    <a:lstStyle/>
+                    <a:p>
+                      <a:pPr algn="l" fontAlgn="b">
+                        <a:buNone/>
+                      </a:pPr>
+                      <a:r>
+                        <a:rPr lang="pl-PL" sz="1500" u="none" strike="noStrike" dirty="0">
                           <a:effectLst/>
                         </a:rPr>
                         <a:t> </a:t>
                       </a:r>
-                      <a:endParaRPr lang="pl-PL" sz="1500" b="0" i="0" u="none" strike="noStrike">
-                        <a:solidFill>
-                          <a:srgbClr val="000000"/>
-                        </a:solidFill>
-                        <a:effectLst/>
-                        <a:latin typeface="Aptos Narrow" panose="020B0004020202020204" pitchFamily="34" charset="0"/>
+                      <a:r>
+                        <a:rPr lang="pl-PL" sz="1600" dirty="0"/>
+                        <a:t>20</a:t>
+                      </a:r>
+                      <a:r>
+                        <a:rPr lang="pl-PL" sz="1500" u="none" strike="noStrike" kern="1200" dirty="0">
+                          <a:solidFill>
+                            <a:schemeClr val="dk1"/>
+                          </a:solidFill>
+                          <a:effectLst/>
+                          <a:latin typeface="+mn-lt"/>
+                          <a:ea typeface="+mn-ea"/>
+                          <a:cs typeface="+mn-cs"/>
+                        </a:rPr>
+                        <a:t> </a:t>
+                      </a:r>
+                      <a:r>
+                        <a:rPr lang="pl-PL" sz="1500" u="none" strike="noStrike" kern="1200" dirty="0" err="1">
+                          <a:solidFill>
+                            <a:schemeClr val="dk1"/>
+                          </a:solidFill>
+                          <a:effectLst/>
+                          <a:latin typeface="+mn-lt"/>
+                          <a:ea typeface="+mn-ea"/>
+                          <a:cs typeface="+mn-cs"/>
+                        </a:rPr>
+                        <a:t>mA</a:t>
+                      </a:r>
+                      <a:endParaRPr lang="pl-PL" sz="1500" u="none" strike="noStrike" kern="1200" dirty="0">
+                        <a:solidFill>
+                          <a:schemeClr val="dk1"/>
+                        </a:solidFill>
+                        <a:effectLst/>
+                        <a:latin typeface="+mn-lt"/>
+                        <a:ea typeface="+mn-ea"/>
+                        <a:cs typeface="+mn-cs"/>
                       </a:endParaRPr>
                     </a:p>
                   </a:txBody>
@@ -8786,42 +8662,29 @@
                         <a:buNone/>
                       </a:pPr>
                       <a:r>
-                        <a:rPr lang="pl-PL" sz="1500" u="none" strike="noStrike" dirty="0">
-                          <a:effectLst/>
-                        </a:rPr>
-                        <a:t> </a:t>
-                      </a:r>
-                      <a:endParaRPr lang="pl-PL" sz="1500" b="0" i="0" u="none" strike="noStrike" dirty="0">
-                        <a:solidFill>
-                          <a:srgbClr val="000000"/>
-                        </a:solidFill>
-                        <a:effectLst/>
-                        <a:latin typeface="Aptos Narrow" panose="020B0004020202020204" pitchFamily="34" charset="0"/>
-                      </a:endParaRPr>
-                    </a:p>
-                  </a:txBody>
-                  <a:tcPr marL="10197" marR="10197" marT="10197" marB="0" anchor="b"/>
-                </a:tc>
-                <a:tc>
-                  <a:txBody>
-                    <a:bodyPr/>
-                    <a:lstStyle/>
-                    <a:p>
-                      <a:pPr algn="l" fontAlgn="b">
-                        <a:buNone/>
-                      </a:pPr>
-                      <a:r>
-                        <a:rPr lang="pl-PL" sz="1500" u="none" strike="noStrike">
-                          <a:effectLst/>
-                        </a:rPr>
-                        <a:t>Żyroskop - 2000 dps</a:t>
-                      </a:r>
-                      <a:endParaRPr lang="pl-PL" sz="1500" b="0" i="0" u="none" strike="noStrike">
-                        <a:solidFill>
-                          <a:srgbClr val="000000"/>
-                        </a:solidFill>
-                        <a:effectLst/>
-                        <a:latin typeface="Aptos Narrow" panose="020B0004020202020204" pitchFamily="34" charset="0"/>
+                        <a:rPr lang="pl-PL" sz="1600" dirty="0"/>
+                        <a:t>3,5 </a:t>
+                      </a:r>
+                      <a:r>
+                        <a:rPr lang="pl-PL" sz="1500" u="none" strike="noStrike" kern="1200" dirty="0" err="1">
+                          <a:solidFill>
+                            <a:schemeClr val="dk1"/>
+                          </a:solidFill>
+                          <a:effectLst/>
+                          <a:latin typeface="+mn-lt"/>
+                          <a:ea typeface="+mn-ea"/>
+                          <a:cs typeface="+mn-cs"/>
+                        </a:rPr>
+                        <a:t>mA</a:t>
+                      </a:r>
+                      <a:endParaRPr lang="pl-PL" sz="1500" u="none" strike="noStrike" kern="1200" dirty="0">
+                        <a:solidFill>
+                          <a:schemeClr val="dk1"/>
+                        </a:solidFill>
+                        <a:effectLst/>
+                        <a:latin typeface="+mn-lt"/>
+                        <a:ea typeface="+mn-ea"/>
+                        <a:cs typeface="+mn-cs"/>
                       </a:endParaRPr>
                     </a:p>
                   </a:txBody>
@@ -8830,88 +8693,6 @@
                 <a:extLst>
                   <a:ext uri="{0D108BD9-81ED-4DB2-BD59-A6C34878D82A}">
                     <a16:rowId xmlns:a16="http://schemas.microsoft.com/office/drawing/2014/main" val="2541030412"/>
-                  </a:ext>
-                </a:extLst>
-              </a:tr>
-              <a:tr h="283463">
-                <a:tc>
-                  <a:txBody>
-                    <a:bodyPr/>
-                    <a:lstStyle/>
-                    <a:p>
-                      <a:pPr algn="l" fontAlgn="b">
-                        <a:buNone/>
-                      </a:pPr>
-                      <a:r>
-                        <a:rPr lang="pl-PL" sz="1500" u="none" strike="noStrike">
-                          <a:effectLst/>
-                        </a:rPr>
-                        <a:t> </a:t>
-                      </a:r>
-                      <a:endParaRPr lang="pl-PL" sz="1500" b="0" i="0" u="none" strike="noStrike">
-                        <a:solidFill>
-                          <a:srgbClr val="000000"/>
-                        </a:solidFill>
-                        <a:effectLst/>
-                        <a:latin typeface="Aptos Narrow" panose="020B0004020202020204" pitchFamily="34" charset="0"/>
-                      </a:endParaRPr>
-                    </a:p>
-                  </a:txBody>
-                  <a:tcPr marL="10197" marR="10197" marT="10197" marB="0" anchor="b"/>
-                </a:tc>
-                <a:tc>
-                  <a:txBody>
-                    <a:bodyPr/>
-                    <a:lstStyle/>
-                    <a:p>
-                      <a:pPr algn="l" fontAlgn="b">
-                        <a:buNone/>
-                      </a:pPr>
-                      <a:r>
-                        <a:rPr lang="pl-PL" sz="1500" u="none" strike="noStrike" dirty="0">
-                          <a:effectLst/>
-                        </a:rPr>
-                        <a:t> </a:t>
-                      </a:r>
-                      <a:endParaRPr lang="pl-PL" sz="1500" b="0" i="0" u="none" strike="noStrike" dirty="0">
-                        <a:solidFill>
-                          <a:srgbClr val="000000"/>
-                        </a:solidFill>
-                        <a:effectLst/>
-                        <a:latin typeface="Aptos Narrow" panose="020B0004020202020204" pitchFamily="34" charset="0"/>
-                      </a:endParaRPr>
-                    </a:p>
-                  </a:txBody>
-                  <a:tcPr marL="10197" marR="10197" marT="10197" marB="0" anchor="b"/>
-                </a:tc>
-                <a:tc>
-                  <a:txBody>
-                    <a:bodyPr/>
-                    <a:lstStyle/>
-                    <a:p>
-                      <a:pPr algn="l" fontAlgn="b">
-                        <a:buNone/>
-                      </a:pPr>
-                      <a:r>
-                        <a:rPr lang="pl-PL" sz="1500" u="none" strike="noStrike" dirty="0">
-                          <a:effectLst/>
-                        </a:rPr>
-                        <a:t>Magnetometr 3 osiowy</a:t>
-                      </a:r>
-                      <a:endParaRPr lang="pl-PL" sz="1500" b="0" i="0" u="none" strike="noStrike" dirty="0">
-                        <a:solidFill>
-                          <a:srgbClr val="000000"/>
-                        </a:solidFill>
-                        <a:effectLst/>
-                        <a:latin typeface="Aptos Narrow" panose="020B0004020202020204" pitchFamily="34" charset="0"/>
-                      </a:endParaRPr>
-                    </a:p>
-                  </a:txBody>
-                  <a:tcPr marL="10197" marR="10197" marT="10197" marB="0" anchor="b"/>
-                </a:tc>
-                <a:extLst>
-                  <a:ext uri="{0D108BD9-81ED-4DB2-BD59-A6C34878D82A}">
-                    <a16:rowId xmlns:a16="http://schemas.microsoft.com/office/drawing/2014/main" val="736513526"/>
                   </a:ext>
                 </a:extLst>
               </a:tr>
@@ -8933,6 +8714,221 @@
 </file>
 
 <file path=ppt/slides/slide14.xml><?xml version="1.0" encoding="utf-8"?>
+<p:sld xmlns:a="http://schemas.openxmlformats.org/drawingml/2006/main" xmlns:r="http://schemas.openxmlformats.org/officeDocument/2006/relationships" xmlns:p="http://schemas.openxmlformats.org/presentationml/2006/main">
+  <p:cSld>
+    <p:spTree>
+      <p:nvGrpSpPr>
+        <p:cNvPr id="1" name="">
+          <a:extLst>
+            <a:ext uri="{FF2B5EF4-FFF2-40B4-BE49-F238E27FC236}">
+              <a16:creationId xmlns:a16="http://schemas.microsoft.com/office/drawing/2014/main" id="{1F9226F1-8105-AF4B-F4EE-57765E5E04DC}"/>
+            </a:ext>
+          </a:extLst>
+        </p:cNvPr>
+        <p:cNvGrpSpPr/>
+        <p:nvPr/>
+      </p:nvGrpSpPr>
+      <p:grpSpPr>
+        <a:xfrm>
+          <a:off x="0" y="0"/>
+          <a:ext cx="0" cy="0"/>
+          <a:chOff x="0" y="0"/>
+          <a:chExt cx="0" cy="0"/>
+        </a:xfrm>
+      </p:grpSpPr>
+      <p:sp>
+        <p:nvSpPr>
+          <p:cNvPr id="2" name="Title 1">
+            <a:extLst>
+              <a:ext uri="{FF2B5EF4-FFF2-40B4-BE49-F238E27FC236}">
+                <a16:creationId xmlns:a16="http://schemas.microsoft.com/office/drawing/2014/main" id="{0C88ED50-DC4F-A99D-6AFF-B83533A5395A}"/>
+              </a:ext>
+            </a:extLst>
+          </p:cNvPr>
+          <p:cNvSpPr>
+            <a:spLocks noGrp="1"/>
+          </p:cNvSpPr>
+          <p:nvPr>
+            <p:ph type="title"/>
+          </p:nvPr>
+        </p:nvSpPr>
+        <p:spPr>
+          <a:xfrm>
+            <a:off x="965201" y="1036674"/>
+            <a:ext cx="3689096" cy="3514364"/>
+          </a:xfrm>
+        </p:spPr>
+        <p:txBody>
+          <a:bodyPr vert="horz" lIns="91440" tIns="45720" rIns="91440" bIns="45720" rtlCol="0" anchor="b">
+            <a:normAutofit/>
+          </a:bodyPr>
+          <a:lstStyle/>
+          <a:p>
+            <a:pPr algn="r"/>
+            <a:r>
+              <a:rPr lang="en-US" sz="4000" kern="1200">
+                <a:solidFill>
+                  <a:schemeClr val="tx1"/>
+                </a:solidFill>
+                <a:latin typeface="+mj-lt"/>
+                <a:ea typeface="+mj-ea"/>
+                <a:cs typeface="+mj-cs"/>
+              </a:rPr>
+              <a:t>Środowisko programistyczne</a:t>
+            </a:r>
+          </a:p>
+        </p:txBody>
+      </p:sp>
+      <p:sp>
+        <p:nvSpPr>
+          <p:cNvPr id="3" name="Content Placeholder 2">
+            <a:extLst>
+              <a:ext uri="{FF2B5EF4-FFF2-40B4-BE49-F238E27FC236}">
+                <a16:creationId xmlns:a16="http://schemas.microsoft.com/office/drawing/2014/main" id="{85F67A21-E396-5F4C-1EAB-DB72382C2EA1}"/>
+              </a:ext>
+            </a:extLst>
+          </p:cNvPr>
+          <p:cNvSpPr>
+            <a:spLocks noGrp="1"/>
+          </p:cNvSpPr>
+          <p:nvPr>
+            <p:ph idx="1"/>
+          </p:nvPr>
+        </p:nvSpPr>
+        <p:spPr>
+          <a:xfrm>
+            <a:off x="965202" y="4582814"/>
+            <a:ext cx="3689094" cy="1312657"/>
+          </a:xfrm>
+        </p:spPr>
+        <p:txBody>
+          <a:bodyPr vert="horz" lIns="91440" tIns="45720" rIns="91440" bIns="45720" rtlCol="0" anchor="t">
+            <a:normAutofit/>
+          </a:bodyPr>
+          <a:lstStyle/>
+          <a:p>
+            <a:pPr marL="0" indent="0" algn="r">
+              <a:buNone/>
+            </a:pPr>
+            <a:r>
+              <a:rPr lang="pl-PL" sz="2000" kern="1200" dirty="0" err="1">
+                <a:solidFill>
+                  <a:schemeClr val="tx1"/>
+                </a:solidFill>
+                <a:latin typeface="+mn-lt"/>
+                <a:ea typeface="+mn-ea"/>
+                <a:cs typeface="+mn-cs"/>
+              </a:rPr>
+              <a:t>Eclipse</a:t>
+            </a:r>
+            <a:r>
+              <a:rPr lang="pl-PL" sz="2000" kern="1200" dirty="0">
+                <a:solidFill>
+                  <a:schemeClr val="tx1"/>
+                </a:solidFill>
+                <a:latin typeface="+mn-lt"/>
+                <a:ea typeface="+mn-ea"/>
+                <a:cs typeface="+mn-cs"/>
+              </a:rPr>
+              <a:t> </a:t>
+            </a:r>
+            <a:r>
+              <a:rPr lang="en-US" sz="2000" kern="1200" dirty="0">
+                <a:solidFill>
+                  <a:schemeClr val="tx1"/>
+                </a:solidFill>
+                <a:latin typeface="+mn-lt"/>
+                <a:ea typeface="+mn-ea"/>
+                <a:cs typeface="+mn-cs"/>
+              </a:rPr>
+              <a:t>+  </a:t>
+            </a:r>
+            <a:r>
+              <a:rPr lang="pl-PL" sz="2000" kern="1200" dirty="0" err="1">
+                <a:solidFill>
+                  <a:schemeClr val="tx1"/>
+                </a:solidFill>
+                <a:latin typeface="+mn-lt"/>
+                <a:ea typeface="+mn-ea"/>
+                <a:cs typeface="+mn-cs"/>
+              </a:rPr>
+              <a:t>STMCube</a:t>
+            </a:r>
+            <a:r>
+              <a:rPr lang="en-US" sz="2000" kern="1200" dirty="0">
+                <a:solidFill>
+                  <a:schemeClr val="tx1"/>
+                </a:solidFill>
+                <a:latin typeface="+mn-lt"/>
+                <a:ea typeface="+mn-ea"/>
+                <a:cs typeface="+mn-cs"/>
+              </a:rPr>
+              <a:t> </a:t>
+            </a:r>
+          </a:p>
+        </p:txBody>
+      </p:sp>
+      <p:pic>
+        <p:nvPicPr>
+          <p:cNvPr id="4" name="Picture 2" descr="STM32CubeIDE | Software - STMicroelectronics">
+            <a:extLst>
+              <a:ext uri="{FF2B5EF4-FFF2-40B4-BE49-F238E27FC236}">
+                <a16:creationId xmlns:a16="http://schemas.microsoft.com/office/drawing/2014/main" id="{053FE510-B449-FADD-2C43-FEE47E424705}"/>
+              </a:ext>
+            </a:extLst>
+          </p:cNvPr>
+          <p:cNvPicPr>
+            <a:picLocks noChangeAspect="1" noChangeArrowheads="1"/>
+          </p:cNvPicPr>
+          <p:nvPr/>
+        </p:nvPicPr>
+        <p:blipFill>
+          <a:blip r:embed="rId2">
+            <a:extLst>
+              <a:ext uri="{28A0092B-C50C-407E-A947-70E740481C1C}">
+                <a14:useLocalDpi xmlns:a14="http://schemas.microsoft.com/office/drawing/2010/main" val="0"/>
+              </a:ext>
+            </a:extLst>
+          </a:blip>
+          <a:srcRect/>
+          <a:stretch>
+            <a:fillRect/>
+          </a:stretch>
+        </p:blipFill>
+        <p:spPr bwMode="auto">
+          <a:xfrm>
+            <a:off x="5034916" y="1426229"/>
+            <a:ext cx="6313170" cy="3156585"/>
+          </a:xfrm>
+          <a:prstGeom prst="rect">
+            <a:avLst/>
+          </a:prstGeom>
+          <a:noFill/>
+          <a:extLst>
+            <a:ext uri="{909E8E84-426E-40DD-AFC4-6F175D3DCCD1}">
+              <a14:hiddenFill xmlns:a14="http://schemas.microsoft.com/office/drawing/2010/main">
+                <a:solidFill>
+                  <a:srgbClr val="FFFFFF"/>
+                </a:solidFill>
+              </a14:hiddenFill>
+            </a:ext>
+          </a:extLst>
+        </p:spPr>
+      </p:pic>
+    </p:spTree>
+    <p:extLst>
+      <p:ext uri="{BB962C8B-B14F-4D97-AF65-F5344CB8AC3E}">
+        <p14:creationId xmlns:p14="http://schemas.microsoft.com/office/powerpoint/2010/main" val="3198758976"/>
+      </p:ext>
+    </p:extLst>
+  </p:cSld>
+  <p:clrMapOvr>
+    <a:masterClrMapping/>
+  </p:clrMapOvr>
+</p:sld>
+</file>
+
+<file path=ppt/slides/slide15.xml><?xml version="1.0" encoding="utf-8"?>
 <p:sld xmlns:a="http://schemas.openxmlformats.org/drawingml/2006/main" xmlns:r="http://schemas.openxmlformats.org/officeDocument/2006/relationships" xmlns:p="http://schemas.openxmlformats.org/presentationml/2006/main">
   <p:cSld>
     <p:bg>
@@ -13912,10 +13908,10 @@
       </p:sp>
       <p:pic>
         <p:nvPicPr>
-          <p:cNvPr id="7172" name="Picture 4" descr="Obrót png | PNGEgg">
+          <p:cNvPr id="2050" name="Picture 2" descr="Triple circular arrows symbol - Free arrows icons">
             <a:extLst>
               <a:ext uri="{FF2B5EF4-FFF2-40B4-BE49-F238E27FC236}">
-                <a16:creationId xmlns:a16="http://schemas.microsoft.com/office/drawing/2014/main" id="{FD8C128D-C447-E01F-EF28-AD9C7DBC5EED}"/>
+                <a16:creationId xmlns:a16="http://schemas.microsoft.com/office/drawing/2014/main" id="{E81C4042-35F0-3B79-EDFB-3F3CCF163D87}"/>
               </a:ext>
             </a:extLst>
           </p:cNvPr>
@@ -13939,8 +13935,8 @@
         </p:blipFill>
         <p:spPr bwMode="auto">
           <a:xfrm>
-            <a:off x="5403713" y="171390"/>
-            <a:ext cx="6515220" cy="6515220"/>
+            <a:off x="5954695" y="666750"/>
+            <a:ext cx="4876800" cy="4876800"/>
           </a:xfrm>
           <a:prstGeom prst="rect">
             <a:avLst/>
